--- a/report/Smart_Product_Intelligence_Final_Presentation.pptx
+++ b/report/Smart_Product_Intelligence_Final_Presentation.pptx
@@ -4,25 +4,28 @@
   <p:sldMasterIdLst>
     <p:sldMasterId id="2147483648" r:id="rId1"/>
   </p:sldMasterIdLst>
+  <p:notesMasterIdLst>
+    <p:notesMasterId r:id="rId18"/>
+  </p:notesMasterIdLst>
   <p:sldIdLst>
-    <p:sldId id="256" r:id="rId7"/>
-    <p:sldId id="257" r:id="rId9"/>
-    <p:sldId id="258" r:id="rId10"/>
-    <p:sldId id="259" r:id="rId11"/>
-    <p:sldId id="260" r:id="rId12"/>
-    <p:sldId id="261" r:id="rId13"/>
-    <p:sldId id="262" r:id="rId14"/>
-    <p:sldId id="263" r:id="rId15"/>
-    <p:sldId id="264" r:id="rId16"/>
-    <p:sldId id="265" r:id="rId17"/>
-    <p:sldId id="266" r:id="rId18"/>
-    <p:sldId id="267" r:id="rId19"/>
-    <p:sldId id="268" r:id="rId20"/>
-    <p:sldId id="269" r:id="rId21"/>
-    <p:sldId id="270" r:id="rId22"/>
-    <p:sldId id="271" r:id="rId23"/>
+    <p:sldId id="256" r:id="rId2"/>
+    <p:sldId id="257" r:id="rId3"/>
+    <p:sldId id="258" r:id="rId4"/>
+    <p:sldId id="259" r:id="rId5"/>
+    <p:sldId id="260" r:id="rId6"/>
+    <p:sldId id="261" r:id="rId7"/>
+    <p:sldId id="262" r:id="rId8"/>
+    <p:sldId id="263" r:id="rId9"/>
+    <p:sldId id="264" r:id="rId10"/>
+    <p:sldId id="265" r:id="rId11"/>
+    <p:sldId id="266" r:id="rId12"/>
+    <p:sldId id="267" r:id="rId13"/>
+    <p:sldId id="268" r:id="rId14"/>
+    <p:sldId id="269" r:id="rId15"/>
+    <p:sldId id="270" r:id="rId16"/>
+    <p:sldId id="271" r:id="rId17"/>
   </p:sldIdLst>
-  <p:sldSz cx="12191695" cy="6858000" type="screen4x3"/>
+  <p:sldSz cx="12192000" cy="6858000"/>
   <p:notesSz cx="6858000" cy="9144000"/>
   <p:defaultTextStyle>
     <a:defPPr>
@@ -119,11 +122,39 @@
       </a:defRPr>
     </a:lvl9pPr>
   </p:defaultTextStyle>
+  <p:extLst>
+    <p:ext uri="{EFAFB233-063F-42B5-8137-9DF3F51BA10A}">
+      <p15:sldGuideLst xmlns:p15="http://schemas.microsoft.com/office/powerpoint/2012/main">
+        <p15:guide id="1" orient="horz" pos="2160">
+          <p15:clr>
+            <a:srgbClr val="A4A3A4"/>
+          </p15:clr>
+        </p15:guide>
+        <p15:guide id="2" pos="2880">
+          <p15:clr>
+            <a:srgbClr val="A4A3A4"/>
+          </p15:clr>
+        </p15:guide>
+      </p15:sldGuideLst>
+    </p:ext>
+  </p:extLst>
 </p:presentation>
 </file>
 
+<file path=ppt/commentAuthors.xml><?xml version="1.0" encoding="utf-8"?>
+<p:cmAuthorLst xmlns:a="http://schemas.openxmlformats.org/drawingml/2006/main" xmlns:r="http://schemas.openxmlformats.org/officeDocument/2006/relationships" xmlns:p="http://schemas.openxmlformats.org/presentationml/2006/main">
+  <p:cmAuthor id="1" name="TAHA GURVARDAR" initials="TG" lastIdx="1" clrIdx="0">
+    <p:extLst>
+      <p:ext uri="{19B8F6BF-5375-455C-9EA6-DF929625EA0E}">
+        <p15:presenceInfo xmlns:p15="http://schemas.microsoft.com/office/powerpoint/2012/main" userId="56f3fdef014c05b8" providerId="Windows Live"/>
+      </p:ext>
+    </p:extLst>
+  </p:cmAuthor>
+</p:cmAuthorLst>
+</file>
+
 <file path=ppt/notesMasters/notesMaster1.xml><?xml version="1.0" encoding="utf-8"?>
-<p:notesMaster xmlns:a="http://schemas.openxmlformats.org/drawingml/2006/main" xmlns:p="http://schemas.openxmlformats.org/presentationml/2006/main" xmlns:r="http://schemas.openxmlformats.org/officeDocument/2006/relationships">
+<p:notesMaster xmlns:a="http://schemas.openxmlformats.org/drawingml/2006/main" xmlns:r="http://schemas.openxmlformats.org/officeDocument/2006/relationships" xmlns:p="http://schemas.openxmlformats.org/presentationml/2006/main">
   <p:cSld>
     <p:bg>
       <p:bgRef idx="1001">
@@ -144,241 +175,16 @@
           <a:chExt cx="0" cy="0"/>
         </a:xfrm>
       </p:grpSpPr>
-      <p:sp>
-        <p:nvSpPr>
-          <p:cNvPr id="2" name="Header Placeholder 1"/>
-          <p:cNvSpPr>
-            <a:spLocks noGrp="1"/>
-          </p:cNvSpPr>
-          <p:nvPr>
-            <p:ph type="hdr" sz="quarter"/>
-          </p:nvPr>
-        </p:nvSpPr>
-        <p:spPr>
-          <a:xfrm>
-            <a:off x="0" y="0"/>
-            <a:ext cx="2971800" cy="457200"/>
-          </a:xfrm>
-          <a:prstGeom prst="rect">
-            <a:avLst/>
-          </a:prstGeom>
-        </p:spPr>
-        <p:txBody>
-          <a:bodyPr vert="horz" lIns="91440" tIns="45720" rIns="91440" bIns="45720" rtlCol="0"/>
-          <a:lstStyle>
-            <a:lvl1pPr algn="l">
-              <a:defRPr sz="1200"/>
-            </a:lvl1pPr>
-          </a:lstStyle>
-          <a:p>
-            <a:endParaRPr lang="en-US"/>
-          </a:p>
-        </p:txBody>
-      </p:sp>
-      <p:sp>
-        <p:nvSpPr>
-          <p:cNvPr id="3" name="Date Placeholder 2"/>
-          <p:cNvSpPr>
-            <a:spLocks noGrp="1"/>
-          </p:cNvSpPr>
-          <p:nvPr>
-            <p:ph type="dt" idx="1"/>
-          </p:nvPr>
-        </p:nvSpPr>
-        <p:spPr>
-          <a:xfrm>
-            <a:off x="3884613" y="0"/>
-            <a:ext cx="2971800" cy="457200"/>
-          </a:xfrm>
-          <a:prstGeom prst="rect">
-            <a:avLst/>
-          </a:prstGeom>
-        </p:spPr>
-        <p:txBody>
-          <a:bodyPr vert="horz" lIns="91440" tIns="45720" rIns="91440" bIns="45720" rtlCol="0"/>
-          <a:lstStyle>
-            <a:lvl1pPr algn="r">
-              <a:defRPr sz="1200"/>
-            </a:lvl1pPr>
-          </a:lstStyle>
-          <a:p>
-            <a:fld id="{0F89C1C7-3DCD-1040-A9CF-14679D8B5DDD}" type="datetimeFigureOut">
-              <a:rPr lang="en-US" smtClean="0"/>
-              <a:t>10/17/16</a:t>
-            </a:fld>
-            <a:endParaRPr lang="en-US"/>
-          </a:p>
-        </p:txBody>
-      </p:sp>
-      <p:sp>
-        <p:nvSpPr>
-          <p:cNvPr id="4" name="Slide Image Placeholder 3"/>
-          <p:cNvSpPr>
-            <a:spLocks noGrp="1" noRot="1" noChangeAspect="1"/>
-          </p:cNvSpPr>
-          <p:nvPr>
-            <p:ph type="sldImg" idx="2"/>
-          </p:nvPr>
-        </p:nvSpPr>
-        <p:spPr>
-          <a:xfrm>
-            <a:off x="1143000" y="685800"/>
-            <a:ext cx="4572000" cy="3429000"/>
-          </a:xfrm>
-          <a:prstGeom prst="rect">
-            <a:avLst/>
-          </a:prstGeom>
-          <a:noFill/>
-          <a:ln w="12700">
-            <a:solidFill>
-              <a:prstClr val="black"/>
-            </a:solidFill>
-          </a:ln>
-        </p:spPr>
-        <p:txBody>
-          <a:bodyPr vert="horz" lIns="91440" tIns="45720" rIns="91440" bIns="45720" rtlCol="0" anchor="ctr"/>
-          <a:lstStyle/>
-          <a:p>
-            <a:endParaRPr lang="en-US"/>
-          </a:p>
-        </p:txBody>
-      </p:sp>
-      <p:sp>
-        <p:nvSpPr>
-          <p:cNvPr id="5" name="Notes Placeholder 4"/>
-          <p:cNvSpPr>
-            <a:spLocks noGrp="1"/>
-          </p:cNvSpPr>
-          <p:nvPr>
-            <p:ph type="body" sz="quarter" idx="3"/>
-          </p:nvPr>
-        </p:nvSpPr>
-        <p:spPr>
-          <a:xfrm>
-            <a:off x="685800" y="4343400"/>
-            <a:ext cx="5486400" cy="4114800"/>
-          </a:xfrm>
-          <a:prstGeom prst="rect">
-            <a:avLst/>
-          </a:prstGeom>
-        </p:spPr>
-        <p:txBody>
-          <a:bodyPr vert="horz" lIns="91440" tIns="45720" rIns="91440" bIns="45720" rtlCol="0"/>
-          <a:lstStyle/>
-          <a:p>
-            <a:pPr lvl="0"/>
-            <a:r>
-              <a:rPr lang="en-US" smtClean="0"/>
-              <a:t>Click to edit Master text styles</a:t>
-            </a:r>
-          </a:p>
-          <a:p>
-            <a:pPr lvl="1"/>
-            <a:r>
-              <a:rPr lang="en-US" smtClean="0"/>
-              <a:t>Second level</a:t>
-            </a:r>
-          </a:p>
-          <a:p>
-            <a:pPr lvl="2"/>
-            <a:r>
-              <a:rPr lang="en-US" smtClean="0"/>
-              <a:t>Third level</a:t>
-            </a:r>
-          </a:p>
-          <a:p>
-            <a:pPr lvl="3"/>
-            <a:r>
-              <a:rPr lang="en-US" smtClean="0"/>
-              <a:t>Fourth level</a:t>
-            </a:r>
-          </a:p>
-          <a:p>
-            <a:pPr lvl="4"/>
-            <a:r>
-              <a:rPr lang="en-US" smtClean="0"/>
-              <a:t>Fifth level</a:t>
-            </a:r>
-            <a:endParaRPr lang="en-US"/>
-          </a:p>
-        </p:txBody>
-      </p:sp>
-      <p:sp>
-        <p:nvSpPr>
-          <p:cNvPr id="6" name="Footer Placeholder 5"/>
-          <p:cNvSpPr>
-            <a:spLocks noGrp="1"/>
-          </p:cNvSpPr>
-          <p:nvPr>
-            <p:ph type="ftr" sz="quarter" idx="4"/>
-          </p:nvPr>
-        </p:nvSpPr>
-        <p:spPr>
-          <a:xfrm>
-            <a:off x="0" y="8685213"/>
-            <a:ext cx="2971800" cy="457200"/>
-          </a:xfrm>
-          <a:prstGeom prst="rect">
-            <a:avLst/>
-          </a:prstGeom>
-        </p:spPr>
-        <p:txBody>
-          <a:bodyPr vert="horz" lIns="91440" tIns="45720" rIns="91440" bIns="45720" rtlCol="0" anchor="b"/>
-          <a:lstStyle>
-            <a:lvl1pPr algn="l">
-              <a:defRPr sz="1200"/>
-            </a:lvl1pPr>
-          </a:lstStyle>
-          <a:p>
-            <a:endParaRPr lang="en-US"/>
-          </a:p>
-        </p:txBody>
-      </p:sp>
-      <p:sp>
-        <p:nvSpPr>
-          <p:cNvPr id="7" name="Slide Number Placeholder 6"/>
-          <p:cNvSpPr>
-            <a:spLocks noGrp="1"/>
-          </p:cNvSpPr>
-          <p:nvPr>
-            <p:ph type="sldNum" sz="quarter" idx="5"/>
-          </p:nvPr>
-        </p:nvSpPr>
-        <p:spPr>
-          <a:xfrm>
-            <a:off x="3884613" y="8685213"/>
-            <a:ext cx="2971800" cy="457200"/>
-          </a:xfrm>
-          <a:prstGeom prst="rect">
-            <a:avLst/>
-          </a:prstGeom>
-        </p:spPr>
-        <p:txBody>
-          <a:bodyPr vert="horz" lIns="91440" tIns="45720" rIns="91440" bIns="45720" rtlCol="0" anchor="b"/>
-          <a:lstStyle>
-            <a:lvl1pPr algn="r">
-              <a:defRPr sz="1200"/>
-            </a:lvl1pPr>
-          </a:lstStyle>
-          <a:p>
-            <a:fld id="{BB5E49A5-4136-284D-997B-48E1D791AD67}" type="slidenum">
-              <a:rPr lang="en-US" smtClean="0"/>
-              <a:t>‹#›</a:t>
-            </a:fld>
-            <a:endParaRPr lang="en-US"/>
-          </a:p>
-        </p:txBody>
-      </p:sp>
     </p:spTree>
     <p:extLst>
       <p:ext uri="{BB962C8B-B14F-4D97-AF65-F5344CB8AC3E}">
-        <p14:creationId xmlns:p14="http://schemas.microsoft.com/office/powerpoint/2010/main" val="2623252185"/>
+        <p14:creationId xmlns:p14="http://schemas.microsoft.com/office/powerpoint/2010/main" val="3851932650"/>
       </p:ext>
     </p:extLst>
   </p:cSld>
   <p:clrMap bg1="lt1" tx1="dk1" bg2="lt2" tx2="dk2" accent1="accent1" accent2="accent2" accent3="accent3" accent4="accent4" accent5="accent5" accent6="accent6" hlink="hlink" folHlink="folHlink"/>
   <p:notesStyle>
-    <a:lvl1pPr marL="0" algn="l" defTabSz="457200" rtl="0" eaLnBrk="1" latinLnBrk="0" hangingPunct="1">
+    <a:lvl1pPr marL="0" algn="l" defTabSz="914400" rtl="0" eaLnBrk="1" latinLnBrk="0" hangingPunct="1">
       <a:defRPr sz="1200" kern="1200">
         <a:solidFill>
           <a:schemeClr val="tx1"/>
@@ -388,7 +194,7 @@
         <a:cs typeface="+mn-cs"/>
       </a:defRPr>
     </a:lvl1pPr>
-    <a:lvl2pPr marL="457200" algn="l" defTabSz="457200" rtl="0" eaLnBrk="1" latinLnBrk="0" hangingPunct="1">
+    <a:lvl2pPr marL="457200" algn="l" defTabSz="914400" rtl="0" eaLnBrk="1" latinLnBrk="0" hangingPunct="1">
       <a:defRPr sz="1200" kern="1200">
         <a:solidFill>
           <a:schemeClr val="tx1"/>
@@ -398,7 +204,7 @@
         <a:cs typeface="+mn-cs"/>
       </a:defRPr>
     </a:lvl2pPr>
-    <a:lvl3pPr marL="914400" algn="l" defTabSz="457200" rtl="0" eaLnBrk="1" latinLnBrk="0" hangingPunct="1">
+    <a:lvl3pPr marL="914400" algn="l" defTabSz="914400" rtl="0" eaLnBrk="1" latinLnBrk="0" hangingPunct="1">
       <a:defRPr sz="1200" kern="1200">
         <a:solidFill>
           <a:schemeClr val="tx1"/>
@@ -408,7 +214,7 @@
         <a:cs typeface="+mn-cs"/>
       </a:defRPr>
     </a:lvl3pPr>
-    <a:lvl4pPr marL="1371600" algn="l" defTabSz="457200" rtl="0" eaLnBrk="1" latinLnBrk="0" hangingPunct="1">
+    <a:lvl4pPr marL="1371600" algn="l" defTabSz="914400" rtl="0" eaLnBrk="1" latinLnBrk="0" hangingPunct="1">
       <a:defRPr sz="1200" kern="1200">
         <a:solidFill>
           <a:schemeClr val="tx1"/>
@@ -418,7 +224,7 @@
         <a:cs typeface="+mn-cs"/>
       </a:defRPr>
     </a:lvl4pPr>
-    <a:lvl5pPr marL="1828800" algn="l" defTabSz="457200" rtl="0" eaLnBrk="1" latinLnBrk="0" hangingPunct="1">
+    <a:lvl5pPr marL="1828800" algn="l" defTabSz="914400" rtl="0" eaLnBrk="1" latinLnBrk="0" hangingPunct="1">
       <a:defRPr sz="1200" kern="1200">
         <a:solidFill>
           <a:schemeClr val="tx1"/>
@@ -428,7 +234,7 @@
         <a:cs typeface="+mn-cs"/>
       </a:defRPr>
     </a:lvl5pPr>
-    <a:lvl6pPr marL="2286000" algn="l" defTabSz="457200" rtl="0" eaLnBrk="1" latinLnBrk="0" hangingPunct="1">
+    <a:lvl6pPr marL="2286000" algn="l" defTabSz="914400" rtl="0" eaLnBrk="1" latinLnBrk="0" hangingPunct="1">
       <a:defRPr sz="1200" kern="1200">
         <a:solidFill>
           <a:schemeClr val="tx1"/>
@@ -438,7 +244,7 @@
         <a:cs typeface="+mn-cs"/>
       </a:defRPr>
     </a:lvl6pPr>
-    <a:lvl7pPr marL="2743200" algn="l" defTabSz="457200" rtl="0" eaLnBrk="1" latinLnBrk="0" hangingPunct="1">
+    <a:lvl7pPr marL="2743200" algn="l" defTabSz="914400" rtl="0" eaLnBrk="1" latinLnBrk="0" hangingPunct="1">
       <a:defRPr sz="1200" kern="1200">
         <a:solidFill>
           <a:schemeClr val="tx1"/>
@@ -448,7 +254,7 @@
         <a:cs typeface="+mn-cs"/>
       </a:defRPr>
     </a:lvl7pPr>
-    <a:lvl8pPr marL="3200400" algn="l" defTabSz="457200" rtl="0" eaLnBrk="1" latinLnBrk="0" hangingPunct="1">
+    <a:lvl8pPr marL="3200400" algn="l" defTabSz="914400" rtl="0" eaLnBrk="1" latinLnBrk="0" hangingPunct="1">
       <a:defRPr sz="1200" kern="1200">
         <a:solidFill>
           <a:schemeClr val="tx1"/>
@@ -458,7 +264,7 @@
         <a:cs typeface="+mn-cs"/>
       </a:defRPr>
     </a:lvl8pPr>
-    <a:lvl9pPr marL="3657600" algn="l" defTabSz="457200" rtl="0" eaLnBrk="1" latinLnBrk="0" hangingPunct="1">
+    <a:lvl9pPr marL="3657600" algn="l" defTabSz="914400" rtl="0" eaLnBrk="1" latinLnBrk="0" hangingPunct="1">
       <a:defRPr sz="1200" kern="1200">
         <a:solidFill>
           <a:schemeClr val="tx1"/>
@@ -473,7 +279,7 @@
 </file>
 
 <file path=ppt/notesSlides/notesSlide1.xml><?xml version="1.0" encoding="utf-8"?>
-<p:notes xmlns:a="http://schemas.openxmlformats.org/drawingml/2006/main" xmlns:p="http://schemas.openxmlformats.org/presentationml/2006/main" xmlns:r="http://schemas.openxmlformats.org/officeDocument/2006/relationships">
+<p:notes xmlns:a="http://schemas.openxmlformats.org/drawingml/2006/main" xmlns:r="http://schemas.openxmlformats.org/officeDocument/2006/relationships" xmlns:p="http://schemas.openxmlformats.org/presentationml/2006/main">
   <p:cSld>
     <p:spTree>
       <p:nvGrpSpPr>
@@ -493,7 +299,7 @@
         <p:nvSpPr>
           <p:cNvPr id="2" name="Slide Image Placeholder 1"/>
           <p:cNvSpPr>
-            <a:spLocks noGrp="1"/>
+            <a:spLocks noGrp="1" noRot="1" noChangeAspect="1"/>
           </p:cNvSpPr>
           <p:nvPr>
             <p:ph type="sldImg" idx="2"/>
@@ -508,7 +314,7 @@
             <a:spLocks noGrp="1"/>
           </p:cNvSpPr>
           <p:nvPr>
-            <p:ph type="body" idx="3" sz="quarter"/>
+            <p:ph type="body" sz="quarter" idx="3"/>
           </p:nvPr>
         </p:nvSpPr>
         <p:spPr/>
@@ -529,7 +335,7 @@
             <a:spLocks noGrp="1"/>
           </p:cNvSpPr>
           <p:nvPr>
-            <p:ph type="sldNum" idx="5" sz="quarter"/>
+            <p:ph type="sldNum" sz="quarter" idx="5"/>
           </p:nvPr>
         </p:nvSpPr>
         <p:spPr/>
@@ -543,7 +349,7 @@
 </file>
 
 <file path=ppt/notesSlides/notesSlide10.xml><?xml version="1.0" encoding="utf-8"?>
-<p:notes xmlns:a="http://schemas.openxmlformats.org/drawingml/2006/main" xmlns:p="http://schemas.openxmlformats.org/presentationml/2006/main" xmlns:r="http://schemas.openxmlformats.org/officeDocument/2006/relationships">
+<p:notes xmlns:a="http://schemas.openxmlformats.org/drawingml/2006/main" xmlns:r="http://schemas.openxmlformats.org/officeDocument/2006/relationships" xmlns:p="http://schemas.openxmlformats.org/presentationml/2006/main">
   <p:cSld>
     <p:spTree>
       <p:nvGrpSpPr>
@@ -563,7 +369,7 @@
         <p:nvSpPr>
           <p:cNvPr id="2" name="Slide Image Placeholder 1"/>
           <p:cNvSpPr>
-            <a:spLocks noGrp="1"/>
+            <a:spLocks noGrp="1" noRot="1" noChangeAspect="1"/>
           </p:cNvSpPr>
           <p:nvPr>
             <p:ph type="sldImg" idx="2"/>
@@ -578,7 +384,7 @@
             <a:spLocks noGrp="1"/>
           </p:cNvSpPr>
           <p:nvPr>
-            <p:ph type="body" idx="3" sz="quarter"/>
+            <p:ph type="body" sz="quarter" idx="3"/>
           </p:nvPr>
         </p:nvSpPr>
         <p:spPr/>
@@ -599,7 +405,7 @@
             <a:spLocks noGrp="1"/>
           </p:cNvSpPr>
           <p:nvPr>
-            <p:ph type="sldNum" idx="5" sz="quarter"/>
+            <p:ph type="sldNum" sz="quarter" idx="5"/>
           </p:nvPr>
         </p:nvSpPr>
         <p:spPr/>
@@ -613,7 +419,7 @@
 </file>
 
 <file path=ppt/notesSlides/notesSlide11.xml><?xml version="1.0" encoding="utf-8"?>
-<p:notes xmlns:a="http://schemas.openxmlformats.org/drawingml/2006/main" xmlns:p="http://schemas.openxmlformats.org/presentationml/2006/main" xmlns:r="http://schemas.openxmlformats.org/officeDocument/2006/relationships">
+<p:notes xmlns:a="http://schemas.openxmlformats.org/drawingml/2006/main" xmlns:r="http://schemas.openxmlformats.org/officeDocument/2006/relationships" xmlns:p="http://schemas.openxmlformats.org/presentationml/2006/main">
   <p:cSld>
     <p:spTree>
       <p:nvGrpSpPr>
@@ -633,7 +439,7 @@
         <p:nvSpPr>
           <p:cNvPr id="2" name="Slide Image Placeholder 1"/>
           <p:cNvSpPr>
-            <a:spLocks noGrp="1"/>
+            <a:spLocks noGrp="1" noRot="1" noChangeAspect="1"/>
           </p:cNvSpPr>
           <p:nvPr>
             <p:ph type="sldImg" idx="2"/>
@@ -648,7 +454,7 @@
             <a:spLocks noGrp="1"/>
           </p:cNvSpPr>
           <p:nvPr>
-            <p:ph type="body" idx="3" sz="quarter"/>
+            <p:ph type="body" sz="quarter" idx="3"/>
           </p:nvPr>
         </p:nvSpPr>
         <p:spPr/>
@@ -669,7 +475,7 @@
             <a:spLocks noGrp="1"/>
           </p:cNvSpPr>
           <p:nvPr>
-            <p:ph type="sldNum" idx="5" sz="quarter"/>
+            <p:ph type="sldNum" sz="quarter" idx="5"/>
           </p:nvPr>
         </p:nvSpPr>
         <p:spPr/>
@@ -683,7 +489,7 @@
 </file>
 
 <file path=ppt/notesSlides/notesSlide12.xml><?xml version="1.0" encoding="utf-8"?>
-<p:notes xmlns:a="http://schemas.openxmlformats.org/drawingml/2006/main" xmlns:p="http://schemas.openxmlformats.org/presentationml/2006/main" xmlns:r="http://schemas.openxmlformats.org/officeDocument/2006/relationships">
+<p:notes xmlns:a="http://schemas.openxmlformats.org/drawingml/2006/main" xmlns:r="http://schemas.openxmlformats.org/officeDocument/2006/relationships" xmlns:p="http://schemas.openxmlformats.org/presentationml/2006/main">
   <p:cSld>
     <p:spTree>
       <p:nvGrpSpPr>
@@ -703,7 +509,7 @@
         <p:nvSpPr>
           <p:cNvPr id="2" name="Slide Image Placeholder 1"/>
           <p:cNvSpPr>
-            <a:spLocks noGrp="1"/>
+            <a:spLocks noGrp="1" noRot="1" noChangeAspect="1"/>
           </p:cNvSpPr>
           <p:nvPr>
             <p:ph type="sldImg" idx="2"/>
@@ -718,7 +524,7 @@
             <a:spLocks noGrp="1"/>
           </p:cNvSpPr>
           <p:nvPr>
-            <p:ph type="body" idx="3" sz="quarter"/>
+            <p:ph type="body" sz="quarter" idx="3"/>
           </p:nvPr>
         </p:nvSpPr>
         <p:spPr/>
@@ -739,7 +545,7 @@
             <a:spLocks noGrp="1"/>
           </p:cNvSpPr>
           <p:nvPr>
-            <p:ph type="sldNum" idx="5" sz="quarter"/>
+            <p:ph type="sldNum" sz="quarter" idx="5"/>
           </p:nvPr>
         </p:nvSpPr>
         <p:spPr/>
@@ -753,7 +559,7 @@
 </file>
 
 <file path=ppt/notesSlides/notesSlide13.xml><?xml version="1.0" encoding="utf-8"?>
-<p:notes xmlns:a="http://schemas.openxmlformats.org/drawingml/2006/main" xmlns:p="http://schemas.openxmlformats.org/presentationml/2006/main" xmlns:r="http://schemas.openxmlformats.org/officeDocument/2006/relationships">
+<p:notes xmlns:a="http://schemas.openxmlformats.org/drawingml/2006/main" xmlns:r="http://schemas.openxmlformats.org/officeDocument/2006/relationships" xmlns:p="http://schemas.openxmlformats.org/presentationml/2006/main">
   <p:cSld>
     <p:spTree>
       <p:nvGrpSpPr>
@@ -773,7 +579,7 @@
         <p:nvSpPr>
           <p:cNvPr id="2" name="Slide Image Placeholder 1"/>
           <p:cNvSpPr>
-            <a:spLocks noGrp="1"/>
+            <a:spLocks noGrp="1" noRot="1" noChangeAspect="1"/>
           </p:cNvSpPr>
           <p:nvPr>
             <p:ph type="sldImg" idx="2"/>
@@ -788,7 +594,7 @@
             <a:spLocks noGrp="1"/>
           </p:cNvSpPr>
           <p:nvPr>
-            <p:ph type="body" idx="3" sz="quarter"/>
+            <p:ph type="body" sz="quarter" idx="3"/>
           </p:nvPr>
         </p:nvSpPr>
         <p:spPr/>
@@ -809,7 +615,7 @@
             <a:spLocks noGrp="1"/>
           </p:cNvSpPr>
           <p:nvPr>
-            <p:ph type="sldNum" idx="5" sz="quarter"/>
+            <p:ph type="sldNum" sz="quarter" idx="5"/>
           </p:nvPr>
         </p:nvSpPr>
         <p:spPr/>
@@ -823,7 +629,7 @@
 </file>
 
 <file path=ppt/notesSlides/notesSlide14.xml><?xml version="1.0" encoding="utf-8"?>
-<p:notes xmlns:a="http://schemas.openxmlformats.org/drawingml/2006/main" xmlns:p="http://schemas.openxmlformats.org/presentationml/2006/main" xmlns:r="http://schemas.openxmlformats.org/officeDocument/2006/relationships">
+<p:notes xmlns:a="http://schemas.openxmlformats.org/drawingml/2006/main" xmlns:r="http://schemas.openxmlformats.org/officeDocument/2006/relationships" xmlns:p="http://schemas.openxmlformats.org/presentationml/2006/main">
   <p:cSld>
     <p:spTree>
       <p:nvGrpSpPr>
@@ -843,7 +649,7 @@
         <p:nvSpPr>
           <p:cNvPr id="2" name="Slide Image Placeholder 1"/>
           <p:cNvSpPr>
-            <a:spLocks noGrp="1"/>
+            <a:spLocks noGrp="1" noRot="1" noChangeAspect="1"/>
           </p:cNvSpPr>
           <p:nvPr>
             <p:ph type="sldImg" idx="2"/>
@@ -858,7 +664,7 @@
             <a:spLocks noGrp="1"/>
           </p:cNvSpPr>
           <p:nvPr>
-            <p:ph type="body" idx="3" sz="quarter"/>
+            <p:ph type="body" sz="quarter" idx="3"/>
           </p:nvPr>
         </p:nvSpPr>
         <p:spPr/>
@@ -879,7 +685,7 @@
             <a:spLocks noGrp="1"/>
           </p:cNvSpPr>
           <p:nvPr>
-            <p:ph type="sldNum" idx="5" sz="quarter"/>
+            <p:ph type="sldNum" sz="quarter" idx="5"/>
           </p:nvPr>
         </p:nvSpPr>
         <p:spPr/>
@@ -893,7 +699,7 @@
 </file>
 
 <file path=ppt/notesSlides/notesSlide15.xml><?xml version="1.0" encoding="utf-8"?>
-<p:notes xmlns:a="http://schemas.openxmlformats.org/drawingml/2006/main" xmlns:p="http://schemas.openxmlformats.org/presentationml/2006/main" xmlns:r="http://schemas.openxmlformats.org/officeDocument/2006/relationships">
+<p:notes xmlns:a="http://schemas.openxmlformats.org/drawingml/2006/main" xmlns:r="http://schemas.openxmlformats.org/officeDocument/2006/relationships" xmlns:p="http://schemas.openxmlformats.org/presentationml/2006/main">
   <p:cSld>
     <p:spTree>
       <p:nvGrpSpPr>
@@ -913,7 +719,7 @@
         <p:nvSpPr>
           <p:cNvPr id="2" name="Slide Image Placeholder 1"/>
           <p:cNvSpPr>
-            <a:spLocks noGrp="1"/>
+            <a:spLocks noGrp="1" noRot="1" noChangeAspect="1"/>
           </p:cNvSpPr>
           <p:nvPr>
             <p:ph type="sldImg" idx="2"/>
@@ -928,7 +734,7 @@
             <a:spLocks noGrp="1"/>
           </p:cNvSpPr>
           <p:nvPr>
-            <p:ph type="body" idx="3" sz="quarter"/>
+            <p:ph type="body" sz="quarter" idx="3"/>
           </p:nvPr>
         </p:nvSpPr>
         <p:spPr/>
@@ -949,7 +755,7 @@
             <a:spLocks noGrp="1"/>
           </p:cNvSpPr>
           <p:nvPr>
-            <p:ph type="sldNum" idx="5" sz="quarter"/>
+            <p:ph type="sldNum" sz="quarter" idx="5"/>
           </p:nvPr>
         </p:nvSpPr>
         <p:spPr/>
@@ -963,7 +769,7 @@
 </file>
 
 <file path=ppt/notesSlides/notesSlide16.xml><?xml version="1.0" encoding="utf-8"?>
-<p:notes xmlns:a="http://schemas.openxmlformats.org/drawingml/2006/main" xmlns:p="http://schemas.openxmlformats.org/presentationml/2006/main" xmlns:r="http://schemas.openxmlformats.org/officeDocument/2006/relationships">
+<p:notes xmlns:a="http://schemas.openxmlformats.org/drawingml/2006/main" xmlns:r="http://schemas.openxmlformats.org/officeDocument/2006/relationships" xmlns:p="http://schemas.openxmlformats.org/presentationml/2006/main">
   <p:cSld>
     <p:spTree>
       <p:nvGrpSpPr>
@@ -983,7 +789,7 @@
         <p:nvSpPr>
           <p:cNvPr id="2" name="Slide Image Placeholder 1"/>
           <p:cNvSpPr>
-            <a:spLocks noGrp="1"/>
+            <a:spLocks noGrp="1" noRot="1" noChangeAspect="1"/>
           </p:cNvSpPr>
           <p:nvPr>
             <p:ph type="sldImg" idx="2"/>
@@ -998,7 +804,7 @@
             <a:spLocks noGrp="1"/>
           </p:cNvSpPr>
           <p:nvPr>
-            <p:ph type="body" idx="3" sz="quarter"/>
+            <p:ph type="body" sz="quarter" idx="3"/>
           </p:nvPr>
         </p:nvSpPr>
         <p:spPr/>
@@ -1019,7 +825,7 @@
             <a:spLocks noGrp="1"/>
           </p:cNvSpPr>
           <p:nvPr>
-            <p:ph type="sldNum" idx="5" sz="quarter"/>
+            <p:ph type="sldNum" sz="quarter" idx="5"/>
           </p:nvPr>
         </p:nvSpPr>
         <p:spPr/>
@@ -1033,7 +839,7 @@
 </file>
 
 <file path=ppt/notesSlides/notesSlide2.xml><?xml version="1.0" encoding="utf-8"?>
-<p:notes xmlns:a="http://schemas.openxmlformats.org/drawingml/2006/main" xmlns:p="http://schemas.openxmlformats.org/presentationml/2006/main" xmlns:r="http://schemas.openxmlformats.org/officeDocument/2006/relationships">
+<p:notes xmlns:a="http://schemas.openxmlformats.org/drawingml/2006/main" xmlns:r="http://schemas.openxmlformats.org/officeDocument/2006/relationships" xmlns:p="http://schemas.openxmlformats.org/presentationml/2006/main">
   <p:cSld>
     <p:spTree>
       <p:nvGrpSpPr>
@@ -1053,7 +859,7 @@
         <p:nvSpPr>
           <p:cNvPr id="2" name="Slide Image Placeholder 1"/>
           <p:cNvSpPr>
-            <a:spLocks noGrp="1"/>
+            <a:spLocks noGrp="1" noRot="1" noChangeAspect="1"/>
           </p:cNvSpPr>
           <p:nvPr>
             <p:ph type="sldImg" idx="2"/>
@@ -1068,7 +874,7 @@
             <a:spLocks noGrp="1"/>
           </p:cNvSpPr>
           <p:nvPr>
-            <p:ph type="body" idx="3" sz="quarter"/>
+            <p:ph type="body" sz="quarter" idx="3"/>
           </p:nvPr>
         </p:nvSpPr>
         <p:spPr/>
@@ -1089,7 +895,7 @@
             <a:spLocks noGrp="1"/>
           </p:cNvSpPr>
           <p:nvPr>
-            <p:ph type="sldNum" idx="5" sz="quarter"/>
+            <p:ph type="sldNum" sz="quarter" idx="5"/>
           </p:nvPr>
         </p:nvSpPr>
         <p:spPr/>
@@ -1103,7 +909,7 @@
 </file>
 
 <file path=ppt/notesSlides/notesSlide3.xml><?xml version="1.0" encoding="utf-8"?>
-<p:notes xmlns:a="http://schemas.openxmlformats.org/drawingml/2006/main" xmlns:p="http://schemas.openxmlformats.org/presentationml/2006/main" xmlns:r="http://schemas.openxmlformats.org/officeDocument/2006/relationships">
+<p:notes xmlns:a="http://schemas.openxmlformats.org/drawingml/2006/main" xmlns:r="http://schemas.openxmlformats.org/officeDocument/2006/relationships" xmlns:p="http://schemas.openxmlformats.org/presentationml/2006/main">
   <p:cSld>
     <p:spTree>
       <p:nvGrpSpPr>
@@ -1123,7 +929,7 @@
         <p:nvSpPr>
           <p:cNvPr id="2" name="Slide Image Placeholder 1"/>
           <p:cNvSpPr>
-            <a:spLocks noGrp="1"/>
+            <a:spLocks noGrp="1" noRot="1" noChangeAspect="1"/>
           </p:cNvSpPr>
           <p:nvPr>
             <p:ph type="sldImg" idx="2"/>
@@ -1138,7 +944,7 @@
             <a:spLocks noGrp="1"/>
           </p:cNvSpPr>
           <p:nvPr>
-            <p:ph type="body" idx="3" sz="quarter"/>
+            <p:ph type="body" sz="quarter" idx="3"/>
           </p:nvPr>
         </p:nvSpPr>
         <p:spPr/>
@@ -1159,7 +965,7 @@
             <a:spLocks noGrp="1"/>
           </p:cNvSpPr>
           <p:nvPr>
-            <p:ph type="sldNum" idx="5" sz="quarter"/>
+            <p:ph type="sldNum" sz="quarter" idx="5"/>
           </p:nvPr>
         </p:nvSpPr>
         <p:spPr/>
@@ -1173,7 +979,7 @@
 </file>
 
 <file path=ppt/notesSlides/notesSlide4.xml><?xml version="1.0" encoding="utf-8"?>
-<p:notes xmlns:a="http://schemas.openxmlformats.org/drawingml/2006/main" xmlns:p="http://schemas.openxmlformats.org/presentationml/2006/main" xmlns:r="http://schemas.openxmlformats.org/officeDocument/2006/relationships">
+<p:notes xmlns:a="http://schemas.openxmlformats.org/drawingml/2006/main" xmlns:r="http://schemas.openxmlformats.org/officeDocument/2006/relationships" xmlns:p="http://schemas.openxmlformats.org/presentationml/2006/main">
   <p:cSld>
     <p:spTree>
       <p:nvGrpSpPr>
@@ -1193,7 +999,7 @@
         <p:nvSpPr>
           <p:cNvPr id="2" name="Slide Image Placeholder 1"/>
           <p:cNvSpPr>
-            <a:spLocks noGrp="1"/>
+            <a:spLocks noGrp="1" noRot="1" noChangeAspect="1"/>
           </p:cNvSpPr>
           <p:nvPr>
             <p:ph type="sldImg" idx="2"/>
@@ -1208,7 +1014,7 @@
             <a:spLocks noGrp="1"/>
           </p:cNvSpPr>
           <p:nvPr>
-            <p:ph type="body" idx="3" sz="quarter"/>
+            <p:ph type="body" sz="quarter" idx="3"/>
           </p:nvPr>
         </p:nvSpPr>
         <p:spPr/>
@@ -1229,7 +1035,7 @@
             <a:spLocks noGrp="1"/>
           </p:cNvSpPr>
           <p:nvPr>
-            <p:ph type="sldNum" idx="5" sz="quarter"/>
+            <p:ph type="sldNum" sz="quarter" idx="5"/>
           </p:nvPr>
         </p:nvSpPr>
         <p:spPr/>
@@ -1243,7 +1049,7 @@
 </file>
 
 <file path=ppt/notesSlides/notesSlide5.xml><?xml version="1.0" encoding="utf-8"?>
-<p:notes xmlns:a="http://schemas.openxmlformats.org/drawingml/2006/main" xmlns:p="http://schemas.openxmlformats.org/presentationml/2006/main" xmlns:r="http://schemas.openxmlformats.org/officeDocument/2006/relationships">
+<p:notes xmlns:a="http://schemas.openxmlformats.org/drawingml/2006/main" xmlns:r="http://schemas.openxmlformats.org/officeDocument/2006/relationships" xmlns:p="http://schemas.openxmlformats.org/presentationml/2006/main">
   <p:cSld>
     <p:spTree>
       <p:nvGrpSpPr>
@@ -1263,7 +1069,7 @@
         <p:nvSpPr>
           <p:cNvPr id="2" name="Slide Image Placeholder 1"/>
           <p:cNvSpPr>
-            <a:spLocks noGrp="1"/>
+            <a:spLocks noGrp="1" noRot="1" noChangeAspect="1"/>
           </p:cNvSpPr>
           <p:nvPr>
             <p:ph type="sldImg" idx="2"/>
@@ -1278,7 +1084,7 @@
             <a:spLocks noGrp="1"/>
           </p:cNvSpPr>
           <p:nvPr>
-            <p:ph type="body" idx="3" sz="quarter"/>
+            <p:ph type="body" sz="quarter" idx="3"/>
           </p:nvPr>
         </p:nvSpPr>
         <p:spPr/>
@@ -1299,7 +1105,7 @@
             <a:spLocks noGrp="1"/>
           </p:cNvSpPr>
           <p:nvPr>
-            <p:ph type="sldNum" idx="5" sz="quarter"/>
+            <p:ph type="sldNum" sz="quarter" idx="5"/>
           </p:nvPr>
         </p:nvSpPr>
         <p:spPr/>
@@ -1313,7 +1119,7 @@
 </file>
 
 <file path=ppt/notesSlides/notesSlide6.xml><?xml version="1.0" encoding="utf-8"?>
-<p:notes xmlns:a="http://schemas.openxmlformats.org/drawingml/2006/main" xmlns:p="http://schemas.openxmlformats.org/presentationml/2006/main" xmlns:r="http://schemas.openxmlformats.org/officeDocument/2006/relationships">
+<p:notes xmlns:a="http://schemas.openxmlformats.org/drawingml/2006/main" xmlns:r="http://schemas.openxmlformats.org/officeDocument/2006/relationships" xmlns:p="http://schemas.openxmlformats.org/presentationml/2006/main">
   <p:cSld>
     <p:spTree>
       <p:nvGrpSpPr>
@@ -1333,7 +1139,7 @@
         <p:nvSpPr>
           <p:cNvPr id="2" name="Slide Image Placeholder 1"/>
           <p:cNvSpPr>
-            <a:spLocks noGrp="1"/>
+            <a:spLocks noGrp="1" noRot="1" noChangeAspect="1"/>
           </p:cNvSpPr>
           <p:nvPr>
             <p:ph type="sldImg" idx="2"/>
@@ -1348,7 +1154,7 @@
             <a:spLocks noGrp="1"/>
           </p:cNvSpPr>
           <p:nvPr>
-            <p:ph type="body" idx="3" sz="quarter"/>
+            <p:ph type="body" sz="quarter" idx="3"/>
           </p:nvPr>
         </p:nvSpPr>
         <p:spPr/>
@@ -1369,7 +1175,7 @@
             <a:spLocks noGrp="1"/>
           </p:cNvSpPr>
           <p:nvPr>
-            <p:ph type="sldNum" idx="5" sz="quarter"/>
+            <p:ph type="sldNum" sz="quarter" idx="5"/>
           </p:nvPr>
         </p:nvSpPr>
         <p:spPr/>
@@ -1383,7 +1189,7 @@
 </file>
 
 <file path=ppt/notesSlides/notesSlide7.xml><?xml version="1.0" encoding="utf-8"?>
-<p:notes xmlns:a="http://schemas.openxmlformats.org/drawingml/2006/main" xmlns:p="http://schemas.openxmlformats.org/presentationml/2006/main" xmlns:r="http://schemas.openxmlformats.org/officeDocument/2006/relationships">
+<p:notes xmlns:a="http://schemas.openxmlformats.org/drawingml/2006/main" xmlns:r="http://schemas.openxmlformats.org/officeDocument/2006/relationships" xmlns:p="http://schemas.openxmlformats.org/presentationml/2006/main">
   <p:cSld>
     <p:spTree>
       <p:nvGrpSpPr>
@@ -1403,7 +1209,7 @@
         <p:nvSpPr>
           <p:cNvPr id="2" name="Slide Image Placeholder 1"/>
           <p:cNvSpPr>
-            <a:spLocks noGrp="1"/>
+            <a:spLocks noGrp="1" noRot="1" noChangeAspect="1"/>
           </p:cNvSpPr>
           <p:nvPr>
             <p:ph type="sldImg" idx="2"/>
@@ -1418,7 +1224,7 @@
             <a:spLocks noGrp="1"/>
           </p:cNvSpPr>
           <p:nvPr>
-            <p:ph type="body" idx="3" sz="quarter"/>
+            <p:ph type="body" sz="quarter" idx="3"/>
           </p:nvPr>
         </p:nvSpPr>
         <p:spPr/>
@@ -1439,7 +1245,7 @@
             <a:spLocks noGrp="1"/>
           </p:cNvSpPr>
           <p:nvPr>
-            <p:ph type="sldNum" idx="5" sz="quarter"/>
+            <p:ph type="sldNum" sz="quarter" idx="5"/>
           </p:nvPr>
         </p:nvSpPr>
         <p:spPr/>
@@ -1453,7 +1259,7 @@
 </file>
 
 <file path=ppt/notesSlides/notesSlide8.xml><?xml version="1.0" encoding="utf-8"?>
-<p:notes xmlns:a="http://schemas.openxmlformats.org/drawingml/2006/main" xmlns:p="http://schemas.openxmlformats.org/presentationml/2006/main" xmlns:r="http://schemas.openxmlformats.org/officeDocument/2006/relationships">
+<p:notes xmlns:a="http://schemas.openxmlformats.org/drawingml/2006/main" xmlns:r="http://schemas.openxmlformats.org/officeDocument/2006/relationships" xmlns:p="http://schemas.openxmlformats.org/presentationml/2006/main">
   <p:cSld>
     <p:spTree>
       <p:nvGrpSpPr>
@@ -1473,7 +1279,7 @@
         <p:nvSpPr>
           <p:cNvPr id="2" name="Slide Image Placeholder 1"/>
           <p:cNvSpPr>
-            <a:spLocks noGrp="1"/>
+            <a:spLocks noGrp="1" noRot="1" noChangeAspect="1"/>
           </p:cNvSpPr>
           <p:nvPr>
             <p:ph type="sldImg" idx="2"/>
@@ -1488,7 +1294,7 @@
             <a:spLocks noGrp="1"/>
           </p:cNvSpPr>
           <p:nvPr>
-            <p:ph type="body" idx="3" sz="quarter"/>
+            <p:ph type="body" sz="quarter" idx="3"/>
           </p:nvPr>
         </p:nvSpPr>
         <p:spPr/>
@@ -1509,7 +1315,7 @@
             <a:spLocks noGrp="1"/>
           </p:cNvSpPr>
           <p:nvPr>
-            <p:ph type="sldNum" idx="5" sz="quarter"/>
+            <p:ph type="sldNum" sz="quarter" idx="5"/>
           </p:nvPr>
         </p:nvSpPr>
         <p:spPr/>
@@ -1523,7 +1329,7 @@
 </file>
 
 <file path=ppt/notesSlides/notesSlide9.xml><?xml version="1.0" encoding="utf-8"?>
-<p:notes xmlns:a="http://schemas.openxmlformats.org/drawingml/2006/main" xmlns:p="http://schemas.openxmlformats.org/presentationml/2006/main" xmlns:r="http://schemas.openxmlformats.org/officeDocument/2006/relationships">
+<p:notes xmlns:a="http://schemas.openxmlformats.org/drawingml/2006/main" xmlns:r="http://schemas.openxmlformats.org/officeDocument/2006/relationships" xmlns:p="http://schemas.openxmlformats.org/presentationml/2006/main">
   <p:cSld>
     <p:spTree>
       <p:nvGrpSpPr>
@@ -1543,7 +1349,7 @@
         <p:nvSpPr>
           <p:cNvPr id="2" name="Slide Image Placeholder 1"/>
           <p:cNvSpPr>
-            <a:spLocks noGrp="1"/>
+            <a:spLocks noGrp="1" noRot="1" noChangeAspect="1"/>
           </p:cNvSpPr>
           <p:nvPr>
             <p:ph type="sldImg" idx="2"/>
@@ -1558,7 +1364,7 @@
             <a:spLocks noGrp="1"/>
           </p:cNvSpPr>
           <p:nvPr>
-            <p:ph type="body" idx="3" sz="quarter"/>
+            <p:ph type="body" sz="quarter" idx="3"/>
           </p:nvPr>
         </p:nvSpPr>
         <p:spPr/>
@@ -1579,7 +1385,7 @@
             <a:spLocks noGrp="1"/>
           </p:cNvSpPr>
           <p:nvPr>
-            <p:ph type="sldNum" idx="5" sz="quarter"/>
+            <p:ph type="sldNum" sz="quarter" idx="5"/>
           </p:nvPr>
         </p:nvSpPr>
         <p:spPr/>
@@ -1630,10 +1436,9 @@
           <a:lstStyle/>
           <a:p>
             <a:r>
-              <a:rPr lang="en-US" smtClean="0"/>
+              <a:rPr lang="en-US"/>
               <a:t>Click to edit Master title style</a:t>
             </a:r>
-            <a:endParaRPr lang="en-US"/>
           </a:p>
         </p:txBody>
       </p:sp>
@@ -1749,10 +1554,9 @@
           </a:lstStyle>
           <a:p>
             <a:r>
-              <a:rPr lang="en-US" smtClean="0"/>
+              <a:rPr lang="en-US"/>
               <a:t>Click to edit Master subtitle style</a:t>
             </a:r>
-            <a:endParaRPr lang="en-US"/>
           </a:p>
         </p:txBody>
       </p:sp>
@@ -1773,7 +1577,7 @@
           <a:p>
             <a:fld id="{5BCAD085-E8A6-8845-BD4E-CB4CCA059FC4}" type="datetimeFigureOut">
               <a:rPr lang="en-US" smtClean="0"/>
-              <a:t>1/27/13</a:t>
+              <a:t>5/28/2026</a:t>
             </a:fld>
             <a:endParaRPr lang="en-US"/>
           </a:p>
@@ -1867,10 +1671,9 @@
           <a:lstStyle/>
           <a:p>
             <a:r>
-              <a:rPr lang="en-US" smtClean="0"/>
+              <a:rPr lang="en-US"/>
               <a:t>Click to edit Master title style</a:t>
             </a:r>
-            <a:endParaRPr lang="en-US"/>
           </a:p>
         </p:txBody>
       </p:sp>
@@ -1891,38 +1694,37 @@
           <a:p>
             <a:pPr lvl="0"/>
             <a:r>
-              <a:rPr lang="en-US" smtClean="0"/>
+              <a:rPr lang="en-US"/>
               <a:t>Click to edit Master text styles</a:t>
             </a:r>
           </a:p>
           <a:p>
             <a:pPr lvl="1"/>
             <a:r>
-              <a:rPr lang="en-US" smtClean="0"/>
+              <a:rPr lang="en-US"/>
               <a:t>Second level</a:t>
             </a:r>
           </a:p>
           <a:p>
             <a:pPr lvl="2"/>
             <a:r>
-              <a:rPr lang="en-US" smtClean="0"/>
+              <a:rPr lang="en-US"/>
               <a:t>Third level</a:t>
             </a:r>
           </a:p>
           <a:p>
             <a:pPr lvl="3"/>
             <a:r>
-              <a:rPr lang="en-US" smtClean="0"/>
+              <a:rPr lang="en-US"/>
               <a:t>Fourth level</a:t>
             </a:r>
           </a:p>
           <a:p>
             <a:pPr lvl="4"/>
             <a:r>
-              <a:rPr lang="en-US" smtClean="0"/>
+              <a:rPr lang="en-US"/>
               <a:t>Fifth level</a:t>
             </a:r>
-            <a:endParaRPr lang="en-US"/>
           </a:p>
         </p:txBody>
       </p:sp>
@@ -1943,7 +1745,7 @@
           <a:p>
             <a:fld id="{5BCAD085-E8A6-8845-BD4E-CB4CCA059FC4}" type="datetimeFigureOut">
               <a:rPr lang="en-US" smtClean="0"/>
-              <a:t>1/27/13</a:t>
+              <a:t>5/28/2026</a:t>
             </a:fld>
             <a:endParaRPr lang="en-US"/>
           </a:p>
@@ -2042,10 +1844,9 @@
           <a:lstStyle/>
           <a:p>
             <a:r>
-              <a:rPr lang="en-US" smtClean="0"/>
+              <a:rPr lang="en-US"/>
               <a:t>Click to edit Master title style</a:t>
             </a:r>
-            <a:endParaRPr lang="en-US"/>
           </a:p>
         </p:txBody>
       </p:sp>
@@ -2071,38 +1872,37 @@
           <a:p>
             <a:pPr lvl="0"/>
             <a:r>
-              <a:rPr lang="en-US" smtClean="0"/>
+              <a:rPr lang="en-US"/>
               <a:t>Click to edit Master text styles</a:t>
             </a:r>
           </a:p>
           <a:p>
             <a:pPr lvl="1"/>
             <a:r>
-              <a:rPr lang="en-US" smtClean="0"/>
+              <a:rPr lang="en-US"/>
               <a:t>Second level</a:t>
             </a:r>
           </a:p>
           <a:p>
             <a:pPr lvl="2"/>
             <a:r>
-              <a:rPr lang="en-US" smtClean="0"/>
+              <a:rPr lang="en-US"/>
               <a:t>Third level</a:t>
             </a:r>
           </a:p>
           <a:p>
             <a:pPr lvl="3"/>
             <a:r>
-              <a:rPr lang="en-US" smtClean="0"/>
+              <a:rPr lang="en-US"/>
               <a:t>Fourth level</a:t>
             </a:r>
           </a:p>
           <a:p>
             <a:pPr lvl="4"/>
             <a:r>
-              <a:rPr lang="en-US" smtClean="0"/>
+              <a:rPr lang="en-US"/>
               <a:t>Fifth level</a:t>
             </a:r>
-            <a:endParaRPr lang="en-US"/>
           </a:p>
         </p:txBody>
       </p:sp>
@@ -2123,7 +1923,7 @@
           <a:p>
             <a:fld id="{5BCAD085-E8A6-8845-BD4E-CB4CCA059FC4}" type="datetimeFigureOut">
               <a:rPr lang="en-US" smtClean="0"/>
-              <a:t>1/27/13</a:t>
+              <a:t>5/28/2026</a:t>
             </a:fld>
             <a:endParaRPr lang="en-US"/>
           </a:p>
@@ -2217,10 +2017,9 @@
           <a:lstStyle/>
           <a:p>
             <a:r>
-              <a:rPr lang="en-US" smtClean="0"/>
+              <a:rPr lang="en-US"/>
               <a:t>Click to edit Master title style</a:t>
             </a:r>
-            <a:endParaRPr lang="en-US"/>
           </a:p>
         </p:txBody>
       </p:sp>
@@ -2241,38 +2040,37 @@
           <a:p>
             <a:pPr lvl="0"/>
             <a:r>
-              <a:rPr lang="en-US" smtClean="0"/>
+              <a:rPr lang="en-US"/>
               <a:t>Click to edit Master text styles</a:t>
             </a:r>
           </a:p>
           <a:p>
             <a:pPr lvl="1"/>
             <a:r>
-              <a:rPr lang="en-US" smtClean="0"/>
+              <a:rPr lang="en-US"/>
               <a:t>Second level</a:t>
             </a:r>
           </a:p>
           <a:p>
             <a:pPr lvl="2"/>
             <a:r>
-              <a:rPr lang="en-US" smtClean="0"/>
+              <a:rPr lang="en-US"/>
               <a:t>Third level</a:t>
             </a:r>
           </a:p>
           <a:p>
             <a:pPr lvl="3"/>
             <a:r>
-              <a:rPr lang="en-US" smtClean="0"/>
+              <a:rPr lang="en-US"/>
               <a:t>Fourth level</a:t>
             </a:r>
           </a:p>
           <a:p>
             <a:pPr lvl="4"/>
             <a:r>
-              <a:rPr lang="en-US" smtClean="0"/>
+              <a:rPr lang="en-US"/>
               <a:t>Fifth level</a:t>
             </a:r>
-            <a:endParaRPr lang="en-US"/>
           </a:p>
         </p:txBody>
       </p:sp>
@@ -2293,7 +2091,7 @@
           <a:p>
             <a:fld id="{5BCAD085-E8A6-8845-BD4E-CB4CCA059FC4}" type="datetimeFigureOut">
               <a:rPr lang="en-US" smtClean="0"/>
-              <a:t>1/27/13</a:t>
+              <a:t>5/28/2026</a:t>
             </a:fld>
             <a:endParaRPr lang="en-US"/>
           </a:p>
@@ -2396,10 +2194,9 @@
           </a:lstStyle>
           <a:p>
             <a:r>
-              <a:rPr lang="en-US" smtClean="0"/>
+              <a:rPr lang="en-US"/>
               <a:t>Click to edit Master title style</a:t>
             </a:r>
-            <a:endParaRPr lang="en-US"/>
           </a:p>
         </p:txBody>
       </p:sp>
@@ -2516,7 +2313,7 @@
           <a:p>
             <a:pPr lvl="0"/>
             <a:r>
-              <a:rPr lang="en-US" smtClean="0"/>
+              <a:rPr lang="en-US"/>
               <a:t>Click to edit Master text styles</a:t>
             </a:r>
           </a:p>
@@ -2539,7 +2336,7 @@
           <a:p>
             <a:fld id="{5BCAD085-E8A6-8845-BD4E-CB4CCA059FC4}" type="datetimeFigureOut">
               <a:rPr lang="en-US" smtClean="0"/>
-              <a:t>1/27/13</a:t>
+              <a:t>5/28/2026</a:t>
             </a:fld>
             <a:endParaRPr lang="en-US"/>
           </a:p>
@@ -2633,10 +2430,9 @@
           <a:lstStyle/>
           <a:p>
             <a:r>
-              <a:rPr lang="en-US" smtClean="0"/>
+              <a:rPr lang="en-US"/>
               <a:t>Click to edit Master title style</a:t>
             </a:r>
-            <a:endParaRPr lang="en-US"/>
           </a:p>
         </p:txBody>
       </p:sp>
@@ -2690,38 +2486,37 @@
           <a:p>
             <a:pPr lvl="0"/>
             <a:r>
-              <a:rPr lang="en-US" smtClean="0"/>
+              <a:rPr lang="en-US"/>
               <a:t>Click to edit Master text styles</a:t>
             </a:r>
           </a:p>
           <a:p>
             <a:pPr lvl="1"/>
             <a:r>
-              <a:rPr lang="en-US" smtClean="0"/>
+              <a:rPr lang="en-US"/>
               <a:t>Second level</a:t>
             </a:r>
           </a:p>
           <a:p>
             <a:pPr lvl="2"/>
             <a:r>
-              <a:rPr lang="en-US" smtClean="0"/>
+              <a:rPr lang="en-US"/>
               <a:t>Third level</a:t>
             </a:r>
           </a:p>
           <a:p>
             <a:pPr lvl="3"/>
             <a:r>
-              <a:rPr lang="en-US" smtClean="0"/>
+              <a:rPr lang="en-US"/>
               <a:t>Fourth level</a:t>
             </a:r>
           </a:p>
           <a:p>
             <a:pPr lvl="4"/>
             <a:r>
-              <a:rPr lang="en-US" smtClean="0"/>
+              <a:rPr lang="en-US"/>
               <a:t>Fifth level</a:t>
             </a:r>
-            <a:endParaRPr lang="en-US"/>
           </a:p>
         </p:txBody>
       </p:sp>
@@ -2775,38 +2570,37 @@
           <a:p>
             <a:pPr lvl="0"/>
             <a:r>
-              <a:rPr lang="en-US" smtClean="0"/>
+              <a:rPr lang="en-US"/>
               <a:t>Click to edit Master text styles</a:t>
             </a:r>
           </a:p>
           <a:p>
             <a:pPr lvl="1"/>
             <a:r>
-              <a:rPr lang="en-US" smtClean="0"/>
+              <a:rPr lang="en-US"/>
               <a:t>Second level</a:t>
             </a:r>
           </a:p>
           <a:p>
             <a:pPr lvl="2"/>
             <a:r>
-              <a:rPr lang="en-US" smtClean="0"/>
+              <a:rPr lang="en-US"/>
               <a:t>Third level</a:t>
             </a:r>
           </a:p>
           <a:p>
             <a:pPr lvl="3"/>
             <a:r>
-              <a:rPr lang="en-US" smtClean="0"/>
+              <a:rPr lang="en-US"/>
               <a:t>Fourth level</a:t>
             </a:r>
           </a:p>
           <a:p>
             <a:pPr lvl="4"/>
             <a:r>
-              <a:rPr lang="en-US" smtClean="0"/>
+              <a:rPr lang="en-US"/>
               <a:t>Fifth level</a:t>
             </a:r>
-            <a:endParaRPr lang="en-US"/>
           </a:p>
         </p:txBody>
       </p:sp>
@@ -2827,7 +2621,7 @@
           <a:p>
             <a:fld id="{5BCAD085-E8A6-8845-BD4E-CB4CCA059FC4}" type="datetimeFigureOut">
               <a:rPr lang="en-US" smtClean="0"/>
-              <a:t>1/27/13</a:t>
+              <a:t>5/28/2026</a:t>
             </a:fld>
             <a:endParaRPr lang="en-US"/>
           </a:p>
@@ -2925,10 +2719,9 @@
           </a:lstStyle>
           <a:p>
             <a:r>
-              <a:rPr lang="en-US" smtClean="0"/>
+              <a:rPr lang="en-US"/>
               <a:t>Click to edit Master title style</a:t>
             </a:r>
-            <a:endParaRPr lang="en-US"/>
           </a:p>
         </p:txBody>
       </p:sp>
@@ -2991,7 +2784,7 @@
           <a:p>
             <a:pPr lvl="0"/>
             <a:r>
-              <a:rPr lang="en-US" smtClean="0"/>
+              <a:rPr lang="en-US"/>
               <a:t>Click to edit Master text styles</a:t>
             </a:r>
           </a:p>
@@ -3047,38 +2840,37 @@
           <a:p>
             <a:pPr lvl="0"/>
             <a:r>
-              <a:rPr lang="en-US" smtClean="0"/>
+              <a:rPr lang="en-US"/>
               <a:t>Click to edit Master text styles</a:t>
             </a:r>
           </a:p>
           <a:p>
             <a:pPr lvl="1"/>
             <a:r>
-              <a:rPr lang="en-US" smtClean="0"/>
+              <a:rPr lang="en-US"/>
               <a:t>Second level</a:t>
             </a:r>
           </a:p>
           <a:p>
             <a:pPr lvl="2"/>
             <a:r>
-              <a:rPr lang="en-US" smtClean="0"/>
+              <a:rPr lang="en-US"/>
               <a:t>Third level</a:t>
             </a:r>
           </a:p>
           <a:p>
             <a:pPr lvl="3"/>
             <a:r>
-              <a:rPr lang="en-US" smtClean="0"/>
+              <a:rPr lang="en-US"/>
               <a:t>Fourth level</a:t>
             </a:r>
           </a:p>
           <a:p>
             <a:pPr lvl="4"/>
             <a:r>
-              <a:rPr lang="en-US" smtClean="0"/>
+              <a:rPr lang="en-US"/>
               <a:t>Fifth level</a:t>
             </a:r>
-            <a:endParaRPr lang="en-US"/>
           </a:p>
         </p:txBody>
       </p:sp>
@@ -3141,7 +2933,7 @@
           <a:p>
             <a:pPr lvl="0"/>
             <a:r>
-              <a:rPr lang="en-US" smtClean="0"/>
+              <a:rPr lang="en-US"/>
               <a:t>Click to edit Master text styles</a:t>
             </a:r>
           </a:p>
@@ -3197,38 +2989,37 @@
           <a:p>
             <a:pPr lvl="0"/>
             <a:r>
-              <a:rPr lang="en-US" smtClean="0"/>
+              <a:rPr lang="en-US"/>
               <a:t>Click to edit Master text styles</a:t>
             </a:r>
           </a:p>
           <a:p>
             <a:pPr lvl="1"/>
             <a:r>
-              <a:rPr lang="en-US" smtClean="0"/>
+              <a:rPr lang="en-US"/>
               <a:t>Second level</a:t>
             </a:r>
           </a:p>
           <a:p>
             <a:pPr lvl="2"/>
             <a:r>
-              <a:rPr lang="en-US" smtClean="0"/>
+              <a:rPr lang="en-US"/>
               <a:t>Third level</a:t>
             </a:r>
           </a:p>
           <a:p>
             <a:pPr lvl="3"/>
             <a:r>
-              <a:rPr lang="en-US" smtClean="0"/>
+              <a:rPr lang="en-US"/>
               <a:t>Fourth level</a:t>
             </a:r>
           </a:p>
           <a:p>
             <a:pPr lvl="4"/>
             <a:r>
-              <a:rPr lang="en-US" smtClean="0"/>
+              <a:rPr lang="en-US"/>
               <a:t>Fifth level</a:t>
             </a:r>
-            <a:endParaRPr lang="en-US"/>
           </a:p>
         </p:txBody>
       </p:sp>
@@ -3249,7 +3040,7 @@
           <a:p>
             <a:fld id="{5BCAD085-E8A6-8845-BD4E-CB4CCA059FC4}" type="datetimeFigureOut">
               <a:rPr lang="en-US" smtClean="0"/>
-              <a:t>1/27/13</a:t>
+              <a:t>5/28/2026</a:t>
             </a:fld>
             <a:endParaRPr lang="en-US"/>
           </a:p>
@@ -3343,10 +3134,9 @@
           <a:lstStyle/>
           <a:p>
             <a:r>
-              <a:rPr lang="en-US" smtClean="0"/>
+              <a:rPr lang="en-US"/>
               <a:t>Click to edit Master title style</a:t>
             </a:r>
-            <a:endParaRPr lang="en-US"/>
           </a:p>
         </p:txBody>
       </p:sp>
@@ -3367,7 +3157,7 @@
           <a:p>
             <a:fld id="{5BCAD085-E8A6-8845-BD4E-CB4CCA059FC4}" type="datetimeFigureOut">
               <a:rPr lang="en-US" smtClean="0"/>
-              <a:t>1/27/13</a:t>
+              <a:t>5/28/2026</a:t>
             </a:fld>
             <a:endParaRPr lang="en-US"/>
           </a:p>
@@ -3462,7 +3252,7 @@
           <a:p>
             <a:fld id="{5BCAD085-E8A6-8845-BD4E-CB4CCA059FC4}" type="datetimeFigureOut">
               <a:rPr lang="en-US" smtClean="0"/>
-              <a:t>1/27/13</a:t>
+              <a:t>5/28/2026</a:t>
             </a:fld>
             <a:endParaRPr lang="en-US"/>
           </a:p>
@@ -3565,10 +3355,9 @@
           </a:lstStyle>
           <a:p>
             <a:r>
-              <a:rPr lang="en-US" smtClean="0"/>
+              <a:rPr lang="en-US"/>
               <a:t>Click to edit Master title style</a:t>
             </a:r>
-            <a:endParaRPr lang="en-US"/>
           </a:p>
         </p:txBody>
       </p:sp>
@@ -3622,38 +3411,37 @@
           <a:p>
             <a:pPr lvl="0"/>
             <a:r>
-              <a:rPr lang="en-US" smtClean="0"/>
+              <a:rPr lang="en-US"/>
               <a:t>Click to edit Master text styles</a:t>
             </a:r>
           </a:p>
           <a:p>
             <a:pPr lvl="1"/>
             <a:r>
-              <a:rPr lang="en-US" smtClean="0"/>
+              <a:rPr lang="en-US"/>
               <a:t>Second level</a:t>
             </a:r>
           </a:p>
           <a:p>
             <a:pPr lvl="2"/>
             <a:r>
-              <a:rPr lang="en-US" smtClean="0"/>
+              <a:rPr lang="en-US"/>
               <a:t>Third level</a:t>
             </a:r>
           </a:p>
           <a:p>
             <a:pPr lvl="3"/>
             <a:r>
-              <a:rPr lang="en-US" smtClean="0"/>
+              <a:rPr lang="en-US"/>
               <a:t>Fourth level</a:t>
             </a:r>
           </a:p>
           <a:p>
             <a:pPr lvl="4"/>
             <a:r>
-              <a:rPr lang="en-US" smtClean="0"/>
+              <a:rPr lang="en-US"/>
               <a:t>Fifth level</a:t>
             </a:r>
-            <a:endParaRPr lang="en-US"/>
           </a:p>
         </p:txBody>
       </p:sp>
@@ -3716,7 +3504,7 @@
           <a:p>
             <a:pPr lvl="0"/>
             <a:r>
-              <a:rPr lang="en-US" smtClean="0"/>
+              <a:rPr lang="en-US"/>
               <a:t>Click to edit Master text styles</a:t>
             </a:r>
           </a:p>
@@ -3739,7 +3527,7 @@
           <a:p>
             <a:fld id="{5BCAD085-E8A6-8845-BD4E-CB4CCA059FC4}" type="datetimeFigureOut">
               <a:rPr lang="en-US" smtClean="0"/>
-              <a:t>1/27/13</a:t>
+              <a:t>5/28/2026</a:t>
             </a:fld>
             <a:endParaRPr lang="en-US"/>
           </a:p>
@@ -3842,10 +3630,9 @@
           </a:lstStyle>
           <a:p>
             <a:r>
-              <a:rPr lang="en-US" smtClean="0"/>
+              <a:rPr lang="en-US"/>
               <a:t>Click to edit Master title style</a:t>
             </a:r>
-            <a:endParaRPr lang="en-US"/>
           </a:p>
         </p:txBody>
       </p:sp>
@@ -3969,7 +3756,7 @@
           <a:p>
             <a:pPr lvl="0"/>
             <a:r>
-              <a:rPr lang="en-US" smtClean="0"/>
+              <a:rPr lang="en-US"/>
               <a:t>Click to edit Master text styles</a:t>
             </a:r>
           </a:p>
@@ -3992,7 +3779,7 @@
           <a:p>
             <a:fld id="{5BCAD085-E8A6-8845-BD4E-CB4CCA059FC4}" type="datetimeFigureOut">
               <a:rPr lang="en-US" smtClean="0"/>
-              <a:t>1/27/13</a:t>
+              <a:t>5/28/2026</a:t>
             </a:fld>
             <a:endParaRPr lang="en-US"/>
           </a:p>
@@ -4101,10 +3888,9 @@
           <a:lstStyle/>
           <a:p>
             <a:r>
-              <a:rPr lang="en-US" smtClean="0"/>
+              <a:rPr lang="en-US"/>
               <a:t>Click to edit Master title style</a:t>
             </a:r>
-            <a:endParaRPr lang="en-US"/>
           </a:p>
         </p:txBody>
       </p:sp>
@@ -4135,38 +3921,37 @@
           <a:p>
             <a:pPr lvl="0"/>
             <a:r>
-              <a:rPr lang="en-US" smtClean="0"/>
+              <a:rPr lang="en-US"/>
               <a:t>Click to edit Master text styles</a:t>
             </a:r>
           </a:p>
           <a:p>
             <a:pPr lvl="1"/>
             <a:r>
-              <a:rPr lang="en-US" smtClean="0"/>
+              <a:rPr lang="en-US"/>
               <a:t>Second level</a:t>
             </a:r>
           </a:p>
           <a:p>
             <a:pPr lvl="2"/>
             <a:r>
-              <a:rPr lang="en-US" smtClean="0"/>
+              <a:rPr lang="en-US"/>
               <a:t>Third level</a:t>
             </a:r>
           </a:p>
           <a:p>
             <a:pPr lvl="3"/>
             <a:r>
-              <a:rPr lang="en-US" smtClean="0"/>
+              <a:rPr lang="en-US"/>
               <a:t>Fourth level</a:t>
             </a:r>
           </a:p>
           <a:p>
             <a:pPr lvl="4"/>
             <a:r>
-              <a:rPr lang="en-US" smtClean="0"/>
+              <a:rPr lang="en-US"/>
               <a:t>Fifth level</a:t>
             </a:r>
-            <a:endParaRPr lang="en-US"/>
           </a:p>
         </p:txBody>
       </p:sp>
@@ -4205,7 +3990,7 @@
           <a:p>
             <a:fld id="{5BCAD085-E8A6-8845-BD4E-CB4CCA059FC4}" type="datetimeFigureOut">
               <a:rPr lang="en-US" smtClean="0"/>
-              <a:t>1/27/13</a:t>
+              <a:t>5/28/2026</a:t>
             </a:fld>
             <a:endParaRPr lang="en-US"/>
           </a:p>
@@ -4564,7 +4349,7 @@
 </file>
 
 <file path=ppt/slides/slide1.xml><?xml version="1.0" encoding="utf-8"?>
-<p:sld xmlns:a="http://schemas.openxmlformats.org/drawingml/2006/main" xmlns:p="http://schemas.openxmlformats.org/presentationml/2006/main" xmlns:r="http://schemas.openxmlformats.org/officeDocument/2006/relationships">
+<p:sld xmlns:a="http://schemas.openxmlformats.org/drawingml/2006/main" xmlns:r="http://schemas.openxmlformats.org/officeDocument/2006/relationships" xmlns:p="http://schemas.openxmlformats.org/presentationml/2006/main">
   <p:cSld>
     <p:bg>
       <p:bgPr>
@@ -4580,7 +4365,14 @@
         <p:cNvGrpSpPr/>
         <p:nvPr/>
       </p:nvGrpSpPr>
-      <p:grpSpPr/>
+      <p:grpSpPr>
+        <a:xfrm>
+          <a:off x="0" y="0"/>
+          <a:ext cx="0" cy="0"/>
+          <a:chOff x="0" y="0"/>
+          <a:chExt cx="0" cy="0"/>
+        </a:xfrm>
+      </p:grpSpPr>
       <p:sp>
         <p:nvSpPr>
           <p:cNvPr id="2" name="Rectangle 1"/>
@@ -4621,6 +4413,7 @@
           <a:lstStyle/>
           <a:p>
             <a:pPr algn="ctr"/>
+            <a:endParaRPr/>
           </a:p>
         </p:txBody>
       </p:sp>
@@ -4664,6 +4457,7 @@
           <a:lstStyle/>
           <a:p>
             <a:pPr algn="ctr"/>
+            <a:endParaRPr/>
           </a:p>
         </p:txBody>
       </p:sp>
@@ -4707,6 +4501,7 @@
           <a:lstStyle/>
           <a:p>
             <a:pPr algn="ctr"/>
+            <a:endParaRPr/>
           </a:p>
         </p:txBody>
       </p:sp>
@@ -4727,7 +4522,7 @@
           <a:noFill/>
         </p:spPr>
         <p:txBody>
-          <a:bodyPr wrap="none" lIns="18288" rIns="18288" tIns="18288" bIns="18288">
+          <a:bodyPr wrap="none" lIns="18288" tIns="18288" rIns="18288" bIns="18288">
             <a:spAutoFit/>
           </a:bodyPr>
           <a:lstStyle/>
@@ -4761,7 +4556,7 @@
           <a:noFill/>
         </p:spPr>
         <p:txBody>
-          <a:bodyPr wrap="none" lIns="18288" rIns="18288" tIns="18288" bIns="18288">
+          <a:bodyPr wrap="none" lIns="18288" tIns="18288" rIns="18288" bIns="18288">
             <a:spAutoFit/>
           </a:bodyPr>
           <a:lstStyle/>
@@ -4795,7 +4590,7 @@
           <a:noFill/>
         </p:spPr>
         <p:txBody>
-          <a:bodyPr wrap="none" lIns="18288" rIns="18288" tIns="18288" bIns="18288">
+          <a:bodyPr wrap="none" lIns="18288" tIns="18288" rIns="18288" bIns="18288">
             <a:spAutoFit/>
           </a:bodyPr>
           <a:lstStyle/>
@@ -4854,6 +4649,7 @@
           <a:lstStyle/>
           <a:p>
             <a:pPr algn="ctr"/>
+            <a:endParaRPr/>
           </a:p>
         </p:txBody>
       </p:sp>
@@ -4874,7 +4670,7 @@
           <a:noFill/>
         </p:spPr>
         <p:txBody>
-          <a:bodyPr wrap="none" lIns="18288" rIns="18288" tIns="18288" bIns="18288">
+          <a:bodyPr wrap="none" lIns="18288" tIns="18288" rIns="18288" bIns="18288">
             <a:spAutoFit/>
           </a:bodyPr>
           <a:lstStyle/>
@@ -4934,6 +4730,7 @@
           <a:lstStyle/>
           <a:p>
             <a:pPr algn="ctr"/>
+            <a:endParaRPr/>
           </a:p>
         </p:txBody>
       </p:sp>
@@ -4954,7 +4751,7 @@
           <a:noFill/>
         </p:spPr>
         <p:txBody>
-          <a:bodyPr wrap="none" lIns="18288" rIns="18288" tIns="18288" bIns="18288">
+          <a:bodyPr wrap="none" lIns="18288" tIns="18288" rIns="18288" bIns="18288">
             <a:spAutoFit/>
           </a:bodyPr>
           <a:lstStyle/>
@@ -5014,6 +4811,7 @@
           <a:lstStyle/>
           <a:p>
             <a:pPr algn="ctr"/>
+            <a:endParaRPr/>
           </a:p>
         </p:txBody>
       </p:sp>
@@ -5034,7 +4832,7 @@
           <a:noFill/>
         </p:spPr>
         <p:txBody>
-          <a:bodyPr wrap="none" lIns="18288" rIns="18288" tIns="18288" bIns="18288">
+          <a:bodyPr wrap="none" lIns="18288" tIns="18288" rIns="18288" bIns="18288">
             <a:spAutoFit/>
           </a:bodyPr>
           <a:lstStyle/>
@@ -5094,6 +4892,7 @@
           <a:lstStyle/>
           <a:p>
             <a:pPr algn="ctr"/>
+            <a:endParaRPr/>
           </a:p>
         </p:txBody>
       </p:sp>
@@ -5114,7 +4913,7 @@
           <a:noFill/>
         </p:spPr>
         <p:txBody>
-          <a:bodyPr wrap="none" lIns="18288" rIns="18288" tIns="18288" bIns="18288">
+          <a:bodyPr wrap="none" lIns="18288" tIns="18288" rIns="18288" bIns="18288">
             <a:spAutoFit/>
           </a:bodyPr>
           <a:lstStyle/>
@@ -5174,6 +4973,7 @@
           <a:lstStyle/>
           <a:p>
             <a:pPr algn="ctr"/>
+            <a:endParaRPr/>
           </a:p>
         </p:txBody>
       </p:sp>
@@ -5194,7 +4994,7 @@
           <a:noFill/>
         </p:spPr>
         <p:txBody>
-          <a:bodyPr wrap="none" lIns="18288" rIns="18288" tIns="18288" bIns="18288">
+          <a:bodyPr wrap="none" lIns="18288" tIns="18288" rIns="18288" bIns="18288">
             <a:spAutoFit/>
           </a:bodyPr>
           <a:lstStyle/>
@@ -5254,6 +5054,7 @@
           <a:lstStyle/>
           <a:p>
             <a:pPr algn="ctr"/>
+            <a:endParaRPr/>
           </a:p>
         </p:txBody>
       </p:sp>
@@ -5297,6 +5098,7 @@
           <a:lstStyle/>
           <a:p>
             <a:pPr algn="ctr"/>
+            <a:endParaRPr/>
           </a:p>
         </p:txBody>
       </p:sp>
@@ -5317,7 +5119,7 @@
           <a:noFill/>
         </p:spPr>
         <p:txBody>
-          <a:bodyPr wrap="none" lIns="18288" rIns="18288" tIns="18288" bIns="18288">
+          <a:bodyPr wrap="none" lIns="18288" tIns="18288" rIns="18288" bIns="18288">
             <a:spAutoFit/>
           </a:bodyPr>
           <a:lstStyle/>
@@ -5342,8 +5144,8 @@
         </p:nvSpPr>
         <p:spPr>
           <a:xfrm>
-            <a:off x="914400" y="4416552"/>
-            <a:ext cx="2423160" cy="502920"/>
+            <a:off x="768096" y="4416552"/>
+            <a:ext cx="1997150" cy="506292"/>
           </a:xfrm>
           <a:prstGeom prst="rect">
             <a:avLst/>
@@ -5351,13 +5153,13 @@
           <a:noFill/>
         </p:spPr>
         <p:txBody>
-          <a:bodyPr wrap="none" lIns="18288" rIns="18288" tIns="18288" bIns="18288">
+          <a:bodyPr wrap="none" lIns="18288" tIns="18288" rIns="18288" bIns="18288">
             <a:spAutoFit/>
           </a:bodyPr>
           <a:lstStyle/>
           <a:p>
             <a:r>
-              <a:rPr sz="1250" b="0">
+              <a:rPr sz="1250" b="0" dirty="0">
                 <a:solidFill>
                   <a:srgbClr val="94A3B8"/>
                 </a:solidFill>
@@ -5365,10 +5167,30 @@
               </a:rPr>
               <a:t>Amazon Reviews 2023</a:t>
             </a:r>
-            <a:br/>
-            <a:r>
-              <a:t>Category: All_Beauty</a:t>
-            </a:r>
+            <a:br>
+              <a:rPr dirty="0"/>
+            </a:br>
+            <a:r>
+              <a:rPr dirty="0">
+                <a:solidFill>
+                  <a:srgbClr val="38BDF8"/>
+                </a:solidFill>
+              </a:rPr>
+              <a:t>Category: </a:t>
+            </a:r>
+            <a:r>
+              <a:rPr dirty="0" err="1">
+                <a:solidFill>
+                  <a:srgbClr val="38BDF8"/>
+                </a:solidFill>
+              </a:rPr>
+              <a:t>All_Beauty</a:t>
+            </a:r>
+            <a:endParaRPr dirty="0">
+              <a:solidFill>
+                <a:srgbClr val="38BDF8"/>
+              </a:solidFill>
+            </a:endParaRPr>
           </a:p>
         </p:txBody>
       </p:sp>
@@ -5414,6 +5236,7 @@
           <a:lstStyle/>
           <a:p>
             <a:pPr algn="ctr"/>
+            <a:endParaRPr/>
           </a:p>
         </p:txBody>
       </p:sp>
@@ -5457,6 +5280,7 @@
           <a:lstStyle/>
           <a:p>
             <a:pPr algn="ctr"/>
+            <a:endParaRPr/>
           </a:p>
         </p:txBody>
       </p:sp>
@@ -5477,7 +5301,7 @@
           <a:noFill/>
         </p:spPr>
         <p:txBody>
-          <a:bodyPr wrap="none" lIns="18288" rIns="18288" tIns="18288" bIns="18288">
+          <a:bodyPr wrap="none" lIns="18288" tIns="18288" rIns="18288" bIns="18288">
             <a:spAutoFit/>
           </a:bodyPr>
           <a:lstStyle/>
@@ -5503,7 +5327,7 @@
         <p:spPr>
           <a:xfrm>
             <a:off x="3931920" y="4416552"/>
-            <a:ext cx="2423160" cy="502920"/>
+            <a:ext cx="1756186" cy="506292"/>
           </a:xfrm>
           <a:prstGeom prst="rect">
             <a:avLst/>
@@ -5511,13 +5335,13 @@
           <a:noFill/>
         </p:spPr>
         <p:txBody>
-          <a:bodyPr wrap="none" lIns="18288" rIns="18288" tIns="18288" bIns="18288">
+          <a:bodyPr wrap="none" lIns="18288" tIns="18288" rIns="18288" bIns="18288">
             <a:spAutoFit/>
           </a:bodyPr>
           <a:lstStyle/>
           <a:p>
             <a:r>
-              <a:rPr sz="1250" b="0">
+              <a:rPr sz="1250" b="0" dirty="0">
                 <a:solidFill>
                   <a:srgbClr val="94A3B8"/>
                 </a:solidFill>
@@ -5525,9 +5349,24 @@
               </a:rPr>
               <a:t>Integrated multimodal</a:t>
             </a:r>
-            <a:br/>
-            <a:r>
-              <a:t>Gradio application</a:t>
+            <a:br>
+              <a:rPr dirty="0"/>
+            </a:br>
+            <a:r>
+              <a:rPr dirty="0" err="1">
+                <a:solidFill>
+                  <a:srgbClr val="A78BFA"/>
+                </a:solidFill>
+              </a:rPr>
+              <a:t>Gradio</a:t>
+            </a:r>
+            <a:r>
+              <a:rPr dirty="0">
+                <a:solidFill>
+                  <a:srgbClr val="A78BFA"/>
+                </a:solidFill>
+              </a:rPr>
+              <a:t> application</a:t>
             </a:r>
           </a:p>
         </p:txBody>
@@ -5574,6 +5413,7 @@
           <a:lstStyle/>
           <a:p>
             <a:pPr algn="ctr"/>
+            <a:endParaRPr/>
           </a:p>
         </p:txBody>
       </p:sp>
@@ -5617,6 +5457,7 @@
           <a:lstStyle/>
           <a:p>
             <a:pPr algn="ctr"/>
+            <a:endParaRPr/>
           </a:p>
         </p:txBody>
       </p:sp>
@@ -5637,7 +5478,7 @@
           <a:noFill/>
         </p:spPr>
         <p:txBody>
-          <a:bodyPr wrap="none" lIns="18288" rIns="18288" tIns="18288" bIns="18288">
+          <a:bodyPr wrap="none" lIns="18288" tIns="18288" rIns="18288" bIns="18288">
             <a:spAutoFit/>
           </a:bodyPr>
           <a:lstStyle/>
@@ -5663,7 +5504,7 @@
         <p:spPr>
           <a:xfrm>
             <a:off x="6949440" y="4416552"/>
-            <a:ext cx="2423160" cy="502920"/>
+            <a:ext cx="1803764" cy="506292"/>
           </a:xfrm>
           <a:prstGeom prst="rect">
             <a:avLst/>
@@ -5671,13 +5512,13 @@
           <a:noFill/>
         </p:spPr>
         <p:txBody>
-          <a:bodyPr wrap="none" lIns="18288" rIns="18288" tIns="18288" bIns="18288">
+          <a:bodyPr wrap="none" lIns="18288" tIns="18288" rIns="18288" bIns="18288">
             <a:spAutoFit/>
           </a:bodyPr>
           <a:lstStyle/>
           <a:p>
             <a:r>
-              <a:rPr sz="1250" b="0">
+              <a:rPr sz="1250" b="0" dirty="0">
                 <a:solidFill>
                   <a:srgbClr val="94A3B8"/>
                 </a:solidFill>
@@ -5685,8 +5526,15 @@
               </a:rPr>
               <a:t>AI engineering workflow</a:t>
             </a:r>
-            <a:br/>
-            <a:r>
+            <a:br>
+              <a:rPr dirty="0"/>
+            </a:br>
+            <a:r>
+              <a:rPr dirty="0">
+                <a:solidFill>
+                  <a:srgbClr val="34D399"/>
+                </a:solidFill>
+              </a:rPr>
               <a:t>from data to demo</a:t>
             </a:r>
           </a:p>
@@ -5732,6 +5580,7 @@
           <a:lstStyle/>
           <a:p>
             <a:pPr algn="ctr"/>
+            <a:endParaRPr/>
           </a:p>
         </p:txBody>
       </p:sp>
@@ -5775,6 +5624,7 @@
           <a:lstStyle/>
           <a:p>
             <a:pPr algn="ctr"/>
+            <a:endParaRPr/>
           </a:p>
         </p:txBody>
       </p:sp>
@@ -5818,6 +5668,7 @@
           <a:lstStyle/>
           <a:p>
             <a:pPr algn="ctr"/>
+            <a:endParaRPr/>
           </a:p>
         </p:txBody>
       </p:sp>
@@ -5861,6 +5712,7 @@
           <a:lstStyle/>
           <a:p>
             <a:pPr algn="ctr"/>
+            <a:endParaRPr/>
           </a:p>
         </p:txBody>
       </p:sp>
@@ -5904,6 +5756,7 @@
           <a:lstStyle/>
           <a:p>
             <a:pPr algn="ctr"/>
+            <a:endParaRPr/>
           </a:p>
         </p:txBody>
       </p:sp>
@@ -5947,6 +5800,7 @@
           <a:lstStyle/>
           <a:p>
             <a:pPr algn="ctr"/>
+            <a:endParaRPr/>
           </a:p>
         </p:txBody>
       </p:sp>
@@ -6212,13 +6066,13 @@
           <a:noFill/>
         </p:spPr>
         <p:txBody>
-          <a:bodyPr wrap="none" lIns="18288" rIns="18288" tIns="18288" bIns="18288">
+          <a:bodyPr wrap="none" lIns="18288" tIns="18288" rIns="18288" bIns="18288">
             <a:spAutoFit/>
           </a:bodyPr>
           <a:lstStyle/>
           <a:p>
             <a:r>
-              <a:rPr sz="1050" b="0">
+              <a:rPr sz="1050" b="0" dirty="0">
                 <a:solidFill>
                   <a:srgbClr val="94A3B8"/>
                 </a:solidFill>
@@ -6238,7 +6092,7 @@
 </file>
 
 <file path=ppt/slides/slide10.xml><?xml version="1.0" encoding="utf-8"?>
-<p:sld xmlns:a="http://schemas.openxmlformats.org/drawingml/2006/main" xmlns:p="http://schemas.openxmlformats.org/presentationml/2006/main" xmlns:r="http://schemas.openxmlformats.org/officeDocument/2006/relationships">
+<p:sld xmlns:a="http://schemas.openxmlformats.org/drawingml/2006/main" xmlns:r="http://schemas.openxmlformats.org/officeDocument/2006/relationships" xmlns:p="http://schemas.openxmlformats.org/presentationml/2006/main">
   <p:cSld>
     <p:bg>
       <p:bgPr>
@@ -6254,7 +6108,14 @@
         <p:cNvGrpSpPr/>
         <p:nvPr/>
       </p:nvGrpSpPr>
-      <p:grpSpPr/>
+      <p:grpSpPr>
+        <a:xfrm>
+          <a:off x="0" y="0"/>
+          <a:ext cx="0" cy="0"/>
+          <a:chOff x="0" y="0"/>
+          <a:chExt cx="0" cy="0"/>
+        </a:xfrm>
+      </p:grpSpPr>
       <p:sp>
         <p:nvSpPr>
           <p:cNvPr id="2" name="Rectangle 1"/>
@@ -6295,6 +6156,7 @@
           <a:lstStyle/>
           <a:p>
             <a:pPr algn="ctr"/>
+            <a:endParaRPr/>
           </a:p>
         </p:txBody>
       </p:sp>
@@ -6338,6 +6200,7 @@
           <a:lstStyle/>
           <a:p>
             <a:pPr algn="ctr"/>
+            <a:endParaRPr/>
           </a:p>
         </p:txBody>
       </p:sp>
@@ -6381,6 +6244,7 @@
           <a:lstStyle/>
           <a:p>
             <a:pPr algn="ctr"/>
+            <a:endParaRPr/>
           </a:p>
         </p:txBody>
       </p:sp>
@@ -6401,7 +6265,7 @@
           <a:noFill/>
         </p:spPr>
         <p:txBody>
-          <a:bodyPr wrap="none" lIns="18288" rIns="18288" tIns="18288" bIns="18288">
+          <a:bodyPr wrap="none" lIns="18288" tIns="18288" rIns="18288" bIns="18288">
             <a:spAutoFit/>
           </a:bodyPr>
           <a:lstStyle/>
@@ -6435,7 +6299,7 @@
           <a:noFill/>
         </p:spPr>
         <p:txBody>
-          <a:bodyPr wrap="none" lIns="18288" rIns="18288" tIns="18288" bIns="18288">
+          <a:bodyPr wrap="none" lIns="18288" tIns="18288" rIns="18288" bIns="18288">
             <a:spAutoFit/>
           </a:bodyPr>
           <a:lstStyle/>
@@ -6492,6 +6356,7 @@
           <a:lstStyle/>
           <a:p>
             <a:pPr algn="ctr"/>
+            <a:endParaRPr/>
           </a:p>
         </p:txBody>
       </p:sp>
@@ -6512,7 +6377,7 @@
           <a:noFill/>
         </p:spPr>
         <p:txBody>
-          <a:bodyPr wrap="none" lIns="18288" rIns="18288" tIns="18288" bIns="18288">
+          <a:bodyPr wrap="none" lIns="18288" tIns="18288" rIns="18288" bIns="18288">
             <a:spAutoFit/>
           </a:bodyPr>
           <a:lstStyle/>
@@ -6546,7 +6411,7 @@
           <a:noFill/>
         </p:spPr>
         <p:txBody>
-          <a:bodyPr wrap="none" lIns="18288" rIns="18288" tIns="18288" bIns="18288">
+          <a:bodyPr wrap="none" lIns="18288" tIns="18288" rIns="18288" bIns="18288">
             <a:spAutoFit/>
           </a:bodyPr>
           <a:lstStyle/>
@@ -6606,6 +6471,7 @@
           <a:lstStyle/>
           <a:p>
             <a:pPr algn="ctr"/>
+            <a:endParaRPr/>
           </a:p>
         </p:txBody>
       </p:sp>
@@ -6626,7 +6492,7 @@
           <a:noFill/>
         </p:spPr>
         <p:txBody>
-          <a:bodyPr wrap="none" lIns="18288" rIns="18288" tIns="18288" bIns="18288">
+          <a:bodyPr wrap="none" lIns="18288" tIns="18288" rIns="18288" bIns="18288">
             <a:spAutoFit/>
           </a:bodyPr>
           <a:lstStyle/>
@@ -6661,7 +6527,7 @@
           <a:noFill/>
         </p:spPr>
         <p:txBody>
-          <a:bodyPr wrap="none" lIns="18288" rIns="18288" tIns="18288" bIns="18288">
+          <a:bodyPr wrap="none" lIns="18288" tIns="18288" rIns="18288" bIns="18288">
             <a:spAutoFit/>
           </a:bodyPr>
           <a:lstStyle/>
@@ -6756,6 +6622,7 @@
           <a:lstStyle/>
           <a:p>
             <a:pPr algn="ctr"/>
+            <a:endParaRPr/>
           </a:p>
         </p:txBody>
       </p:sp>
@@ -6776,7 +6643,7 @@
           <a:noFill/>
         </p:spPr>
         <p:txBody>
-          <a:bodyPr wrap="none" lIns="18288" rIns="18288" tIns="18288" bIns="18288">
+          <a:bodyPr wrap="none" lIns="18288" tIns="18288" rIns="18288" bIns="18288">
             <a:spAutoFit/>
           </a:bodyPr>
           <a:lstStyle/>
@@ -6811,7 +6678,7 @@
           <a:noFill/>
         </p:spPr>
         <p:txBody>
-          <a:bodyPr wrap="none" lIns="18288" rIns="18288" tIns="18288" bIns="18288">
+          <a:bodyPr wrap="none" lIns="18288" tIns="18288" rIns="18288" bIns="18288">
             <a:spAutoFit/>
           </a:bodyPr>
           <a:lstStyle/>
@@ -6906,6 +6773,7 @@
           <a:lstStyle/>
           <a:p>
             <a:pPr algn="ctr"/>
+            <a:endParaRPr/>
           </a:p>
         </p:txBody>
       </p:sp>
@@ -6926,7 +6794,7 @@
           <a:noFill/>
         </p:spPr>
         <p:txBody>
-          <a:bodyPr wrap="none" lIns="18288" rIns="18288" tIns="18288" bIns="18288">
+          <a:bodyPr wrap="none" lIns="18288" tIns="18288" rIns="18288" bIns="18288">
             <a:spAutoFit/>
           </a:bodyPr>
           <a:lstStyle/>
@@ -6961,7 +6829,7 @@
           <a:noFill/>
         </p:spPr>
         <p:txBody>
-          <a:bodyPr wrap="none" lIns="18288" rIns="18288" tIns="18288" bIns="18288">
+          <a:bodyPr wrap="none" lIns="18288" tIns="18288" rIns="18288" bIns="18288">
             <a:spAutoFit/>
           </a:bodyPr>
           <a:lstStyle/>
@@ -7056,6 +6924,7 @@
           <a:lstStyle/>
           <a:p>
             <a:pPr algn="ctr"/>
+            <a:endParaRPr/>
           </a:p>
         </p:txBody>
       </p:sp>
@@ -7076,7 +6945,7 @@
           <a:noFill/>
         </p:spPr>
         <p:txBody>
-          <a:bodyPr wrap="none" lIns="18288" rIns="18288" tIns="18288" bIns="18288">
+          <a:bodyPr wrap="none" lIns="18288" tIns="18288" rIns="18288" bIns="18288">
             <a:spAutoFit/>
           </a:bodyPr>
           <a:lstStyle/>
@@ -7111,7 +6980,7 @@
           <a:noFill/>
         </p:spPr>
         <p:txBody>
-          <a:bodyPr wrap="none" lIns="18288" rIns="18288" tIns="18288" bIns="18288">
+          <a:bodyPr wrap="none" lIns="18288" tIns="18288" rIns="18288" bIns="18288">
             <a:spAutoFit/>
           </a:bodyPr>
           <a:lstStyle/>
@@ -7171,6 +7040,7 @@
           <a:lstStyle/>
           <a:p>
             <a:pPr algn="ctr"/>
+            <a:endParaRPr/>
           </a:p>
         </p:txBody>
       </p:sp>
@@ -7214,6 +7084,7 @@
           <a:lstStyle/>
           <a:p>
             <a:pPr algn="ctr"/>
+            <a:endParaRPr/>
           </a:p>
         </p:txBody>
       </p:sp>
@@ -7234,7 +7105,7 @@
           <a:noFill/>
         </p:spPr>
         <p:txBody>
-          <a:bodyPr wrap="none" lIns="18288" rIns="18288" tIns="18288" bIns="18288">
+          <a:bodyPr wrap="none" lIns="18288" tIns="18288" rIns="18288" bIns="18288">
             <a:spAutoFit/>
           </a:bodyPr>
           <a:lstStyle/>
@@ -7260,7 +7131,7 @@
         <p:spPr>
           <a:xfrm>
             <a:off x="1069848" y="3776472"/>
-            <a:ext cx="2606040" cy="594360"/>
+            <a:ext cx="2499055" cy="783291"/>
           </a:xfrm>
           <a:prstGeom prst="rect">
             <a:avLst/>
@@ -7268,26 +7139,48 @@
           <a:noFill/>
         </p:spPr>
         <p:txBody>
-          <a:bodyPr wrap="none" lIns="18288" rIns="18288" tIns="18288" bIns="18288">
+          <a:bodyPr wrap="square" lIns="18288" tIns="18288" rIns="18288" bIns="18288">
             <a:spAutoFit/>
           </a:bodyPr>
           <a:lstStyle/>
           <a:p>
             <a:r>
-              <a:rPr sz="1250" b="0">
-                <a:solidFill>
-                  <a:srgbClr val="94A3B8"/>
+              <a:rPr sz="1250" b="0" dirty="0">
+                <a:solidFill>
+                  <a:srgbClr val="34D399"/>
                 </a:solidFill>
                 <a:latin typeface="Aptos"/>
               </a:rPr>
               <a:t>Pros</a:t>
             </a:r>
-            <a:br/>
-            <a:r>
+            <a:br>
+              <a:rPr dirty="0">
+                <a:solidFill>
+                  <a:srgbClr val="34D399"/>
+                </a:solidFill>
+              </a:rPr>
+            </a:br>
+            <a:r>
+              <a:rPr dirty="0">
+                <a:solidFill>
+                  <a:srgbClr val="34D399"/>
+                </a:solidFill>
+              </a:rPr>
               <a:t>Cons</a:t>
             </a:r>
-            <a:br/>
-            <a:r>
+            <a:br>
+              <a:rPr dirty="0">
+                <a:solidFill>
+                  <a:srgbClr val="34D399"/>
+                </a:solidFill>
+              </a:rPr>
+            </a:br>
+            <a:r>
+              <a:rPr dirty="0">
+                <a:solidFill>
+                  <a:srgbClr val="34D399"/>
+                </a:solidFill>
+              </a:rPr>
               <a:t>Short product summary</a:t>
             </a:r>
           </a:p>
@@ -7335,6 +7228,7 @@
           <a:lstStyle/>
           <a:p>
             <a:pPr algn="ctr"/>
+            <a:endParaRPr/>
           </a:p>
         </p:txBody>
       </p:sp>
@@ -7378,6 +7272,7 @@
           <a:lstStyle/>
           <a:p>
             <a:pPr algn="ctr"/>
+            <a:endParaRPr/>
           </a:p>
         </p:txBody>
       </p:sp>
@@ -7398,7 +7293,7 @@
           <a:noFill/>
         </p:spPr>
         <p:txBody>
-          <a:bodyPr wrap="none" lIns="18288" rIns="18288" tIns="18288" bIns="18288">
+          <a:bodyPr wrap="none" lIns="18288" tIns="18288" rIns="18288" bIns="18288">
             <a:spAutoFit/>
           </a:bodyPr>
           <a:lstStyle/>
@@ -7424,7 +7319,7 @@
         <p:spPr>
           <a:xfrm>
             <a:off x="4361688" y="3776472"/>
-            <a:ext cx="2606040" cy="594360"/>
+            <a:ext cx="2356414" cy="775597"/>
           </a:xfrm>
           <a:prstGeom prst="rect">
             <a:avLst/>
@@ -7432,26 +7327,72 @@
           <a:noFill/>
         </p:spPr>
         <p:txBody>
-          <a:bodyPr wrap="none" lIns="18288" rIns="18288" tIns="18288" bIns="18288">
+          <a:bodyPr wrap="none" lIns="18288" tIns="18288" rIns="18288" bIns="18288">
             <a:spAutoFit/>
           </a:bodyPr>
           <a:lstStyle/>
           <a:p>
             <a:r>
-              <a:rPr sz="1250" b="0">
-                <a:solidFill>
-                  <a:srgbClr val="94A3B8"/>
+              <a:rPr sz="1600" b="0" dirty="0">
+                <a:solidFill>
+                  <a:srgbClr val="A78BFA"/>
                 </a:solidFill>
                 <a:latin typeface="Aptos"/>
               </a:rPr>
               <a:t>google/flan-t5-small</a:t>
             </a:r>
-            <a:br/>
-            <a:r>
-              <a:t>facebook/bart-base fallback</a:t>
-            </a:r>
-            <a:br/>
-            <a:r>
+            <a:br>
+              <a:rPr sz="1600" dirty="0">
+                <a:solidFill>
+                  <a:srgbClr val="A78BFA"/>
+                </a:solidFill>
+              </a:rPr>
+            </a:br>
+            <a:r>
+              <a:rPr sz="1600" dirty="0" err="1">
+                <a:solidFill>
+                  <a:srgbClr val="A78BFA"/>
+                </a:solidFill>
+              </a:rPr>
+              <a:t>facebook</a:t>
+            </a:r>
+            <a:r>
+              <a:rPr sz="1600" dirty="0">
+                <a:solidFill>
+                  <a:srgbClr val="A78BFA"/>
+                </a:solidFill>
+              </a:rPr>
+              <a:t>/</a:t>
+            </a:r>
+            <a:r>
+              <a:rPr sz="1600" dirty="0" err="1">
+                <a:solidFill>
+                  <a:srgbClr val="A78BFA"/>
+                </a:solidFill>
+              </a:rPr>
+              <a:t>bart</a:t>
+            </a:r>
+            <a:r>
+              <a:rPr sz="1600" dirty="0">
+                <a:solidFill>
+                  <a:srgbClr val="A78BFA"/>
+                </a:solidFill>
+              </a:rPr>
+              <a:t>-base fallback</a:t>
+            </a:r>
+            <a:br>
+              <a:rPr sz="1600" dirty="0">
+                <a:solidFill>
+                  <a:srgbClr val="A78BFA"/>
+                </a:solidFill>
+              </a:rPr>
+            </a:br>
+            <a:r>
+              <a:rPr sz="1600" dirty="0">
+                <a:solidFill>
+                  <a:srgbClr val="A78BFA"/>
+                </a:solidFill>
+              </a:rPr>
               <a:t>prompt-template fallback</a:t>
             </a:r>
           </a:p>
@@ -7499,6 +7440,7 @@
           <a:lstStyle/>
           <a:p>
             <a:pPr algn="ctr"/>
+            <a:endParaRPr/>
           </a:p>
         </p:txBody>
       </p:sp>
@@ -7542,6 +7484,7 @@
           <a:lstStyle/>
           <a:p>
             <a:pPr algn="ctr"/>
+            <a:endParaRPr/>
           </a:p>
         </p:txBody>
       </p:sp>
@@ -7562,7 +7505,7 @@
           <a:noFill/>
         </p:spPr>
         <p:txBody>
-          <a:bodyPr wrap="none" lIns="18288" rIns="18288" tIns="18288" bIns="18288">
+          <a:bodyPr wrap="none" lIns="18288" tIns="18288" rIns="18288" bIns="18288">
             <a:spAutoFit/>
           </a:bodyPr>
           <a:lstStyle/>
@@ -7587,8 +7530,8 @@
         </p:nvSpPr>
         <p:spPr>
           <a:xfrm>
-            <a:off x="7653528" y="3776472"/>
-            <a:ext cx="2606040" cy="594360"/>
+            <a:off x="7639811" y="3568367"/>
+            <a:ext cx="2606039" cy="775597"/>
           </a:xfrm>
           <a:prstGeom prst="rect">
             <a:avLst/>
@@ -7596,26 +7539,48 @@
           <a:noFill/>
         </p:spPr>
         <p:txBody>
-          <a:bodyPr wrap="none" lIns="18288" rIns="18288" tIns="18288" bIns="18288">
+          <a:bodyPr wrap="square" lIns="18288" tIns="18288" rIns="18288" bIns="18288">
             <a:spAutoFit/>
           </a:bodyPr>
           <a:lstStyle/>
           <a:p>
             <a:r>
-              <a:rPr sz="1250" b="0">
-                <a:solidFill>
-                  <a:srgbClr val="94A3B8"/>
+              <a:rPr sz="1600" b="0" dirty="0">
+                <a:solidFill>
+                  <a:srgbClr val="38BDF8"/>
                 </a:solidFill>
                 <a:latin typeface="Aptos"/>
               </a:rPr>
               <a:t>Answer</a:t>
             </a:r>
-            <a:br/>
-            <a:r>
+            <a:br>
+              <a:rPr sz="1600" dirty="0">
+                <a:solidFill>
+                  <a:srgbClr val="38BDF8"/>
+                </a:solidFill>
+              </a:rPr>
+            </a:br>
+            <a:r>
+              <a:rPr sz="1600" dirty="0">
+                <a:solidFill>
+                  <a:srgbClr val="38BDF8"/>
+                </a:solidFill>
+              </a:rPr>
               <a:t>Confidence score</a:t>
             </a:r>
-            <a:br/>
-            <a:r>
+            <a:br>
+              <a:rPr sz="1600" dirty="0">
+                <a:solidFill>
+                  <a:srgbClr val="38BDF8"/>
+                </a:solidFill>
+              </a:rPr>
+            </a:br>
+            <a:r>
+              <a:rPr sz="1600" dirty="0">
+                <a:solidFill>
+                  <a:srgbClr val="38BDF8"/>
+                </a:solidFill>
+              </a:rPr>
               <a:t>Retrieved evidence snippets</a:t>
             </a:r>
           </a:p>
@@ -7638,7 +7603,7 @@
           <a:noFill/>
         </p:spPr>
         <p:txBody>
-          <a:bodyPr wrap="none" lIns="18288" rIns="18288" tIns="18288" bIns="18288">
+          <a:bodyPr wrap="none" lIns="18288" tIns="18288" rIns="18288" bIns="18288">
             <a:spAutoFit/>
           </a:bodyPr>
           <a:lstStyle/>
@@ -7664,7 +7629,7 @@
 </file>
 
 <file path=ppt/slides/slide11.xml><?xml version="1.0" encoding="utf-8"?>
-<p:sld xmlns:a="http://schemas.openxmlformats.org/drawingml/2006/main" xmlns:p="http://schemas.openxmlformats.org/presentationml/2006/main" xmlns:r="http://schemas.openxmlformats.org/officeDocument/2006/relationships">
+<p:sld xmlns:a="http://schemas.openxmlformats.org/drawingml/2006/main" xmlns:r="http://schemas.openxmlformats.org/officeDocument/2006/relationships" xmlns:p="http://schemas.openxmlformats.org/presentationml/2006/main">
   <p:cSld>
     <p:bg>
       <p:bgPr>
@@ -7680,7 +7645,14 @@
         <p:cNvGrpSpPr/>
         <p:nvPr/>
       </p:nvGrpSpPr>
-      <p:grpSpPr/>
+      <p:grpSpPr>
+        <a:xfrm>
+          <a:off x="0" y="0"/>
+          <a:ext cx="0" cy="0"/>
+          <a:chOff x="0" y="0"/>
+          <a:chExt cx="0" cy="0"/>
+        </a:xfrm>
+      </p:grpSpPr>
       <p:sp>
         <p:nvSpPr>
           <p:cNvPr id="2" name="Rectangle 1"/>
@@ -7721,6 +7693,7 @@
           <a:lstStyle/>
           <a:p>
             <a:pPr algn="ctr"/>
+            <a:endParaRPr/>
           </a:p>
         </p:txBody>
       </p:sp>
@@ -7764,6 +7737,7 @@
           <a:lstStyle/>
           <a:p>
             <a:pPr algn="ctr"/>
+            <a:endParaRPr/>
           </a:p>
         </p:txBody>
       </p:sp>
@@ -7807,6 +7781,7 @@
           <a:lstStyle/>
           <a:p>
             <a:pPr algn="ctr"/>
+            <a:endParaRPr/>
           </a:p>
         </p:txBody>
       </p:sp>
@@ -7827,7 +7802,7 @@
           <a:noFill/>
         </p:spPr>
         <p:txBody>
-          <a:bodyPr wrap="none" lIns="18288" rIns="18288" tIns="18288" bIns="18288">
+          <a:bodyPr wrap="none" lIns="18288" tIns="18288" rIns="18288" bIns="18288">
             <a:spAutoFit/>
           </a:bodyPr>
           <a:lstStyle/>
@@ -7861,7 +7836,7 @@
           <a:noFill/>
         </p:spPr>
         <p:txBody>
-          <a:bodyPr wrap="none" lIns="18288" rIns="18288" tIns="18288" bIns="18288">
+          <a:bodyPr wrap="none" lIns="18288" tIns="18288" rIns="18288" bIns="18288">
             <a:spAutoFit/>
           </a:bodyPr>
           <a:lstStyle/>
@@ -7918,6 +7893,7 @@
           <a:lstStyle/>
           <a:p>
             <a:pPr algn="ctr"/>
+            <a:endParaRPr/>
           </a:p>
         </p:txBody>
       </p:sp>
@@ -7938,7 +7914,7 @@
           <a:noFill/>
         </p:spPr>
         <p:txBody>
-          <a:bodyPr wrap="none" lIns="18288" rIns="18288" tIns="18288" bIns="18288">
+          <a:bodyPr wrap="none" lIns="18288" tIns="18288" rIns="18288" bIns="18288">
             <a:spAutoFit/>
           </a:bodyPr>
           <a:lstStyle/>
@@ -7972,7 +7948,7 @@
           <a:noFill/>
         </p:spPr>
         <p:txBody>
-          <a:bodyPr wrap="none" lIns="18288" rIns="18288" tIns="18288" bIns="18288">
+          <a:bodyPr wrap="none" lIns="18288" tIns="18288" rIns="18288" bIns="18288">
             <a:spAutoFit/>
           </a:bodyPr>
           <a:lstStyle/>
@@ -8032,6 +8008,7 @@
           <a:lstStyle/>
           <a:p>
             <a:pPr algn="ctr"/>
+            <a:endParaRPr/>
           </a:p>
         </p:txBody>
       </p:sp>
@@ -8075,6 +8052,7 @@
           <a:lstStyle/>
           <a:p>
             <a:pPr algn="ctr"/>
+            <a:endParaRPr/>
           </a:p>
         </p:txBody>
       </p:sp>
@@ -8095,7 +8073,7 @@
           <a:noFill/>
         </p:spPr>
         <p:txBody>
-          <a:bodyPr wrap="none" lIns="18288" rIns="18288" tIns="18288" bIns="18288">
+          <a:bodyPr wrap="none" lIns="18288" tIns="18288" rIns="18288" bIns="18288">
             <a:spAutoFit/>
           </a:bodyPr>
           <a:lstStyle/>
@@ -8121,7 +8099,7 @@
         <p:spPr>
           <a:xfrm>
             <a:off x="978408" y="1947672"/>
-            <a:ext cx="2468879" cy="594360"/>
+            <a:ext cx="2468879" cy="783291"/>
           </a:xfrm>
           <a:prstGeom prst="rect">
             <a:avLst/>
@@ -8129,26 +8107,48 @@
           <a:noFill/>
         </p:spPr>
         <p:txBody>
-          <a:bodyPr wrap="none" lIns="18288" rIns="18288" tIns="18288" bIns="18288">
+          <a:bodyPr wrap="square" lIns="18288" tIns="18288" rIns="18288" bIns="18288">
             <a:spAutoFit/>
           </a:bodyPr>
           <a:lstStyle/>
           <a:p>
             <a:r>
-              <a:rPr sz="1250" b="0">
-                <a:solidFill>
-                  <a:srgbClr val="94A3B8"/>
+              <a:rPr sz="1250" b="0" dirty="0">
+                <a:solidFill>
+                  <a:srgbClr val="FBBF24"/>
                 </a:solidFill>
                 <a:latin typeface="Aptos"/>
               </a:rPr>
               <a:t>Product title</a:t>
             </a:r>
-            <a:br/>
-            <a:r>
+            <a:br>
+              <a:rPr dirty="0">
+                <a:solidFill>
+                  <a:srgbClr val="FBBF24"/>
+                </a:solidFill>
+              </a:rPr>
+            </a:br>
+            <a:r>
+              <a:rPr dirty="0">
+                <a:solidFill>
+                  <a:srgbClr val="FBBF24"/>
+                </a:solidFill>
+              </a:rPr>
               <a:t>Description</a:t>
             </a:r>
-            <a:br/>
-            <a:r>
+            <a:br>
+              <a:rPr dirty="0">
+                <a:solidFill>
+                  <a:srgbClr val="FBBF24"/>
+                </a:solidFill>
+              </a:rPr>
+            </a:br>
+            <a:r>
+              <a:rPr dirty="0">
+                <a:solidFill>
+                  <a:srgbClr val="FBBF24"/>
+                </a:solidFill>
+              </a:rPr>
               <a:t>Category</a:t>
             </a:r>
           </a:p>
@@ -8196,6 +8196,7 @@
           <a:lstStyle/>
           <a:p>
             <a:pPr algn="ctr"/>
+            <a:endParaRPr/>
           </a:p>
         </p:txBody>
       </p:sp>
@@ -8239,6 +8240,7 @@
           <a:lstStyle/>
           <a:p>
             <a:pPr algn="ctr"/>
+            <a:endParaRPr/>
           </a:p>
         </p:txBody>
       </p:sp>
@@ -8259,7 +8261,7 @@
           <a:noFill/>
         </p:spPr>
         <p:txBody>
-          <a:bodyPr wrap="none" lIns="18288" rIns="18288" tIns="18288" bIns="18288">
+          <a:bodyPr wrap="none" lIns="18288" tIns="18288" rIns="18288" bIns="18288">
             <a:spAutoFit/>
           </a:bodyPr>
           <a:lstStyle/>
@@ -8285,7 +8287,7 @@
         <p:spPr>
           <a:xfrm>
             <a:off x="4087368" y="1947672"/>
-            <a:ext cx="2468879" cy="594360"/>
+            <a:ext cx="2472985" cy="783291"/>
           </a:xfrm>
           <a:prstGeom prst="rect">
             <a:avLst/>
@@ -8293,26 +8295,48 @@
           <a:noFill/>
         </p:spPr>
         <p:txBody>
-          <a:bodyPr wrap="none" lIns="18288" rIns="18288" tIns="18288" bIns="18288">
+          <a:bodyPr wrap="none" lIns="18288" tIns="18288" rIns="18288" bIns="18288">
             <a:spAutoFit/>
           </a:bodyPr>
           <a:lstStyle/>
           <a:p>
             <a:r>
-              <a:rPr sz="1250" b="0">
-                <a:solidFill>
-                  <a:srgbClr val="94A3B8"/>
+              <a:rPr sz="1250" b="0" dirty="0">
+                <a:solidFill>
+                  <a:srgbClr val="A78BFA"/>
                 </a:solidFill>
                 <a:latin typeface="Aptos"/>
               </a:rPr>
               <a:t>Stable Diffusion v1.5</a:t>
             </a:r>
-            <a:br/>
-            <a:r>
+            <a:br>
+              <a:rPr dirty="0">
+                <a:solidFill>
+                  <a:srgbClr val="A78BFA"/>
+                </a:solidFill>
+              </a:rPr>
+            </a:br>
+            <a:r>
+              <a:rPr dirty="0">
+                <a:solidFill>
+                  <a:srgbClr val="A78BFA"/>
+                </a:solidFill>
+              </a:rPr>
               <a:t>Fallback: tiny SD pipeline</a:t>
             </a:r>
-            <a:br/>
-            <a:r>
+            <a:br>
+              <a:rPr dirty="0">
+                <a:solidFill>
+                  <a:srgbClr val="A78BFA"/>
+                </a:solidFill>
+              </a:rPr>
+            </a:br>
+            <a:r>
+              <a:rPr dirty="0">
+                <a:solidFill>
+                  <a:srgbClr val="A78BFA"/>
+                </a:solidFill>
+              </a:rPr>
               <a:t>FAST_MODE for local runs</a:t>
             </a:r>
           </a:p>
@@ -8360,6 +8384,7 @@
           <a:lstStyle/>
           <a:p>
             <a:pPr algn="ctr"/>
+            <a:endParaRPr/>
           </a:p>
         </p:txBody>
       </p:sp>
@@ -8403,6 +8428,7 @@
           <a:lstStyle/>
           <a:p>
             <a:pPr algn="ctr"/>
+            <a:endParaRPr/>
           </a:p>
         </p:txBody>
       </p:sp>
@@ -8423,7 +8449,7 @@
           <a:noFill/>
         </p:spPr>
         <p:txBody>
-          <a:bodyPr wrap="none" lIns="18288" rIns="18288" tIns="18288" bIns="18288">
+          <a:bodyPr wrap="none" lIns="18288" tIns="18288" rIns="18288" bIns="18288">
             <a:spAutoFit/>
           </a:bodyPr>
           <a:lstStyle/>
@@ -8449,7 +8475,7 @@
         <p:spPr>
           <a:xfrm>
             <a:off x="7196328" y="1947672"/>
-            <a:ext cx="2468879" cy="594360"/>
+            <a:ext cx="2108141" cy="783291"/>
           </a:xfrm>
           <a:prstGeom prst="rect">
             <a:avLst/>
@@ -8457,26 +8483,48 @@
           <a:noFill/>
         </p:spPr>
         <p:txBody>
-          <a:bodyPr wrap="none" lIns="18288" rIns="18288" tIns="18288" bIns="18288">
+          <a:bodyPr wrap="none" lIns="18288" tIns="18288" rIns="18288" bIns="18288">
             <a:spAutoFit/>
           </a:bodyPr>
           <a:lstStyle/>
           <a:p>
             <a:r>
-              <a:rPr sz="1250" b="0">
-                <a:solidFill>
-                  <a:srgbClr val="94A3B8"/>
+              <a:rPr sz="1250" b="0" dirty="0">
+                <a:solidFill>
+                  <a:srgbClr val="38BDF8"/>
                 </a:solidFill>
                 <a:latin typeface="Aptos"/>
               </a:rPr>
               <a:t>Original product photo</a:t>
             </a:r>
-            <a:br/>
-            <a:r>
+            <a:br>
+              <a:rPr dirty="0">
+                <a:solidFill>
+                  <a:srgbClr val="38BDF8"/>
+                </a:solidFill>
+              </a:rPr>
+            </a:br>
+            <a:r>
+              <a:rPr dirty="0">
+                <a:solidFill>
+                  <a:srgbClr val="38BDF8"/>
+                </a:solidFill>
+              </a:rPr>
               <a:t>Lifestyle variation</a:t>
             </a:r>
-            <a:br/>
-            <a:r>
+            <a:br>
+              <a:rPr dirty="0">
+                <a:solidFill>
+                  <a:srgbClr val="38BDF8"/>
+                </a:solidFill>
+              </a:rPr>
+            </a:br>
+            <a:r>
+              <a:rPr dirty="0">
+                <a:solidFill>
+                  <a:srgbClr val="38BDF8"/>
+                </a:solidFill>
+              </a:rPr>
               <a:t>Marketing hero image</a:t>
             </a:r>
           </a:p>
@@ -8523,7 +8571,7 @@
           <a:noFill/>
         </p:spPr>
         <p:txBody>
-          <a:bodyPr wrap="none" lIns="18288" rIns="18288" tIns="18288" bIns="18288">
+          <a:bodyPr wrap="none" lIns="18288" tIns="18288" rIns="18288" bIns="18288">
             <a:spAutoFit/>
           </a:bodyPr>
           <a:lstStyle/>
@@ -8582,7 +8630,7 @@
           <a:noFill/>
         </p:spPr>
         <p:txBody>
-          <a:bodyPr wrap="none" lIns="18288" rIns="18288" tIns="18288" bIns="18288">
+          <a:bodyPr wrap="none" lIns="18288" tIns="18288" rIns="18288" bIns="18288">
             <a:spAutoFit/>
           </a:bodyPr>
           <a:lstStyle/>
@@ -8641,7 +8689,7 @@
           <a:noFill/>
         </p:spPr>
         <p:txBody>
-          <a:bodyPr wrap="none" lIns="18288" rIns="18288" tIns="18288" bIns="18288">
+          <a:bodyPr wrap="none" lIns="18288" tIns="18288" rIns="18288" bIns="18288">
             <a:spAutoFit/>
           </a:bodyPr>
           <a:lstStyle/>
@@ -8676,7 +8724,7 @@
           <a:noFill/>
         </p:spPr>
         <p:txBody>
-          <a:bodyPr wrap="none" lIns="18288" rIns="18288" tIns="18288" bIns="18288">
+          <a:bodyPr wrap="none" lIns="18288" tIns="18288" rIns="18288" bIns="18288">
             <a:spAutoFit/>
           </a:bodyPr>
           <a:lstStyle/>
@@ -8702,7 +8750,7 @@
 </file>
 
 <file path=ppt/slides/slide12.xml><?xml version="1.0" encoding="utf-8"?>
-<p:sld xmlns:a="http://schemas.openxmlformats.org/drawingml/2006/main" xmlns:p="http://schemas.openxmlformats.org/presentationml/2006/main" xmlns:r="http://schemas.openxmlformats.org/officeDocument/2006/relationships">
+<p:sld xmlns:a="http://schemas.openxmlformats.org/drawingml/2006/main" xmlns:r="http://schemas.openxmlformats.org/officeDocument/2006/relationships" xmlns:p="http://schemas.openxmlformats.org/presentationml/2006/main">
   <p:cSld>
     <p:bg>
       <p:bgPr>
@@ -8718,7 +8766,14 @@
         <p:cNvGrpSpPr/>
         <p:nvPr/>
       </p:nvGrpSpPr>
-      <p:grpSpPr/>
+      <p:grpSpPr>
+        <a:xfrm>
+          <a:off x="0" y="0"/>
+          <a:ext cx="0" cy="0"/>
+          <a:chOff x="0" y="0"/>
+          <a:chExt cx="0" cy="0"/>
+        </a:xfrm>
+      </p:grpSpPr>
       <p:sp>
         <p:nvSpPr>
           <p:cNvPr id="2" name="Rectangle 1"/>
@@ -8759,6 +8814,7 @@
           <a:lstStyle/>
           <a:p>
             <a:pPr algn="ctr"/>
+            <a:endParaRPr/>
           </a:p>
         </p:txBody>
       </p:sp>
@@ -8802,6 +8858,7 @@
           <a:lstStyle/>
           <a:p>
             <a:pPr algn="ctr"/>
+            <a:endParaRPr/>
           </a:p>
         </p:txBody>
       </p:sp>
@@ -8845,6 +8902,7 @@
           <a:lstStyle/>
           <a:p>
             <a:pPr algn="ctr"/>
+            <a:endParaRPr/>
           </a:p>
         </p:txBody>
       </p:sp>
@@ -8865,7 +8923,7 @@
           <a:noFill/>
         </p:spPr>
         <p:txBody>
-          <a:bodyPr wrap="none" lIns="18288" rIns="18288" tIns="18288" bIns="18288">
+          <a:bodyPr wrap="none" lIns="18288" tIns="18288" rIns="18288" bIns="18288">
             <a:spAutoFit/>
           </a:bodyPr>
           <a:lstStyle/>
@@ -8899,7 +8957,7 @@
           <a:noFill/>
         </p:spPr>
         <p:txBody>
-          <a:bodyPr wrap="none" lIns="18288" rIns="18288" tIns="18288" bIns="18288">
+          <a:bodyPr wrap="none" lIns="18288" tIns="18288" rIns="18288" bIns="18288">
             <a:spAutoFit/>
           </a:bodyPr>
           <a:lstStyle/>
@@ -8956,6 +9014,7 @@
           <a:lstStyle/>
           <a:p>
             <a:pPr algn="ctr"/>
+            <a:endParaRPr/>
           </a:p>
         </p:txBody>
       </p:sp>
@@ -8976,7 +9035,7 @@
           <a:noFill/>
         </p:spPr>
         <p:txBody>
-          <a:bodyPr wrap="none" lIns="18288" rIns="18288" tIns="18288" bIns="18288">
+          <a:bodyPr wrap="none" lIns="18288" tIns="18288" rIns="18288" bIns="18288">
             <a:spAutoFit/>
           </a:bodyPr>
           <a:lstStyle/>
@@ -9010,7 +9069,7 @@
           <a:noFill/>
         </p:spPr>
         <p:txBody>
-          <a:bodyPr wrap="none" lIns="18288" rIns="18288" tIns="18288" bIns="18288">
+          <a:bodyPr wrap="none" lIns="18288" tIns="18288" rIns="18288" bIns="18288">
             <a:spAutoFit/>
           </a:bodyPr>
           <a:lstStyle/>
@@ -9070,6 +9129,7 @@
           <a:lstStyle/>
           <a:p>
             <a:pPr algn="ctr"/>
+            <a:endParaRPr/>
           </a:p>
         </p:txBody>
       </p:sp>
@@ -9113,6 +9173,7 @@
           <a:lstStyle/>
           <a:p>
             <a:pPr algn="ctr"/>
+            <a:endParaRPr/>
           </a:p>
         </p:txBody>
       </p:sp>
@@ -9133,7 +9194,7 @@
           <a:noFill/>
         </p:spPr>
         <p:txBody>
-          <a:bodyPr wrap="none" lIns="18288" rIns="18288" tIns="18288" bIns="18288">
+          <a:bodyPr wrap="none" lIns="18288" tIns="18288" rIns="18288" bIns="18288">
             <a:spAutoFit/>
           </a:bodyPr>
           <a:lstStyle/>
@@ -9190,6 +9251,7 @@
           <a:lstStyle/>
           <a:p>
             <a:pPr algn="ctr"/>
+            <a:endParaRPr/>
           </a:p>
         </p:txBody>
       </p:sp>
@@ -9233,6 +9295,7 @@
           <a:lstStyle/>
           <a:p>
             <a:pPr algn="ctr"/>
+            <a:endParaRPr/>
           </a:p>
         </p:txBody>
       </p:sp>
@@ -9276,6 +9339,7 @@
           <a:lstStyle/>
           <a:p>
             <a:pPr algn="ctr"/>
+            <a:endParaRPr/>
           </a:p>
         </p:txBody>
       </p:sp>
@@ -9319,6 +9383,7 @@
           <a:lstStyle/>
           <a:p>
             <a:pPr algn="ctr"/>
+            <a:endParaRPr/>
           </a:p>
         </p:txBody>
       </p:sp>
@@ -9339,7 +9404,7 @@
           <a:noFill/>
         </p:spPr>
         <p:txBody>
-          <a:bodyPr wrap="none" lIns="18288" rIns="18288" tIns="18288" bIns="18288">
+          <a:bodyPr wrap="none" lIns="18288" tIns="18288" rIns="18288" bIns="18288">
             <a:spAutoFit/>
           </a:bodyPr>
           <a:lstStyle/>
@@ -9399,6 +9464,7 @@
           <a:lstStyle/>
           <a:p>
             <a:pPr algn="ctr"/>
+            <a:endParaRPr/>
           </a:p>
         </p:txBody>
       </p:sp>
@@ -9442,6 +9508,7 @@
           <a:lstStyle/>
           <a:p>
             <a:pPr algn="ctr"/>
+            <a:endParaRPr/>
           </a:p>
         </p:txBody>
       </p:sp>
@@ -9462,7 +9529,7 @@
           <a:noFill/>
         </p:spPr>
         <p:txBody>
-          <a:bodyPr wrap="none" lIns="18288" rIns="18288" tIns="18288" bIns="18288">
+          <a:bodyPr wrap="none" lIns="18288" tIns="18288" rIns="18288" bIns="18288">
             <a:spAutoFit/>
           </a:bodyPr>
           <a:lstStyle/>
@@ -9519,6 +9586,7 @@
           <a:lstStyle/>
           <a:p>
             <a:pPr algn="ctr"/>
+            <a:endParaRPr/>
           </a:p>
         </p:txBody>
       </p:sp>
@@ -9562,6 +9630,7 @@
           <a:lstStyle/>
           <a:p>
             <a:pPr algn="ctr"/>
+            <a:endParaRPr/>
           </a:p>
         </p:txBody>
       </p:sp>
@@ -9605,6 +9674,7 @@
           <a:lstStyle/>
           <a:p>
             <a:pPr algn="ctr"/>
+            <a:endParaRPr/>
           </a:p>
         </p:txBody>
       </p:sp>
@@ -9648,6 +9718,7 @@
           <a:lstStyle/>
           <a:p>
             <a:pPr algn="ctr"/>
+            <a:endParaRPr/>
           </a:p>
         </p:txBody>
       </p:sp>
@@ -9668,7 +9739,7 @@
           <a:noFill/>
         </p:spPr>
         <p:txBody>
-          <a:bodyPr wrap="none" lIns="18288" rIns="18288" tIns="18288" bIns="18288">
+          <a:bodyPr wrap="none" lIns="18288" tIns="18288" rIns="18288" bIns="18288">
             <a:spAutoFit/>
           </a:bodyPr>
           <a:lstStyle/>
@@ -9728,6 +9799,7 @@
           <a:lstStyle/>
           <a:p>
             <a:pPr algn="ctr"/>
+            <a:endParaRPr/>
           </a:p>
         </p:txBody>
       </p:sp>
@@ -9771,6 +9843,7 @@
           <a:lstStyle/>
           <a:p>
             <a:pPr algn="ctr"/>
+            <a:endParaRPr/>
           </a:p>
         </p:txBody>
       </p:sp>
@@ -9791,7 +9864,7 @@
           <a:noFill/>
         </p:spPr>
         <p:txBody>
-          <a:bodyPr wrap="none" lIns="18288" rIns="18288" tIns="18288" bIns="18288">
+          <a:bodyPr wrap="none" lIns="18288" tIns="18288" rIns="18288" bIns="18288">
             <a:spAutoFit/>
           </a:bodyPr>
           <a:lstStyle/>
@@ -9848,6 +9921,7 @@
           <a:lstStyle/>
           <a:p>
             <a:pPr algn="ctr"/>
+            <a:endParaRPr/>
           </a:p>
         </p:txBody>
       </p:sp>
@@ -9891,6 +9965,7 @@
           <a:lstStyle/>
           <a:p>
             <a:pPr algn="ctr"/>
+            <a:endParaRPr/>
           </a:p>
         </p:txBody>
       </p:sp>
@@ -9934,6 +10009,7 @@
           <a:lstStyle/>
           <a:p>
             <a:pPr algn="ctr"/>
+            <a:endParaRPr/>
           </a:p>
         </p:txBody>
       </p:sp>
@@ -9977,6 +10053,7 @@
           <a:lstStyle/>
           <a:p>
             <a:pPr algn="ctr"/>
+            <a:endParaRPr/>
           </a:p>
         </p:txBody>
       </p:sp>
@@ -9997,7 +10074,7 @@
           <a:noFill/>
         </p:spPr>
         <p:txBody>
-          <a:bodyPr wrap="none" lIns="18288" rIns="18288" tIns="18288" bIns="18288">
+          <a:bodyPr wrap="none" lIns="18288" tIns="18288" rIns="18288" bIns="18288">
             <a:spAutoFit/>
           </a:bodyPr>
           <a:lstStyle/>
@@ -10057,6 +10134,7 @@
           <a:lstStyle/>
           <a:p>
             <a:pPr algn="ctr"/>
+            <a:endParaRPr/>
           </a:p>
         </p:txBody>
       </p:sp>
@@ -10100,6 +10178,7 @@
           <a:lstStyle/>
           <a:p>
             <a:pPr algn="ctr"/>
+            <a:endParaRPr/>
           </a:p>
         </p:txBody>
       </p:sp>
@@ -10120,7 +10199,7 @@
           <a:noFill/>
         </p:spPr>
         <p:txBody>
-          <a:bodyPr wrap="none" lIns="18288" rIns="18288" tIns="18288" bIns="18288">
+          <a:bodyPr wrap="none" lIns="18288" tIns="18288" rIns="18288" bIns="18288">
             <a:spAutoFit/>
           </a:bodyPr>
           <a:lstStyle/>
@@ -10177,6 +10256,7 @@
           <a:lstStyle/>
           <a:p>
             <a:pPr algn="ctr"/>
+            <a:endParaRPr/>
           </a:p>
         </p:txBody>
       </p:sp>
@@ -10220,6 +10300,7 @@
           <a:lstStyle/>
           <a:p>
             <a:pPr algn="ctr"/>
+            <a:endParaRPr/>
           </a:p>
         </p:txBody>
       </p:sp>
@@ -10263,6 +10344,7 @@
           <a:lstStyle/>
           <a:p>
             <a:pPr algn="ctr"/>
+            <a:endParaRPr/>
           </a:p>
         </p:txBody>
       </p:sp>
@@ -10306,6 +10388,7 @@
           <a:lstStyle/>
           <a:p>
             <a:pPr algn="ctr"/>
+            <a:endParaRPr/>
           </a:p>
         </p:txBody>
       </p:sp>
@@ -10326,7 +10409,7 @@
           <a:noFill/>
         </p:spPr>
         <p:txBody>
-          <a:bodyPr wrap="none" lIns="18288" rIns="18288" tIns="18288" bIns="18288">
+          <a:bodyPr wrap="none" lIns="18288" tIns="18288" rIns="18288" bIns="18288">
             <a:spAutoFit/>
           </a:bodyPr>
           <a:lstStyle/>
@@ -10386,6 +10469,7 @@
           <a:lstStyle/>
           <a:p>
             <a:pPr algn="ctr"/>
+            <a:endParaRPr/>
           </a:p>
         </p:txBody>
       </p:sp>
@@ -10429,6 +10513,7 @@
           <a:lstStyle/>
           <a:p>
             <a:pPr algn="ctr"/>
+            <a:endParaRPr/>
           </a:p>
         </p:txBody>
       </p:sp>
@@ -10449,7 +10534,7 @@
           <a:noFill/>
         </p:spPr>
         <p:txBody>
-          <a:bodyPr wrap="none" lIns="18288" rIns="18288" tIns="18288" bIns="18288">
+          <a:bodyPr wrap="none" lIns="18288" tIns="18288" rIns="18288" bIns="18288">
             <a:spAutoFit/>
           </a:bodyPr>
           <a:lstStyle/>
@@ -10506,6 +10591,7 @@
           <a:lstStyle/>
           <a:p>
             <a:pPr algn="ctr"/>
+            <a:endParaRPr/>
           </a:p>
         </p:txBody>
       </p:sp>
@@ -10549,6 +10635,7 @@
           <a:lstStyle/>
           <a:p>
             <a:pPr algn="ctr"/>
+            <a:endParaRPr/>
           </a:p>
         </p:txBody>
       </p:sp>
@@ -10592,6 +10679,7 @@
           <a:lstStyle/>
           <a:p>
             <a:pPr algn="ctr"/>
+            <a:endParaRPr/>
           </a:p>
         </p:txBody>
       </p:sp>
@@ -10635,6 +10723,7 @@
           <a:lstStyle/>
           <a:p>
             <a:pPr algn="ctr"/>
+            <a:endParaRPr/>
           </a:p>
         </p:txBody>
       </p:sp>
@@ -10655,7 +10744,7 @@
           <a:noFill/>
         </p:spPr>
         <p:txBody>
-          <a:bodyPr wrap="none" lIns="18288" rIns="18288" tIns="18288" bIns="18288">
+          <a:bodyPr wrap="none" lIns="18288" tIns="18288" rIns="18288" bIns="18288">
             <a:spAutoFit/>
           </a:bodyPr>
           <a:lstStyle/>
@@ -10690,7 +10779,7 @@
           <a:noFill/>
         </p:spPr>
         <p:txBody>
-          <a:bodyPr wrap="none" lIns="18288" rIns="18288" tIns="18288" bIns="18288">
+          <a:bodyPr wrap="none" lIns="18288" tIns="18288" rIns="18288" bIns="18288">
             <a:spAutoFit/>
           </a:bodyPr>
           <a:lstStyle/>
@@ -10724,7 +10813,7 @@
           <a:noFill/>
         </p:spPr>
         <p:txBody>
-          <a:bodyPr wrap="none" lIns="73152" rIns="54864" tIns="36576" bIns="36576">
+          <a:bodyPr wrap="none" lIns="73152" tIns="36576" rIns="54864" bIns="36576">
             <a:spAutoFit/>
           </a:bodyPr>
           <a:lstStyle/>
@@ -10852,6 +10941,7 @@
           <a:lstStyle/>
           <a:p>
             <a:pPr algn="ctr"/>
+            <a:endParaRPr/>
           </a:p>
         </p:txBody>
       </p:sp>
@@ -10895,6 +10985,7 @@
           <a:lstStyle/>
           <a:p>
             <a:pPr algn="ctr"/>
+            <a:endParaRPr/>
           </a:p>
         </p:txBody>
       </p:sp>
@@ -10915,7 +11006,7 @@
           <a:noFill/>
         </p:spPr>
         <p:txBody>
-          <a:bodyPr wrap="none" lIns="18288" rIns="18288" tIns="18288" bIns="18288">
+          <a:bodyPr wrap="none" lIns="18288" tIns="18288" rIns="18288" bIns="18288">
             <a:spAutoFit/>
           </a:bodyPr>
           <a:lstStyle/>
@@ -10940,8 +11031,8 @@
         </p:nvSpPr>
         <p:spPr>
           <a:xfrm>
-            <a:off x="8933688" y="4507992"/>
-            <a:ext cx="1920240" cy="502920"/>
+            <a:off x="8942832" y="4425695"/>
+            <a:ext cx="1819656" cy="614014"/>
           </a:xfrm>
           <a:prstGeom prst="rect">
             <a:avLst/>
@@ -10949,13 +11040,13 @@
           <a:noFill/>
         </p:spPr>
         <p:txBody>
-          <a:bodyPr wrap="none" lIns="18288" rIns="18288" tIns="18288" bIns="18288">
+          <a:bodyPr wrap="square" lIns="18288" tIns="18288" rIns="18288" bIns="18288">
             <a:spAutoFit/>
           </a:bodyPr>
           <a:lstStyle/>
           <a:p>
             <a:r>
-              <a:rPr sz="1250" b="0">
+              <a:rPr sz="1250" b="0" dirty="0">
                 <a:solidFill>
                   <a:srgbClr val="94A3B8"/>
                 </a:solidFill>
@@ -10975,7 +11066,7 @@
 </file>
 
 <file path=ppt/slides/slide13.xml><?xml version="1.0" encoding="utf-8"?>
-<p:sld xmlns:a="http://schemas.openxmlformats.org/drawingml/2006/main" xmlns:p="http://schemas.openxmlformats.org/presentationml/2006/main" xmlns:r="http://schemas.openxmlformats.org/officeDocument/2006/relationships">
+<p:sld xmlns:a="http://schemas.openxmlformats.org/drawingml/2006/main" xmlns:r="http://schemas.openxmlformats.org/officeDocument/2006/relationships" xmlns:p="http://schemas.openxmlformats.org/presentationml/2006/main">
   <p:cSld>
     <p:bg>
       <p:bgPr>
@@ -10991,7 +11082,14 @@
         <p:cNvGrpSpPr/>
         <p:nvPr/>
       </p:nvGrpSpPr>
-      <p:grpSpPr/>
+      <p:grpSpPr>
+        <a:xfrm>
+          <a:off x="0" y="0"/>
+          <a:ext cx="0" cy="0"/>
+          <a:chOff x="0" y="0"/>
+          <a:chExt cx="0" cy="0"/>
+        </a:xfrm>
+      </p:grpSpPr>
       <p:sp>
         <p:nvSpPr>
           <p:cNvPr id="2" name="Rectangle 1"/>
@@ -11032,6 +11130,7 @@
           <a:lstStyle/>
           <a:p>
             <a:pPr algn="ctr"/>
+            <a:endParaRPr/>
           </a:p>
         </p:txBody>
       </p:sp>
@@ -11075,6 +11174,7 @@
           <a:lstStyle/>
           <a:p>
             <a:pPr algn="ctr"/>
+            <a:endParaRPr/>
           </a:p>
         </p:txBody>
       </p:sp>
@@ -11118,6 +11218,7 @@
           <a:lstStyle/>
           <a:p>
             <a:pPr algn="ctr"/>
+            <a:endParaRPr/>
           </a:p>
         </p:txBody>
       </p:sp>
@@ -11138,7 +11239,7 @@
           <a:noFill/>
         </p:spPr>
         <p:txBody>
-          <a:bodyPr wrap="none" lIns="18288" rIns="18288" tIns="18288" bIns="18288">
+          <a:bodyPr wrap="none" lIns="18288" tIns="18288" rIns="18288" bIns="18288">
             <a:spAutoFit/>
           </a:bodyPr>
           <a:lstStyle/>
@@ -11172,7 +11273,7 @@
           <a:noFill/>
         </p:spPr>
         <p:txBody>
-          <a:bodyPr wrap="none" lIns="18288" rIns="18288" tIns="18288" bIns="18288">
+          <a:bodyPr wrap="none" lIns="18288" tIns="18288" rIns="18288" bIns="18288">
             <a:spAutoFit/>
           </a:bodyPr>
           <a:lstStyle/>
@@ -11229,6 +11330,7 @@
           <a:lstStyle/>
           <a:p>
             <a:pPr algn="ctr"/>
+            <a:endParaRPr/>
           </a:p>
         </p:txBody>
       </p:sp>
@@ -11249,7 +11351,7 @@
           <a:noFill/>
         </p:spPr>
         <p:txBody>
-          <a:bodyPr wrap="none" lIns="18288" rIns="18288" tIns="18288" bIns="18288">
+          <a:bodyPr wrap="none" lIns="18288" tIns="18288" rIns="18288" bIns="18288">
             <a:spAutoFit/>
           </a:bodyPr>
           <a:lstStyle/>
@@ -11283,7 +11385,7 @@
           <a:noFill/>
         </p:spPr>
         <p:txBody>
-          <a:bodyPr wrap="none" lIns="18288" rIns="18288" tIns="18288" bIns="18288">
+          <a:bodyPr wrap="none" lIns="18288" tIns="18288" rIns="18288" bIns="18288">
             <a:spAutoFit/>
           </a:bodyPr>
           <a:lstStyle/>
@@ -11318,7 +11420,7 @@
           <a:noFill/>
         </p:spPr>
         <p:txBody>
-          <a:bodyPr wrap="none" lIns="18288" rIns="18288" tIns="18288" bIns="18288">
+          <a:bodyPr wrap="none" lIns="18288" tIns="18288" rIns="18288" bIns="18288">
             <a:spAutoFit/>
           </a:bodyPr>
           <a:lstStyle/>
@@ -11352,7 +11454,7 @@
           <a:noFill/>
         </p:spPr>
         <p:txBody>
-          <a:bodyPr wrap="none" lIns="18288" rIns="18288" tIns="18288" bIns="18288">
+          <a:bodyPr wrap="none" lIns="18288" tIns="18288" rIns="18288" bIns="18288">
             <a:spAutoFit/>
           </a:bodyPr>
           <a:lstStyle/>
@@ -11409,6 +11511,7 @@
           <a:lstStyle/>
           <a:p>
             <a:pPr algn="ctr"/>
+            <a:endParaRPr/>
           </a:p>
         </p:txBody>
       </p:sp>
@@ -11452,6 +11555,7 @@
           <a:lstStyle/>
           <a:p>
             <a:pPr algn="ctr"/>
+            <a:endParaRPr/>
           </a:p>
         </p:txBody>
       </p:sp>
@@ -11472,7 +11576,7 @@
           <a:noFill/>
         </p:spPr>
         <p:txBody>
-          <a:bodyPr wrap="none" lIns="18288" rIns="18288" tIns="18288" bIns="18288">
+          <a:bodyPr wrap="none" lIns="18288" tIns="18288" rIns="18288" bIns="18288">
             <a:spAutoFit/>
           </a:bodyPr>
           <a:lstStyle/>
@@ -11507,7 +11611,7 @@
           <a:noFill/>
         </p:spPr>
         <p:txBody>
-          <a:bodyPr wrap="none" lIns="18288" rIns="18288" tIns="18288" bIns="18288">
+          <a:bodyPr wrap="none" lIns="18288" tIns="18288" rIns="18288" bIns="18288">
             <a:spAutoFit/>
           </a:bodyPr>
           <a:lstStyle/>
@@ -11564,6 +11668,7 @@
           <a:lstStyle/>
           <a:p>
             <a:pPr algn="ctr"/>
+            <a:endParaRPr/>
           </a:p>
         </p:txBody>
       </p:sp>
@@ -11607,6 +11712,7 @@
           <a:lstStyle/>
           <a:p>
             <a:pPr algn="ctr"/>
+            <a:endParaRPr/>
           </a:p>
         </p:txBody>
       </p:sp>
@@ -11627,7 +11733,7 @@
           <a:noFill/>
         </p:spPr>
         <p:txBody>
-          <a:bodyPr wrap="none" lIns="18288" rIns="18288" tIns="18288" bIns="18288">
+          <a:bodyPr wrap="none" lIns="18288" tIns="18288" rIns="18288" bIns="18288">
             <a:spAutoFit/>
           </a:bodyPr>
           <a:lstStyle/>
@@ -11662,7 +11768,7 @@
           <a:noFill/>
         </p:spPr>
         <p:txBody>
-          <a:bodyPr wrap="none" lIns="18288" rIns="18288" tIns="18288" bIns="18288">
+          <a:bodyPr wrap="none" lIns="18288" tIns="18288" rIns="18288" bIns="18288">
             <a:spAutoFit/>
           </a:bodyPr>
           <a:lstStyle/>
@@ -11719,6 +11825,7 @@
           <a:lstStyle/>
           <a:p>
             <a:pPr algn="ctr"/>
+            <a:endParaRPr/>
           </a:p>
         </p:txBody>
       </p:sp>
@@ -11762,6 +11869,7 @@
           <a:lstStyle/>
           <a:p>
             <a:pPr algn="ctr"/>
+            <a:endParaRPr/>
           </a:p>
         </p:txBody>
       </p:sp>
@@ -11782,7 +11890,7 @@
           <a:noFill/>
         </p:spPr>
         <p:txBody>
-          <a:bodyPr wrap="none" lIns="18288" rIns="18288" tIns="18288" bIns="18288">
+          <a:bodyPr wrap="none" lIns="18288" tIns="18288" rIns="18288" bIns="18288">
             <a:spAutoFit/>
           </a:bodyPr>
           <a:lstStyle/>
@@ -11817,7 +11925,7 @@
           <a:noFill/>
         </p:spPr>
         <p:txBody>
-          <a:bodyPr wrap="none" lIns="18288" rIns="18288" tIns="18288" bIns="18288">
+          <a:bodyPr wrap="none" lIns="18288" tIns="18288" rIns="18288" bIns="18288">
             <a:spAutoFit/>
           </a:bodyPr>
           <a:lstStyle/>
@@ -11874,6 +11982,7 @@
           <a:lstStyle/>
           <a:p>
             <a:pPr algn="ctr"/>
+            <a:endParaRPr/>
           </a:p>
         </p:txBody>
       </p:sp>
@@ -11917,6 +12026,7 @@
           <a:lstStyle/>
           <a:p>
             <a:pPr algn="ctr"/>
+            <a:endParaRPr/>
           </a:p>
         </p:txBody>
       </p:sp>
@@ -11937,7 +12047,7 @@
           <a:noFill/>
         </p:spPr>
         <p:txBody>
-          <a:bodyPr wrap="none" lIns="18288" rIns="18288" tIns="18288" bIns="18288">
+          <a:bodyPr wrap="none" lIns="18288" tIns="18288" rIns="18288" bIns="18288">
             <a:spAutoFit/>
           </a:bodyPr>
           <a:lstStyle/>
@@ -11997,6 +12107,7 @@
           <a:lstStyle/>
           <a:p>
             <a:pPr algn="ctr"/>
+            <a:endParaRPr/>
           </a:p>
         </p:txBody>
       </p:sp>
@@ -12040,6 +12151,7 @@
           <a:lstStyle/>
           <a:p>
             <a:pPr algn="ctr"/>
+            <a:endParaRPr/>
           </a:p>
         </p:txBody>
       </p:sp>
@@ -12060,7 +12172,7 @@
           <a:noFill/>
         </p:spPr>
         <p:txBody>
-          <a:bodyPr wrap="none" lIns="18288" rIns="18288" tIns="18288" bIns="18288">
+          <a:bodyPr wrap="none" lIns="18288" tIns="18288" rIns="18288" bIns="18288">
             <a:spAutoFit/>
           </a:bodyPr>
           <a:lstStyle/>
@@ -12085,8 +12197,8 @@
         </p:nvSpPr>
         <p:spPr>
           <a:xfrm>
-            <a:off x="6327648" y="1947672"/>
-            <a:ext cx="3886200" cy="73152"/>
+            <a:off x="6291072" y="1725158"/>
+            <a:ext cx="3922776" cy="421654"/>
           </a:xfrm>
           <a:prstGeom prst="rect">
             <a:avLst/>
@@ -12094,13 +12206,13 @@
           <a:noFill/>
         </p:spPr>
         <p:txBody>
-          <a:bodyPr wrap="none" lIns="18288" rIns="18288" tIns="18288" bIns="18288">
+          <a:bodyPr wrap="square" lIns="18288" tIns="18288" rIns="18288" bIns="18288">
             <a:spAutoFit/>
           </a:bodyPr>
           <a:lstStyle/>
           <a:p>
             <a:r>
-              <a:rPr sz="1250" b="0">
+              <a:rPr sz="1250" b="0" dirty="0">
                 <a:solidFill>
                   <a:srgbClr val="94A3B8"/>
                 </a:solidFill>
@@ -12153,6 +12265,7 @@
           <a:lstStyle/>
           <a:p>
             <a:pPr algn="ctr"/>
+            <a:endParaRPr/>
           </a:p>
         </p:txBody>
       </p:sp>
@@ -12196,6 +12309,7 @@
           <a:lstStyle/>
           <a:p>
             <a:pPr algn="ctr"/>
+            <a:endParaRPr/>
           </a:p>
         </p:txBody>
       </p:sp>
@@ -12216,7 +12330,7 @@
           <a:noFill/>
         </p:spPr>
         <p:txBody>
-          <a:bodyPr wrap="none" lIns="18288" rIns="18288" tIns="18288" bIns="18288">
+          <a:bodyPr wrap="none" lIns="18288" tIns="18288" rIns="18288" bIns="18288">
             <a:spAutoFit/>
           </a:bodyPr>
           <a:lstStyle/>
@@ -12241,8 +12355,8 @@
         </p:nvSpPr>
         <p:spPr>
           <a:xfrm>
-            <a:off x="6327648" y="2880360"/>
-            <a:ext cx="3886200" cy="73152"/>
+            <a:off x="6345936" y="2674105"/>
+            <a:ext cx="3767328" cy="421654"/>
           </a:xfrm>
           <a:prstGeom prst="rect">
             <a:avLst/>
@@ -12250,13 +12364,13 @@
           <a:noFill/>
         </p:spPr>
         <p:txBody>
-          <a:bodyPr wrap="none" lIns="18288" rIns="18288" tIns="18288" bIns="18288">
+          <a:bodyPr wrap="square" lIns="18288" tIns="18288" rIns="18288" bIns="18288">
             <a:spAutoFit/>
           </a:bodyPr>
           <a:lstStyle/>
           <a:p>
             <a:r>
-              <a:rPr sz="1250" b="0">
+              <a:rPr sz="1250" b="0" dirty="0">
                 <a:solidFill>
                   <a:srgbClr val="94A3B8"/>
                 </a:solidFill>
@@ -12309,6 +12423,7 @@
           <a:lstStyle/>
           <a:p>
             <a:pPr algn="ctr"/>
+            <a:endParaRPr/>
           </a:p>
         </p:txBody>
       </p:sp>
@@ -12352,6 +12467,7 @@
           <a:lstStyle/>
           <a:p>
             <a:pPr algn="ctr"/>
+            <a:endParaRPr/>
           </a:p>
         </p:txBody>
       </p:sp>
@@ -12372,7 +12488,7 @@
           <a:noFill/>
         </p:spPr>
         <p:txBody>
-          <a:bodyPr wrap="none" lIns="18288" rIns="18288" tIns="18288" bIns="18288">
+          <a:bodyPr wrap="none" lIns="18288" tIns="18288" rIns="18288" bIns="18288">
             <a:spAutoFit/>
           </a:bodyPr>
           <a:lstStyle/>
@@ -12406,7 +12522,7 @@
           <a:noFill/>
         </p:spPr>
         <p:txBody>
-          <a:bodyPr wrap="none" lIns="18288" rIns="18288" tIns="18288" bIns="18288">
+          <a:bodyPr wrap="none" lIns="18288" tIns="18288" rIns="18288" bIns="18288">
             <a:spAutoFit/>
           </a:bodyPr>
           <a:lstStyle/>
@@ -12465,6 +12581,7 @@
           <a:lstStyle/>
           <a:p>
             <a:pPr algn="ctr"/>
+            <a:endParaRPr/>
           </a:p>
         </p:txBody>
       </p:sp>
@@ -12508,6 +12625,7 @@
           <a:lstStyle/>
           <a:p>
             <a:pPr algn="ctr"/>
+            <a:endParaRPr/>
           </a:p>
         </p:txBody>
       </p:sp>
@@ -12528,7 +12646,7 @@
           <a:noFill/>
         </p:spPr>
         <p:txBody>
-          <a:bodyPr wrap="none" lIns="18288" rIns="18288" tIns="18288" bIns="18288">
+          <a:bodyPr wrap="none" lIns="18288" tIns="18288" rIns="18288" bIns="18288">
             <a:spAutoFit/>
           </a:bodyPr>
           <a:lstStyle/>
@@ -12562,7 +12680,7 @@
           <a:noFill/>
         </p:spPr>
         <p:txBody>
-          <a:bodyPr wrap="none" lIns="18288" rIns="18288" tIns="18288" bIns="18288">
+          <a:bodyPr wrap="none" lIns="18288" tIns="18288" rIns="18288" bIns="18288">
             <a:spAutoFit/>
           </a:bodyPr>
           <a:lstStyle/>
@@ -12596,7 +12714,7 @@
           <a:noFill/>
         </p:spPr>
         <p:txBody>
-          <a:bodyPr wrap="none" lIns="18288" rIns="18288" tIns="18288" bIns="18288">
+          <a:bodyPr wrap="none" lIns="18288" tIns="18288" rIns="18288" bIns="18288">
             <a:spAutoFit/>
           </a:bodyPr>
           <a:lstStyle/>
@@ -12622,7 +12740,7 @@
 </file>
 
 <file path=ppt/slides/slide14.xml><?xml version="1.0" encoding="utf-8"?>
-<p:sld xmlns:a="http://schemas.openxmlformats.org/drawingml/2006/main" xmlns:p="http://schemas.openxmlformats.org/presentationml/2006/main" xmlns:r="http://schemas.openxmlformats.org/officeDocument/2006/relationships">
+<p:sld xmlns:a="http://schemas.openxmlformats.org/drawingml/2006/main" xmlns:r="http://schemas.openxmlformats.org/officeDocument/2006/relationships" xmlns:p="http://schemas.openxmlformats.org/presentationml/2006/main">
   <p:cSld>
     <p:bg>
       <p:bgPr>
@@ -12638,7 +12756,14 @@
         <p:cNvGrpSpPr/>
         <p:nvPr/>
       </p:nvGrpSpPr>
-      <p:grpSpPr/>
+      <p:grpSpPr>
+        <a:xfrm>
+          <a:off x="0" y="0"/>
+          <a:ext cx="0" cy="0"/>
+          <a:chOff x="0" y="0"/>
+          <a:chExt cx="0" cy="0"/>
+        </a:xfrm>
+      </p:grpSpPr>
       <p:sp>
         <p:nvSpPr>
           <p:cNvPr id="2" name="Rectangle 1"/>
@@ -12679,6 +12804,7 @@
           <a:lstStyle/>
           <a:p>
             <a:pPr algn="ctr"/>
+            <a:endParaRPr/>
           </a:p>
         </p:txBody>
       </p:sp>
@@ -12722,6 +12848,7 @@
           <a:lstStyle/>
           <a:p>
             <a:pPr algn="ctr"/>
+            <a:endParaRPr/>
           </a:p>
         </p:txBody>
       </p:sp>
@@ -12765,6 +12892,7 @@
           <a:lstStyle/>
           <a:p>
             <a:pPr algn="ctr"/>
+            <a:endParaRPr/>
           </a:p>
         </p:txBody>
       </p:sp>
@@ -12785,7 +12913,7 @@
           <a:noFill/>
         </p:spPr>
         <p:txBody>
-          <a:bodyPr wrap="none" lIns="18288" rIns="18288" tIns="18288" bIns="18288">
+          <a:bodyPr wrap="none" lIns="18288" tIns="18288" rIns="18288" bIns="18288">
             <a:spAutoFit/>
           </a:bodyPr>
           <a:lstStyle/>
@@ -12819,7 +12947,7 @@
           <a:noFill/>
         </p:spPr>
         <p:txBody>
-          <a:bodyPr wrap="none" lIns="18288" rIns="18288" tIns="18288" bIns="18288">
+          <a:bodyPr wrap="none" lIns="18288" tIns="18288" rIns="18288" bIns="18288">
             <a:spAutoFit/>
           </a:bodyPr>
           <a:lstStyle/>
@@ -12876,6 +13004,7 @@
           <a:lstStyle/>
           <a:p>
             <a:pPr algn="ctr"/>
+            <a:endParaRPr/>
           </a:p>
         </p:txBody>
       </p:sp>
@@ -12896,7 +13025,7 @@
           <a:noFill/>
         </p:spPr>
         <p:txBody>
-          <a:bodyPr wrap="none" lIns="18288" rIns="18288" tIns="18288" bIns="18288">
+          <a:bodyPr wrap="none" lIns="18288" tIns="18288" rIns="18288" bIns="18288">
             <a:spAutoFit/>
           </a:bodyPr>
           <a:lstStyle/>
@@ -12930,7 +13059,7 @@
           <a:noFill/>
         </p:spPr>
         <p:txBody>
-          <a:bodyPr wrap="none" lIns="18288" rIns="18288" tIns="18288" bIns="18288">
+          <a:bodyPr wrap="none" lIns="18288" tIns="18288" rIns="18288" bIns="18288">
             <a:spAutoFit/>
           </a:bodyPr>
           <a:lstStyle/>
@@ -12990,6 +13119,7 @@
           <a:lstStyle/>
           <a:p>
             <a:pPr algn="ctr"/>
+            <a:endParaRPr/>
           </a:p>
         </p:txBody>
       </p:sp>
@@ -13033,6 +13163,7 @@
           <a:lstStyle/>
           <a:p>
             <a:pPr algn="ctr"/>
+            <a:endParaRPr/>
           </a:p>
         </p:txBody>
       </p:sp>
@@ -13053,7 +13184,7 @@
           <a:noFill/>
         </p:spPr>
         <p:txBody>
-          <a:bodyPr wrap="none" lIns="18288" rIns="18288" tIns="18288" bIns="18288">
+          <a:bodyPr wrap="none" lIns="18288" tIns="18288" rIns="18288" bIns="18288">
             <a:spAutoFit/>
           </a:bodyPr>
           <a:lstStyle/>
@@ -13078,8 +13209,8 @@
         </p:nvSpPr>
         <p:spPr>
           <a:xfrm>
-            <a:off x="932688" y="2084831"/>
-            <a:ext cx="2468879" cy="384048"/>
+            <a:off x="932688" y="1955449"/>
+            <a:ext cx="2414017" cy="614014"/>
           </a:xfrm>
           <a:prstGeom prst="rect">
             <a:avLst/>
@@ -13087,13 +13218,13 @@
           <a:noFill/>
         </p:spPr>
         <p:txBody>
-          <a:bodyPr wrap="none" lIns="18288" rIns="18288" tIns="18288" bIns="18288">
+          <a:bodyPr wrap="square" lIns="18288" tIns="18288" rIns="18288" bIns="18288">
             <a:spAutoFit/>
           </a:bodyPr>
           <a:lstStyle/>
           <a:p>
             <a:r>
-              <a:rPr sz="1250" b="0">
+              <a:rPr sz="1250" b="0" dirty="0">
                 <a:solidFill>
                   <a:srgbClr val="94A3B8"/>
                 </a:solidFill>
@@ -13146,6 +13277,7 @@
           <a:lstStyle/>
           <a:p>
             <a:pPr algn="ctr"/>
+            <a:endParaRPr/>
           </a:p>
         </p:txBody>
       </p:sp>
@@ -13189,6 +13321,7 @@
           <a:lstStyle/>
           <a:p>
             <a:pPr algn="ctr"/>
+            <a:endParaRPr/>
           </a:p>
         </p:txBody>
       </p:sp>
@@ -13209,7 +13342,7 @@
           <a:noFill/>
         </p:spPr>
         <p:txBody>
-          <a:bodyPr wrap="none" lIns="18288" rIns="18288" tIns="18288" bIns="18288">
+          <a:bodyPr wrap="none" lIns="18288" tIns="18288" rIns="18288" bIns="18288">
             <a:spAutoFit/>
           </a:bodyPr>
           <a:lstStyle/>
@@ -13234,8 +13367,8 @@
         </p:nvSpPr>
         <p:spPr>
           <a:xfrm>
-            <a:off x="4178807" y="2084831"/>
-            <a:ext cx="2468879" cy="384048"/>
+            <a:off x="4206237" y="1964594"/>
+            <a:ext cx="2414017" cy="614014"/>
           </a:xfrm>
           <a:prstGeom prst="rect">
             <a:avLst/>
@@ -13243,13 +13376,13 @@
           <a:noFill/>
         </p:spPr>
         <p:txBody>
-          <a:bodyPr wrap="none" lIns="18288" rIns="18288" tIns="18288" bIns="18288">
+          <a:bodyPr wrap="square" lIns="18288" tIns="18288" rIns="18288" bIns="18288">
             <a:spAutoFit/>
           </a:bodyPr>
           <a:lstStyle/>
           <a:p>
             <a:r>
-              <a:rPr sz="1250" b="0">
+              <a:rPr sz="1250" b="0" dirty="0">
                 <a:solidFill>
                   <a:srgbClr val="94A3B8"/>
                 </a:solidFill>
@@ -13302,6 +13435,7 @@
           <a:lstStyle/>
           <a:p>
             <a:pPr algn="ctr"/>
+            <a:endParaRPr/>
           </a:p>
         </p:txBody>
       </p:sp>
@@ -13345,6 +13479,7 @@
           <a:lstStyle/>
           <a:p>
             <a:pPr algn="ctr"/>
+            <a:endParaRPr/>
           </a:p>
         </p:txBody>
       </p:sp>
@@ -13365,7 +13500,7 @@
           <a:noFill/>
         </p:spPr>
         <p:txBody>
-          <a:bodyPr wrap="none" lIns="18288" rIns="18288" tIns="18288" bIns="18288">
+          <a:bodyPr wrap="none" lIns="18288" tIns="18288" rIns="18288" bIns="18288">
             <a:spAutoFit/>
           </a:bodyPr>
           <a:lstStyle/>
@@ -13391,7 +13526,7 @@
         <p:spPr>
           <a:xfrm>
             <a:off x="7424927" y="2084831"/>
-            <a:ext cx="2468879" cy="384048"/>
+            <a:ext cx="2468879" cy="421654"/>
           </a:xfrm>
           <a:prstGeom prst="rect">
             <a:avLst/>
@@ -13399,13 +13534,13 @@
           <a:noFill/>
         </p:spPr>
         <p:txBody>
-          <a:bodyPr wrap="none" lIns="18288" rIns="18288" tIns="18288" bIns="18288">
+          <a:bodyPr wrap="square" lIns="18288" tIns="18288" rIns="18288" bIns="18288">
             <a:spAutoFit/>
           </a:bodyPr>
           <a:lstStyle/>
           <a:p>
             <a:r>
-              <a:rPr sz="1250" b="0">
+              <a:rPr sz="1250" b="0" dirty="0">
                 <a:solidFill>
                   <a:srgbClr val="94A3B8"/>
                 </a:solidFill>
@@ -13458,6 +13593,7 @@
           <a:lstStyle/>
           <a:p>
             <a:pPr algn="ctr"/>
+            <a:endParaRPr/>
           </a:p>
         </p:txBody>
       </p:sp>
@@ -13501,6 +13637,7 @@
           <a:lstStyle/>
           <a:p>
             <a:pPr algn="ctr"/>
+            <a:endParaRPr/>
           </a:p>
         </p:txBody>
       </p:sp>
@@ -13521,7 +13658,7 @@
           <a:noFill/>
         </p:spPr>
         <p:txBody>
-          <a:bodyPr wrap="none" lIns="18288" rIns="18288" tIns="18288" bIns="18288">
+          <a:bodyPr wrap="none" lIns="18288" tIns="18288" rIns="18288" bIns="18288">
             <a:spAutoFit/>
           </a:bodyPr>
           <a:lstStyle/>
@@ -13546,8 +13683,8 @@
         </p:nvSpPr>
         <p:spPr>
           <a:xfrm>
-            <a:off x="932688" y="3566160"/>
-            <a:ext cx="2468879" cy="384048"/>
+            <a:off x="914400" y="3418490"/>
+            <a:ext cx="2414017" cy="614014"/>
           </a:xfrm>
           <a:prstGeom prst="rect">
             <a:avLst/>
@@ -13555,13 +13692,13 @@
           <a:noFill/>
         </p:spPr>
         <p:txBody>
-          <a:bodyPr wrap="none" lIns="18288" rIns="18288" tIns="18288" bIns="18288">
+          <a:bodyPr wrap="square" lIns="18288" tIns="18288" rIns="18288" bIns="18288">
             <a:spAutoFit/>
           </a:bodyPr>
           <a:lstStyle/>
           <a:p>
             <a:r>
-              <a:rPr sz="1250" b="0">
+              <a:rPr sz="1250" b="0" dirty="0">
                 <a:solidFill>
                   <a:srgbClr val="94A3B8"/>
                 </a:solidFill>
@@ -13614,6 +13751,7 @@
           <a:lstStyle/>
           <a:p>
             <a:pPr algn="ctr"/>
+            <a:endParaRPr/>
           </a:p>
         </p:txBody>
       </p:sp>
@@ -13657,6 +13795,7 @@
           <a:lstStyle/>
           <a:p>
             <a:pPr algn="ctr"/>
+            <a:endParaRPr/>
           </a:p>
         </p:txBody>
       </p:sp>
@@ -13677,7 +13816,7 @@
           <a:noFill/>
         </p:spPr>
         <p:txBody>
-          <a:bodyPr wrap="none" lIns="18288" rIns="18288" tIns="18288" bIns="18288">
+          <a:bodyPr wrap="none" lIns="18288" tIns="18288" rIns="18288" bIns="18288">
             <a:spAutoFit/>
           </a:bodyPr>
           <a:lstStyle/>
@@ -13703,7 +13842,7 @@
         <p:spPr>
           <a:xfrm>
             <a:off x="4178807" y="3566160"/>
-            <a:ext cx="2468879" cy="384048"/>
+            <a:ext cx="2441447" cy="421654"/>
           </a:xfrm>
           <a:prstGeom prst="rect">
             <a:avLst/>
@@ -13711,13 +13850,13 @@
           <a:noFill/>
         </p:spPr>
         <p:txBody>
-          <a:bodyPr wrap="none" lIns="18288" rIns="18288" tIns="18288" bIns="18288">
+          <a:bodyPr wrap="square" lIns="18288" tIns="18288" rIns="18288" bIns="18288">
             <a:spAutoFit/>
           </a:bodyPr>
           <a:lstStyle/>
           <a:p>
             <a:r>
-              <a:rPr sz="1250" b="0">
+              <a:rPr sz="1250" b="0" dirty="0">
                 <a:solidFill>
                   <a:srgbClr val="94A3B8"/>
                 </a:solidFill>
@@ -13736,8 +13875,8 @@
         </p:nvSpPr>
         <p:spPr>
           <a:xfrm>
-            <a:off x="914400" y="5074920"/>
-            <a:ext cx="9875520" cy="502920"/>
+            <a:off x="1255059" y="4668730"/>
+            <a:ext cx="9820656" cy="516636"/>
           </a:xfrm>
           <a:prstGeom prst="rect">
             <a:avLst/>
@@ -13745,13 +13884,13 @@
           <a:noFill/>
         </p:spPr>
         <p:txBody>
-          <a:bodyPr wrap="none" lIns="18288" rIns="18288" tIns="18288" bIns="18288">
+          <a:bodyPr wrap="square" lIns="18288" tIns="18288" rIns="18288" bIns="18288">
             <a:spAutoFit/>
           </a:bodyPr>
           <a:lstStyle/>
           <a:p>
             <a:r>
-              <a:rPr sz="1500" b="0">
+              <a:rPr sz="1500" b="0" dirty="0">
                 <a:solidFill>
                   <a:srgbClr val="94A3B8"/>
                 </a:solidFill>
@@ -13771,7 +13910,7 @@
 </file>
 
 <file path=ppt/slides/slide15.xml><?xml version="1.0" encoding="utf-8"?>
-<p:sld xmlns:a="http://schemas.openxmlformats.org/drawingml/2006/main" xmlns:p="http://schemas.openxmlformats.org/presentationml/2006/main" xmlns:r="http://schemas.openxmlformats.org/officeDocument/2006/relationships">
+<p:sld xmlns:a="http://schemas.openxmlformats.org/drawingml/2006/main" xmlns:r="http://schemas.openxmlformats.org/officeDocument/2006/relationships" xmlns:p="http://schemas.openxmlformats.org/presentationml/2006/main">
   <p:cSld>
     <p:bg>
       <p:bgPr>
@@ -13787,7 +13926,14 @@
         <p:cNvGrpSpPr/>
         <p:nvPr/>
       </p:nvGrpSpPr>
-      <p:grpSpPr/>
+      <p:grpSpPr>
+        <a:xfrm>
+          <a:off x="0" y="0"/>
+          <a:ext cx="0" cy="0"/>
+          <a:chOff x="0" y="0"/>
+          <a:chExt cx="0" cy="0"/>
+        </a:xfrm>
+      </p:grpSpPr>
       <p:sp>
         <p:nvSpPr>
           <p:cNvPr id="2" name="Rectangle 1"/>
@@ -13828,6 +13974,7 @@
           <a:lstStyle/>
           <a:p>
             <a:pPr algn="ctr"/>
+            <a:endParaRPr/>
           </a:p>
         </p:txBody>
       </p:sp>
@@ -13871,6 +14018,7 @@
           <a:lstStyle/>
           <a:p>
             <a:pPr algn="ctr"/>
+            <a:endParaRPr/>
           </a:p>
         </p:txBody>
       </p:sp>
@@ -13914,6 +14062,7 @@
           <a:lstStyle/>
           <a:p>
             <a:pPr algn="ctr"/>
+            <a:endParaRPr/>
           </a:p>
         </p:txBody>
       </p:sp>
@@ -13934,7 +14083,7 @@
           <a:noFill/>
         </p:spPr>
         <p:txBody>
-          <a:bodyPr wrap="none" lIns="18288" rIns="18288" tIns="18288" bIns="18288">
+          <a:bodyPr wrap="none" lIns="18288" tIns="18288" rIns="18288" bIns="18288">
             <a:spAutoFit/>
           </a:bodyPr>
           <a:lstStyle/>
@@ -13968,7 +14117,7 @@
           <a:noFill/>
         </p:spPr>
         <p:txBody>
-          <a:bodyPr wrap="none" lIns="18288" rIns="18288" tIns="18288" bIns="18288">
+          <a:bodyPr wrap="none" lIns="18288" tIns="18288" rIns="18288" bIns="18288">
             <a:spAutoFit/>
           </a:bodyPr>
           <a:lstStyle/>
@@ -14025,6 +14174,7 @@
           <a:lstStyle/>
           <a:p>
             <a:pPr algn="ctr"/>
+            <a:endParaRPr/>
           </a:p>
         </p:txBody>
       </p:sp>
@@ -14045,7 +14195,7 @@
           <a:noFill/>
         </p:spPr>
         <p:txBody>
-          <a:bodyPr wrap="none" lIns="18288" rIns="18288" tIns="18288" bIns="18288">
+          <a:bodyPr wrap="none" lIns="18288" tIns="18288" rIns="18288" bIns="18288">
             <a:spAutoFit/>
           </a:bodyPr>
           <a:lstStyle/>
@@ -14079,7 +14229,7 @@
           <a:noFill/>
         </p:spPr>
         <p:txBody>
-          <a:bodyPr wrap="none" lIns="18288" rIns="18288" tIns="18288" bIns="18288">
+          <a:bodyPr wrap="none" lIns="18288" tIns="18288" rIns="18288" bIns="18288">
             <a:spAutoFit/>
           </a:bodyPr>
           <a:lstStyle/>
@@ -14137,6 +14287,7 @@
           <a:lstStyle/>
           <a:p>
             <a:pPr algn="ctr"/>
+            <a:endParaRPr/>
           </a:p>
         </p:txBody>
       </p:sp>
@@ -14157,7 +14308,7 @@
           <a:noFill/>
         </p:spPr>
         <p:txBody>
-          <a:bodyPr wrap="none" lIns="18288" rIns="18288" tIns="18288" bIns="18288">
+          <a:bodyPr wrap="none" lIns="18288" tIns="18288" rIns="18288" bIns="18288">
             <a:spAutoFit/>
           </a:bodyPr>
           <a:lstStyle/>
@@ -14192,7 +14343,7 @@
           <a:noFill/>
         </p:spPr>
         <p:txBody>
-          <a:bodyPr wrap="none" lIns="18288" rIns="18288" tIns="18288" bIns="18288">
+          <a:bodyPr wrap="none" lIns="18288" tIns="18288" rIns="18288" bIns="18288">
             <a:spAutoFit/>
           </a:bodyPr>
           <a:lstStyle/>
@@ -14226,7 +14377,7 @@
           <a:noFill/>
         </p:spPr>
         <p:txBody>
-          <a:bodyPr wrap="none" lIns="18288" rIns="18288" tIns="18288" bIns="18288">
+          <a:bodyPr wrap="none" lIns="18288" tIns="18288" rIns="18288" bIns="18288">
             <a:spAutoFit/>
           </a:bodyPr>
           <a:lstStyle/>
@@ -14283,6 +14434,7 @@
           <a:lstStyle/>
           <a:p>
             <a:pPr algn="ctr"/>
+            <a:endParaRPr/>
           </a:p>
         </p:txBody>
       </p:sp>
@@ -14303,7 +14455,7 @@
           <a:noFill/>
         </p:spPr>
         <p:txBody>
-          <a:bodyPr wrap="none" lIns="18288" rIns="18288" tIns="18288" bIns="18288">
+          <a:bodyPr wrap="none" lIns="18288" tIns="18288" rIns="18288" bIns="18288">
             <a:spAutoFit/>
           </a:bodyPr>
           <a:lstStyle/>
@@ -14338,7 +14490,7 @@
           <a:noFill/>
         </p:spPr>
         <p:txBody>
-          <a:bodyPr wrap="none" lIns="18288" rIns="18288" tIns="18288" bIns="18288">
+          <a:bodyPr wrap="none" lIns="18288" tIns="18288" rIns="18288" bIns="18288">
             <a:spAutoFit/>
           </a:bodyPr>
           <a:lstStyle/>
@@ -14372,7 +14524,7 @@
           <a:noFill/>
         </p:spPr>
         <p:txBody>
-          <a:bodyPr wrap="none" lIns="18288" rIns="18288" tIns="18288" bIns="18288">
+          <a:bodyPr wrap="none" lIns="18288" tIns="18288" rIns="18288" bIns="18288">
             <a:spAutoFit/>
           </a:bodyPr>
           <a:lstStyle/>
@@ -14429,6 +14581,7 @@
           <a:lstStyle/>
           <a:p>
             <a:pPr algn="ctr"/>
+            <a:endParaRPr/>
           </a:p>
         </p:txBody>
       </p:sp>
@@ -14449,7 +14602,7 @@
           <a:noFill/>
         </p:spPr>
         <p:txBody>
-          <a:bodyPr wrap="none" lIns="18288" rIns="18288" tIns="18288" bIns="18288">
+          <a:bodyPr wrap="none" lIns="18288" tIns="18288" rIns="18288" bIns="18288">
             <a:spAutoFit/>
           </a:bodyPr>
           <a:lstStyle/>
@@ -14484,7 +14637,7 @@
           <a:noFill/>
         </p:spPr>
         <p:txBody>
-          <a:bodyPr wrap="none" lIns="18288" rIns="18288" tIns="18288" bIns="18288">
+          <a:bodyPr wrap="none" lIns="18288" tIns="18288" rIns="18288" bIns="18288">
             <a:spAutoFit/>
           </a:bodyPr>
           <a:lstStyle/>
@@ -14518,7 +14671,7 @@
           <a:noFill/>
         </p:spPr>
         <p:txBody>
-          <a:bodyPr wrap="none" lIns="18288" rIns="18288" tIns="18288" bIns="18288">
+          <a:bodyPr wrap="none" lIns="18288" tIns="18288" rIns="18288" bIns="18288">
             <a:spAutoFit/>
           </a:bodyPr>
           <a:lstStyle/>
@@ -14575,6 +14728,7 @@
           <a:lstStyle/>
           <a:p>
             <a:pPr algn="ctr"/>
+            <a:endParaRPr/>
           </a:p>
         </p:txBody>
       </p:sp>
@@ -14595,7 +14749,7 @@
           <a:noFill/>
         </p:spPr>
         <p:txBody>
-          <a:bodyPr wrap="none" lIns="18288" rIns="18288" tIns="18288" bIns="18288">
+          <a:bodyPr wrap="none" lIns="18288" tIns="18288" rIns="18288" bIns="18288">
             <a:spAutoFit/>
           </a:bodyPr>
           <a:lstStyle/>
@@ -14630,7 +14784,7 @@
           <a:noFill/>
         </p:spPr>
         <p:txBody>
-          <a:bodyPr wrap="none" lIns="18288" rIns="18288" tIns="18288" bIns="18288">
+          <a:bodyPr wrap="none" lIns="18288" tIns="18288" rIns="18288" bIns="18288">
             <a:spAutoFit/>
           </a:bodyPr>
           <a:lstStyle/>
@@ -14664,7 +14818,7 @@
           <a:noFill/>
         </p:spPr>
         <p:txBody>
-          <a:bodyPr wrap="none" lIns="18288" rIns="18288" tIns="18288" bIns="18288">
+          <a:bodyPr wrap="none" lIns="18288" tIns="18288" rIns="18288" bIns="18288">
             <a:spAutoFit/>
           </a:bodyPr>
           <a:lstStyle/>
@@ -14721,6 +14875,7 @@
           <a:lstStyle/>
           <a:p>
             <a:pPr algn="ctr"/>
+            <a:endParaRPr/>
           </a:p>
         </p:txBody>
       </p:sp>
@@ -14741,7 +14896,7 @@
           <a:noFill/>
         </p:spPr>
         <p:txBody>
-          <a:bodyPr wrap="none" lIns="18288" rIns="18288" tIns="18288" bIns="18288">
+          <a:bodyPr wrap="none" lIns="18288" tIns="18288" rIns="18288" bIns="18288">
             <a:spAutoFit/>
           </a:bodyPr>
           <a:lstStyle/>
@@ -14776,7 +14931,7 @@
           <a:noFill/>
         </p:spPr>
         <p:txBody>
-          <a:bodyPr wrap="none" lIns="18288" rIns="18288" tIns="18288" bIns="18288">
+          <a:bodyPr wrap="none" lIns="18288" tIns="18288" rIns="18288" bIns="18288">
             <a:spAutoFit/>
           </a:bodyPr>
           <a:lstStyle/>
@@ -14810,7 +14965,7 @@
           <a:noFill/>
         </p:spPr>
         <p:txBody>
-          <a:bodyPr wrap="none" lIns="18288" rIns="18288" tIns="18288" bIns="18288">
+          <a:bodyPr wrap="none" lIns="18288" tIns="18288" rIns="18288" bIns="18288">
             <a:spAutoFit/>
           </a:bodyPr>
           <a:lstStyle/>
@@ -14869,6 +15024,7 @@
           <a:lstStyle/>
           <a:p>
             <a:pPr algn="ctr"/>
+            <a:endParaRPr/>
           </a:p>
         </p:txBody>
       </p:sp>
@@ -14912,6 +15068,7 @@
           <a:lstStyle/>
           <a:p>
             <a:pPr algn="ctr"/>
+            <a:endParaRPr/>
           </a:p>
         </p:txBody>
       </p:sp>
@@ -14932,7 +15089,7 @@
           <a:noFill/>
         </p:spPr>
         <p:txBody>
-          <a:bodyPr wrap="none" lIns="18288" rIns="18288" tIns="18288" bIns="18288">
+          <a:bodyPr wrap="none" lIns="18288" tIns="18288" rIns="18288" bIns="18288">
             <a:spAutoFit/>
           </a:bodyPr>
           <a:lstStyle/>
@@ -14958,7 +15115,7 @@
         <p:spPr>
           <a:xfrm>
             <a:off x="9208008" y="2542032"/>
-            <a:ext cx="1737360" cy="822960"/>
+            <a:ext cx="1737360" cy="614014"/>
           </a:xfrm>
           <a:prstGeom prst="rect">
             <a:avLst/>
@@ -14966,13 +15123,13 @@
           <a:noFill/>
         </p:spPr>
         <p:txBody>
-          <a:bodyPr wrap="none" lIns="18288" rIns="18288" tIns="18288" bIns="18288">
+          <a:bodyPr wrap="square" lIns="18288" tIns="18288" rIns="18288" bIns="18288">
             <a:spAutoFit/>
           </a:bodyPr>
           <a:lstStyle/>
           <a:p>
             <a:r>
-              <a:rPr sz="1250" b="0">
+              <a:rPr sz="1250" b="0" dirty="0">
                 <a:solidFill>
                   <a:srgbClr val="94A3B8"/>
                 </a:solidFill>
@@ -14992,7 +15149,7 @@
 </file>
 
 <file path=ppt/slides/slide16.xml><?xml version="1.0" encoding="utf-8"?>
-<p:sld xmlns:a="http://schemas.openxmlformats.org/drawingml/2006/main" xmlns:p="http://schemas.openxmlformats.org/presentationml/2006/main" xmlns:r="http://schemas.openxmlformats.org/officeDocument/2006/relationships">
+<p:sld xmlns:a="http://schemas.openxmlformats.org/drawingml/2006/main" xmlns:r="http://schemas.openxmlformats.org/officeDocument/2006/relationships" xmlns:p="http://schemas.openxmlformats.org/presentationml/2006/main">
   <p:cSld>
     <p:bg>
       <p:bgPr>
@@ -15008,7 +15165,14 @@
         <p:cNvGrpSpPr/>
         <p:nvPr/>
       </p:nvGrpSpPr>
-      <p:grpSpPr/>
+      <p:grpSpPr>
+        <a:xfrm>
+          <a:off x="0" y="0"/>
+          <a:ext cx="0" cy="0"/>
+          <a:chOff x="0" y="0"/>
+          <a:chExt cx="0" cy="0"/>
+        </a:xfrm>
+      </p:grpSpPr>
       <p:sp>
         <p:nvSpPr>
           <p:cNvPr id="2" name="Rectangle 1"/>
@@ -15049,6 +15213,7 @@
           <a:lstStyle/>
           <a:p>
             <a:pPr algn="ctr"/>
+            <a:endParaRPr/>
           </a:p>
         </p:txBody>
       </p:sp>
@@ -15092,6 +15257,7 @@
           <a:lstStyle/>
           <a:p>
             <a:pPr algn="ctr"/>
+            <a:endParaRPr/>
           </a:p>
         </p:txBody>
       </p:sp>
@@ -15135,6 +15301,7 @@
           <a:lstStyle/>
           <a:p>
             <a:pPr algn="ctr"/>
+            <a:endParaRPr/>
           </a:p>
         </p:txBody>
       </p:sp>
@@ -15155,7 +15322,7 @@
           <a:noFill/>
         </p:spPr>
         <p:txBody>
-          <a:bodyPr wrap="none" lIns="18288" rIns="18288" tIns="18288" bIns="18288">
+          <a:bodyPr wrap="none" lIns="18288" tIns="18288" rIns="18288" bIns="18288">
             <a:spAutoFit/>
           </a:bodyPr>
           <a:lstStyle/>
@@ -15189,7 +15356,7 @@
           <a:noFill/>
         </p:spPr>
         <p:txBody>
-          <a:bodyPr wrap="none" lIns="18288" rIns="18288" tIns="18288" bIns="18288">
+          <a:bodyPr wrap="none" lIns="18288" tIns="18288" rIns="18288" bIns="18288">
             <a:spAutoFit/>
           </a:bodyPr>
           <a:lstStyle/>
@@ -15246,6 +15413,7 @@
           <a:lstStyle/>
           <a:p>
             <a:pPr algn="ctr"/>
+            <a:endParaRPr/>
           </a:p>
         </p:txBody>
       </p:sp>
@@ -15266,7 +15434,7 @@
           <a:noFill/>
         </p:spPr>
         <p:txBody>
-          <a:bodyPr wrap="none" lIns="18288" rIns="18288" tIns="18288" bIns="18288">
+          <a:bodyPr wrap="none" lIns="18288" tIns="18288" rIns="18288" bIns="18288">
             <a:spAutoFit/>
           </a:bodyPr>
           <a:lstStyle/>
@@ -15300,7 +15468,7 @@
           <a:noFill/>
         </p:spPr>
         <p:txBody>
-          <a:bodyPr wrap="none" lIns="18288" rIns="18288" tIns="18288" bIns="18288">
+          <a:bodyPr wrap="none" lIns="18288" tIns="18288" rIns="18288" bIns="18288">
             <a:spAutoFit/>
           </a:bodyPr>
           <a:lstStyle/>
@@ -15335,7 +15503,7 @@
           <a:noFill/>
         </p:spPr>
         <p:txBody>
-          <a:bodyPr wrap="none" lIns="18288" rIns="18288" tIns="18288" bIns="18288">
+          <a:bodyPr wrap="none" lIns="18288" tIns="18288" rIns="18288" bIns="18288">
             <a:spAutoFit/>
           </a:bodyPr>
           <a:lstStyle/>
@@ -15369,7 +15537,7 @@
           <a:noFill/>
         </p:spPr>
         <p:txBody>
-          <a:bodyPr wrap="none" lIns="73152" rIns="54864" tIns="36576" bIns="36576">
+          <a:bodyPr wrap="none" lIns="73152" tIns="36576" rIns="54864" bIns="36576">
             <a:spAutoFit/>
           </a:bodyPr>
           <a:lstStyle/>
@@ -15481,6 +15649,7 @@
           <a:lstStyle/>
           <a:p>
             <a:pPr algn="ctr"/>
+            <a:endParaRPr/>
           </a:p>
         </p:txBody>
       </p:sp>
@@ -15524,6 +15693,7 @@
           <a:lstStyle/>
           <a:p>
             <a:pPr algn="ctr"/>
+            <a:endParaRPr/>
           </a:p>
         </p:txBody>
       </p:sp>
@@ -15544,7 +15714,7 @@
           <a:noFill/>
         </p:spPr>
         <p:txBody>
-          <a:bodyPr wrap="none" lIns="18288" rIns="18288" tIns="18288" bIns="18288">
+          <a:bodyPr wrap="none" lIns="18288" tIns="18288" rIns="18288" bIns="18288">
             <a:spAutoFit/>
           </a:bodyPr>
           <a:lstStyle/>
@@ -15570,7 +15740,7 @@
         <p:spPr>
           <a:xfrm>
             <a:off x="7653528" y="2176272"/>
-            <a:ext cx="2606040" cy="1508760"/>
+            <a:ext cx="2551174" cy="998735"/>
           </a:xfrm>
           <a:prstGeom prst="rect">
             <a:avLst/>
@@ -15578,13 +15748,13 @@
           <a:noFill/>
         </p:spPr>
         <p:txBody>
-          <a:bodyPr wrap="none" lIns="18288" rIns="18288" tIns="18288" bIns="18288">
+          <a:bodyPr wrap="square" lIns="18288" tIns="18288" rIns="18288" bIns="18288">
             <a:spAutoFit/>
           </a:bodyPr>
           <a:lstStyle/>
           <a:p>
             <a:r>
-              <a:rPr sz="1250" b="0">
+              <a:rPr sz="1250" b="0" dirty="0">
                 <a:solidFill>
                   <a:srgbClr val="94A3B8"/>
                 </a:solidFill>
@@ -15612,7 +15782,7 @@
           <a:noFill/>
         </p:spPr>
         <p:txBody>
-          <a:bodyPr wrap="none" lIns="18288" rIns="18288" tIns="18288" bIns="18288">
+          <a:bodyPr wrap="none" lIns="18288" tIns="18288" rIns="18288" bIns="18288">
             <a:spAutoFit/>
           </a:bodyPr>
           <a:lstStyle/>
@@ -15646,7 +15816,7 @@
           <a:noFill/>
         </p:spPr>
         <p:txBody>
-          <a:bodyPr wrap="none" lIns="18288" rIns="18288" tIns="18288" bIns="18288">
+          <a:bodyPr wrap="none" lIns="18288" tIns="18288" rIns="18288" bIns="18288">
             <a:spAutoFit/>
           </a:bodyPr>
           <a:lstStyle/>
@@ -15672,7 +15842,7 @@
 </file>
 
 <file path=ppt/slides/slide2.xml><?xml version="1.0" encoding="utf-8"?>
-<p:sld xmlns:a="http://schemas.openxmlformats.org/drawingml/2006/main" xmlns:p="http://schemas.openxmlformats.org/presentationml/2006/main" xmlns:r="http://schemas.openxmlformats.org/officeDocument/2006/relationships">
+<p:sld xmlns:a="http://schemas.openxmlformats.org/drawingml/2006/main" xmlns:r="http://schemas.openxmlformats.org/officeDocument/2006/relationships" xmlns:p="http://schemas.openxmlformats.org/presentationml/2006/main">
   <p:cSld>
     <p:bg>
       <p:bgPr>
@@ -15688,7 +15858,14 @@
         <p:cNvGrpSpPr/>
         <p:nvPr/>
       </p:nvGrpSpPr>
-      <p:grpSpPr/>
+      <p:grpSpPr>
+        <a:xfrm>
+          <a:off x="0" y="0"/>
+          <a:ext cx="0" cy="0"/>
+          <a:chOff x="0" y="0"/>
+          <a:chExt cx="0" cy="0"/>
+        </a:xfrm>
+      </p:grpSpPr>
       <p:sp>
         <p:nvSpPr>
           <p:cNvPr id="2" name="Rectangle 1"/>
@@ -15729,6 +15906,7 @@
           <a:lstStyle/>
           <a:p>
             <a:pPr algn="ctr"/>
+            <a:endParaRPr/>
           </a:p>
         </p:txBody>
       </p:sp>
@@ -15772,6 +15950,7 @@
           <a:lstStyle/>
           <a:p>
             <a:pPr algn="ctr"/>
+            <a:endParaRPr/>
           </a:p>
         </p:txBody>
       </p:sp>
@@ -15815,6 +15994,7 @@
           <a:lstStyle/>
           <a:p>
             <a:pPr algn="ctr"/>
+            <a:endParaRPr/>
           </a:p>
         </p:txBody>
       </p:sp>
@@ -15835,7 +16015,7 @@
           <a:noFill/>
         </p:spPr>
         <p:txBody>
-          <a:bodyPr wrap="none" lIns="18288" rIns="18288" tIns="18288" bIns="18288">
+          <a:bodyPr wrap="none" lIns="18288" tIns="18288" rIns="18288" bIns="18288">
             <a:spAutoFit/>
           </a:bodyPr>
           <a:lstStyle/>
@@ -15869,7 +16049,7 @@
           <a:noFill/>
         </p:spPr>
         <p:txBody>
-          <a:bodyPr wrap="none" lIns="18288" rIns="18288" tIns="18288" bIns="18288">
+          <a:bodyPr wrap="none" lIns="18288" tIns="18288" rIns="18288" bIns="18288">
             <a:spAutoFit/>
           </a:bodyPr>
           <a:lstStyle/>
@@ -15926,6 +16106,7 @@
           <a:lstStyle/>
           <a:p>
             <a:pPr algn="ctr"/>
+            <a:endParaRPr/>
           </a:p>
         </p:txBody>
       </p:sp>
@@ -15946,7 +16127,7 @@
           <a:noFill/>
         </p:spPr>
         <p:txBody>
-          <a:bodyPr wrap="none" lIns="18288" rIns="18288" tIns="18288" bIns="18288">
+          <a:bodyPr wrap="none" lIns="18288" tIns="18288" rIns="18288" bIns="18288">
             <a:spAutoFit/>
           </a:bodyPr>
           <a:lstStyle/>
@@ -15980,7 +16161,7 @@
           <a:noFill/>
         </p:spPr>
         <p:txBody>
-          <a:bodyPr wrap="none" lIns="18288" rIns="18288" tIns="18288" bIns="18288">
+          <a:bodyPr wrap="none" lIns="18288" tIns="18288" rIns="18288" bIns="18288">
             <a:spAutoFit/>
           </a:bodyPr>
           <a:lstStyle/>
@@ -16015,7 +16196,7 @@
           <a:noFill/>
         </p:spPr>
         <p:txBody>
-          <a:bodyPr wrap="none" lIns="73152" rIns="54864" tIns="36576" bIns="36576">
+          <a:bodyPr wrap="none" lIns="73152" tIns="36576" rIns="54864" bIns="36576">
             <a:spAutoFit/>
           </a:bodyPr>
           <a:lstStyle/>
@@ -16127,6 +16308,7 @@
           <a:lstStyle/>
           <a:p>
             <a:pPr algn="ctr"/>
+            <a:endParaRPr/>
           </a:p>
         </p:txBody>
       </p:sp>
@@ -16170,6 +16352,7 @@
           <a:lstStyle/>
           <a:p>
             <a:pPr algn="ctr"/>
+            <a:endParaRPr/>
           </a:p>
         </p:txBody>
       </p:sp>
@@ -16190,7 +16373,7 @@
           <a:noFill/>
         </p:spPr>
         <p:txBody>
-          <a:bodyPr wrap="none" lIns="18288" rIns="18288" tIns="18288" bIns="18288">
+          <a:bodyPr wrap="none" lIns="18288" tIns="18288" rIns="18288" bIns="18288">
             <a:spAutoFit/>
           </a:bodyPr>
           <a:lstStyle/>
@@ -16215,8 +16398,8 @@
         </p:nvSpPr>
         <p:spPr>
           <a:xfrm>
-            <a:off x="6419088" y="1947672"/>
-            <a:ext cx="4069080" cy="228600"/>
+            <a:off x="6419088" y="1746504"/>
+            <a:ext cx="1820370" cy="506292"/>
           </a:xfrm>
           <a:prstGeom prst="rect">
             <a:avLst/>
@@ -16224,22 +16407,33 @@
           <a:noFill/>
         </p:spPr>
         <p:txBody>
-          <a:bodyPr wrap="none" lIns="18288" rIns="18288" tIns="18288" bIns="18288">
+          <a:bodyPr wrap="none" lIns="18288" tIns="18288" rIns="18288" bIns="18288">
             <a:spAutoFit/>
           </a:bodyPr>
           <a:lstStyle/>
           <a:p>
             <a:r>
-              <a:rPr sz="1250" b="0">
-                <a:solidFill>
-                  <a:srgbClr val="94A3B8"/>
+              <a:rPr sz="1250" b="0" dirty="0">
+                <a:solidFill>
+                  <a:srgbClr val="38BDF8"/>
                 </a:solidFill>
                 <a:latin typeface="Aptos"/>
               </a:rPr>
               <a:t>EDA, cleaning,</a:t>
             </a:r>
-            <a:br/>
-            <a:r>
+            <a:br>
+              <a:rPr dirty="0">
+                <a:solidFill>
+                  <a:srgbClr val="38BDF8"/>
+                </a:solidFill>
+              </a:rPr>
+            </a:br>
+            <a:r>
+              <a:rPr dirty="0">
+                <a:solidFill>
+                  <a:srgbClr val="38BDF8"/>
+                </a:solidFill>
+              </a:rPr>
               <a:t>product-level splits</a:t>
             </a:r>
           </a:p>
@@ -16287,6 +16481,7 @@
           <a:lstStyle/>
           <a:p>
             <a:pPr algn="ctr"/>
+            <a:endParaRPr/>
           </a:p>
         </p:txBody>
       </p:sp>
@@ -16330,6 +16525,7 @@
           <a:lstStyle/>
           <a:p>
             <a:pPr algn="ctr"/>
+            <a:endParaRPr/>
           </a:p>
         </p:txBody>
       </p:sp>
@@ -16350,7 +16546,7 @@
           <a:noFill/>
         </p:spPr>
         <p:txBody>
-          <a:bodyPr wrap="none" lIns="18288" rIns="18288" tIns="18288" bIns="18288">
+          <a:bodyPr wrap="none" lIns="18288" tIns="18288" rIns="18288" bIns="18288">
             <a:spAutoFit/>
           </a:bodyPr>
           <a:lstStyle/>
@@ -16375,8 +16571,8 @@
         </p:nvSpPr>
         <p:spPr>
           <a:xfrm>
-            <a:off x="6419088" y="3182112"/>
-            <a:ext cx="4069080" cy="228600"/>
+            <a:off x="6405372" y="2980944"/>
+            <a:ext cx="1716752" cy="506292"/>
           </a:xfrm>
           <a:prstGeom prst="rect">
             <a:avLst/>
@@ -16384,22 +16580,33 @@
           <a:noFill/>
         </p:spPr>
         <p:txBody>
-          <a:bodyPr wrap="none" lIns="18288" rIns="18288" tIns="18288" bIns="18288">
+          <a:bodyPr wrap="none" lIns="18288" tIns="18288" rIns="18288" bIns="18288">
             <a:spAutoFit/>
           </a:bodyPr>
           <a:lstStyle/>
           <a:p>
             <a:r>
-              <a:rPr sz="1250" b="0">
-                <a:solidFill>
-                  <a:srgbClr val="94A3B8"/>
+              <a:rPr sz="1250" b="0" dirty="0">
+                <a:solidFill>
+                  <a:srgbClr val="A78BFA"/>
                 </a:solidFill>
                 <a:latin typeface="Aptos"/>
               </a:rPr>
               <a:t>Tabular, vision,</a:t>
             </a:r>
-            <a:br/>
-            <a:r>
+            <a:br>
+              <a:rPr dirty="0">
+                <a:solidFill>
+                  <a:srgbClr val="A78BFA"/>
+                </a:solidFill>
+              </a:rPr>
+            </a:br>
+            <a:r>
+              <a:rPr dirty="0">
+                <a:solidFill>
+                  <a:srgbClr val="A78BFA"/>
+                </a:solidFill>
+              </a:rPr>
               <a:t>text, transformers</a:t>
             </a:r>
           </a:p>
@@ -16447,6 +16654,7 @@
           <a:lstStyle/>
           <a:p>
             <a:pPr algn="ctr"/>
+            <a:endParaRPr/>
           </a:p>
         </p:txBody>
       </p:sp>
@@ -16490,6 +16698,7 @@
           <a:lstStyle/>
           <a:p>
             <a:pPr algn="ctr"/>
+            <a:endParaRPr/>
           </a:p>
         </p:txBody>
       </p:sp>
@@ -16510,7 +16719,7 @@
           <a:noFill/>
         </p:spPr>
         <p:txBody>
-          <a:bodyPr wrap="none" lIns="18288" rIns="18288" tIns="18288" bIns="18288">
+          <a:bodyPr wrap="none" lIns="18288" tIns="18288" rIns="18288" bIns="18288">
             <a:spAutoFit/>
           </a:bodyPr>
           <a:lstStyle/>
@@ -16535,8 +16744,8 @@
         </p:nvSpPr>
         <p:spPr>
           <a:xfrm>
-            <a:off x="6419088" y="4416552"/>
-            <a:ext cx="4069080" cy="228600"/>
+            <a:off x="6419088" y="4224528"/>
+            <a:ext cx="1988814" cy="506292"/>
           </a:xfrm>
           <a:prstGeom prst="rect">
             <a:avLst/>
@@ -16544,22 +16753,33 @@
           <a:noFill/>
         </p:spPr>
         <p:txBody>
-          <a:bodyPr wrap="none" lIns="18288" rIns="18288" tIns="18288" bIns="18288">
+          <a:bodyPr wrap="none" lIns="18288" tIns="18288" rIns="18288" bIns="18288">
             <a:spAutoFit/>
           </a:bodyPr>
           <a:lstStyle/>
           <a:p>
             <a:r>
-              <a:rPr sz="1250" b="0">
-                <a:solidFill>
-                  <a:srgbClr val="94A3B8"/>
+              <a:rPr sz="1250" b="0" dirty="0">
+                <a:solidFill>
+                  <a:srgbClr val="34D399"/>
                 </a:solidFill>
                 <a:latin typeface="Aptos"/>
               </a:rPr>
               <a:t>RAG answers and</a:t>
             </a:r>
-            <a:br/>
-            <a:r>
+            <a:br>
+              <a:rPr dirty="0">
+                <a:solidFill>
+                  <a:srgbClr val="34D399"/>
+                </a:solidFill>
+              </a:rPr>
+            </a:br>
+            <a:r>
+              <a:rPr dirty="0">
+                <a:solidFill>
+                  <a:srgbClr val="34D399"/>
+                </a:solidFill>
+              </a:rPr>
               <a:t>hero image concepts</a:t>
             </a:r>
           </a:p>
@@ -16582,7 +16802,7 @@
           <a:noFill/>
         </p:spPr>
         <p:txBody>
-          <a:bodyPr wrap="none" lIns="18288" rIns="18288" tIns="18288" bIns="18288">
+          <a:bodyPr wrap="none" lIns="18288" tIns="18288" rIns="18288" bIns="18288">
             <a:spAutoFit/>
           </a:bodyPr>
           <a:lstStyle/>
@@ -16608,7 +16828,7 @@
 </file>
 
 <file path=ppt/slides/slide3.xml><?xml version="1.0" encoding="utf-8"?>
-<p:sld xmlns:a="http://schemas.openxmlformats.org/drawingml/2006/main" xmlns:p="http://schemas.openxmlformats.org/presentationml/2006/main" xmlns:r="http://schemas.openxmlformats.org/officeDocument/2006/relationships">
+<p:sld xmlns:a="http://schemas.openxmlformats.org/drawingml/2006/main" xmlns:r="http://schemas.openxmlformats.org/officeDocument/2006/relationships" xmlns:p="http://schemas.openxmlformats.org/presentationml/2006/main">
   <p:cSld>
     <p:bg>
       <p:bgPr>
@@ -16624,7 +16844,14 @@
         <p:cNvGrpSpPr/>
         <p:nvPr/>
       </p:nvGrpSpPr>
-      <p:grpSpPr/>
+      <p:grpSpPr>
+        <a:xfrm>
+          <a:off x="0" y="0"/>
+          <a:ext cx="0" cy="0"/>
+          <a:chOff x="0" y="0"/>
+          <a:chExt cx="0" cy="0"/>
+        </a:xfrm>
+      </p:grpSpPr>
       <p:sp>
         <p:nvSpPr>
           <p:cNvPr id="2" name="Rectangle 1"/>
@@ -16665,6 +16892,7 @@
           <a:lstStyle/>
           <a:p>
             <a:pPr algn="ctr"/>
+            <a:endParaRPr/>
           </a:p>
         </p:txBody>
       </p:sp>
@@ -16708,6 +16936,7 @@
           <a:lstStyle/>
           <a:p>
             <a:pPr algn="ctr"/>
+            <a:endParaRPr/>
           </a:p>
         </p:txBody>
       </p:sp>
@@ -16751,6 +16980,7 @@
           <a:lstStyle/>
           <a:p>
             <a:pPr algn="ctr"/>
+            <a:endParaRPr/>
           </a:p>
         </p:txBody>
       </p:sp>
@@ -16771,7 +17001,7 @@
           <a:noFill/>
         </p:spPr>
         <p:txBody>
-          <a:bodyPr wrap="none" lIns="18288" rIns="18288" tIns="18288" bIns="18288">
+          <a:bodyPr wrap="none" lIns="18288" tIns="18288" rIns="18288" bIns="18288">
             <a:spAutoFit/>
           </a:bodyPr>
           <a:lstStyle/>
@@ -16805,7 +17035,7 @@
           <a:noFill/>
         </p:spPr>
         <p:txBody>
-          <a:bodyPr wrap="none" lIns="18288" rIns="18288" tIns="18288" bIns="18288">
+          <a:bodyPr wrap="none" lIns="18288" tIns="18288" rIns="18288" bIns="18288">
             <a:spAutoFit/>
           </a:bodyPr>
           <a:lstStyle/>
@@ -16862,6 +17092,7 @@
           <a:lstStyle/>
           <a:p>
             <a:pPr algn="ctr"/>
+            <a:endParaRPr/>
           </a:p>
         </p:txBody>
       </p:sp>
@@ -16882,7 +17113,7 @@
           <a:noFill/>
         </p:spPr>
         <p:txBody>
-          <a:bodyPr wrap="none" lIns="18288" rIns="18288" tIns="18288" bIns="18288">
+          <a:bodyPr wrap="none" lIns="18288" tIns="18288" rIns="18288" bIns="18288">
             <a:spAutoFit/>
           </a:bodyPr>
           <a:lstStyle/>
@@ -16916,7 +17147,7 @@
           <a:noFill/>
         </p:spPr>
         <p:txBody>
-          <a:bodyPr wrap="none" lIns="18288" rIns="18288" tIns="18288" bIns="18288">
+          <a:bodyPr wrap="none" lIns="18288" tIns="18288" rIns="18288" bIns="18288">
             <a:spAutoFit/>
           </a:bodyPr>
           <a:lstStyle/>
@@ -16976,6 +17207,7 @@
           <a:lstStyle/>
           <a:p>
             <a:pPr algn="ctr"/>
+            <a:endParaRPr/>
           </a:p>
         </p:txBody>
       </p:sp>
@@ -17019,6 +17251,7 @@
           <a:lstStyle/>
           <a:p>
             <a:pPr algn="ctr"/>
+            <a:endParaRPr/>
           </a:p>
         </p:txBody>
       </p:sp>
@@ -17039,7 +17272,7 @@
           <a:noFill/>
         </p:spPr>
         <p:txBody>
-          <a:bodyPr wrap="none" lIns="18288" rIns="18288" tIns="18288" bIns="18288">
+          <a:bodyPr wrap="none" lIns="18288" tIns="18288" rIns="18288" bIns="18288">
             <a:spAutoFit/>
           </a:bodyPr>
           <a:lstStyle/>
@@ -17065,7 +17298,7 @@
         <p:spPr>
           <a:xfrm>
             <a:off x="914400" y="1975104"/>
-            <a:ext cx="4480560" cy="2194560"/>
+            <a:ext cx="3135410" cy="1060290"/>
           </a:xfrm>
           <a:prstGeom prst="rect">
             <a:avLst/>
@@ -17073,13 +17306,13 @@
           <a:noFill/>
         </p:spPr>
         <p:txBody>
-          <a:bodyPr wrap="none" lIns="18288" rIns="18288" tIns="18288" bIns="18288">
+          <a:bodyPr wrap="none" lIns="18288" tIns="18288" rIns="18288" bIns="18288">
             <a:spAutoFit/>
           </a:bodyPr>
           <a:lstStyle/>
           <a:p>
             <a:r>
-              <a:rPr sz="1250" b="0">
+              <a:rPr sz="1250" b="0" dirty="0">
                 <a:solidFill>
                   <a:srgbClr val="94A3B8"/>
                 </a:solidFill>
@@ -17087,18 +17320,76 @@
               </a:rPr>
               <a:t>Source: McAuley-Lab/Amazon-Reviews-2023</a:t>
             </a:r>
-            <a:br/>
-            <a:r>
-              <a:t>Category: All_Beauty</a:t>
-            </a:r>
-            <a:br/>
-            <a:r>
-              <a:t>Reviews: raw_review_All_Beauty</a:t>
-            </a:r>
-            <a:br/>
-            <a:r>
-              <a:t>Metadata: raw_meta_All_Beauty</a:t>
-            </a:r>
+            <a:br>
+              <a:rPr dirty="0"/>
+            </a:br>
+            <a:r>
+              <a:rPr dirty="0">
+                <a:solidFill>
+                  <a:srgbClr val="34D399"/>
+                </a:solidFill>
+              </a:rPr>
+              <a:t>Category: </a:t>
+            </a:r>
+            <a:r>
+              <a:rPr dirty="0" err="1">
+                <a:solidFill>
+                  <a:srgbClr val="34D399"/>
+                </a:solidFill>
+              </a:rPr>
+              <a:t>All_Beauty</a:t>
+            </a:r>
+            <a:br>
+              <a:rPr dirty="0">
+                <a:solidFill>
+                  <a:srgbClr val="34D399"/>
+                </a:solidFill>
+              </a:rPr>
+            </a:br>
+            <a:r>
+              <a:rPr dirty="0">
+                <a:solidFill>
+                  <a:srgbClr val="34D399"/>
+                </a:solidFill>
+              </a:rPr>
+              <a:t>Reviews: </a:t>
+            </a:r>
+            <a:r>
+              <a:rPr dirty="0" err="1">
+                <a:solidFill>
+                  <a:srgbClr val="34D399"/>
+                </a:solidFill>
+              </a:rPr>
+              <a:t>raw_review_All_Beauty</a:t>
+            </a:r>
+            <a:br>
+              <a:rPr dirty="0">
+                <a:solidFill>
+                  <a:srgbClr val="34D399"/>
+                </a:solidFill>
+              </a:rPr>
+            </a:br>
+            <a:r>
+              <a:rPr dirty="0">
+                <a:solidFill>
+                  <a:srgbClr val="34D399"/>
+                </a:solidFill>
+              </a:rPr>
+              <a:t>Metadata: </a:t>
+            </a:r>
+            <a:r>
+              <a:rPr dirty="0" err="1">
+                <a:solidFill>
+                  <a:srgbClr val="34D399"/>
+                </a:solidFill>
+              </a:rPr>
+              <a:t>raw_meta_All_Beauty</a:t>
+            </a:r>
+            <a:endParaRPr dirty="0">
+              <a:solidFill>
+                <a:srgbClr val="34D399"/>
+              </a:solidFill>
+            </a:endParaRPr>
           </a:p>
         </p:txBody>
       </p:sp>
@@ -17144,6 +17435,7 @@
           <a:lstStyle/>
           <a:p>
             <a:pPr algn="ctr"/>
+            <a:endParaRPr/>
           </a:p>
         </p:txBody>
       </p:sp>
@@ -17187,6 +17479,7 @@
           <a:lstStyle/>
           <a:p>
             <a:pPr algn="ctr"/>
+            <a:endParaRPr/>
           </a:p>
         </p:txBody>
       </p:sp>
@@ -17207,7 +17500,7 @@
           <a:noFill/>
         </p:spPr>
         <p:txBody>
-          <a:bodyPr wrap="none" lIns="18288" rIns="18288" tIns="18288" bIns="18288">
+          <a:bodyPr wrap="none" lIns="18288" tIns="18288" rIns="18288" bIns="18288">
             <a:spAutoFit/>
           </a:bodyPr>
           <a:lstStyle/>
@@ -17233,7 +17526,7 @@
         <p:spPr>
           <a:xfrm>
             <a:off x="914400" y="5056632"/>
-            <a:ext cx="4480560" cy="502920"/>
+            <a:ext cx="4383741" cy="421654"/>
           </a:xfrm>
           <a:prstGeom prst="rect">
             <a:avLst/>
@@ -17241,13 +17534,13 @@
           <a:noFill/>
         </p:spPr>
         <p:txBody>
-          <a:bodyPr wrap="none" lIns="18288" rIns="18288" tIns="18288" bIns="18288">
+          <a:bodyPr wrap="square" lIns="18288" tIns="18288" rIns="18288" bIns="18288">
             <a:spAutoFit/>
           </a:bodyPr>
           <a:lstStyle/>
           <a:p>
             <a:r>
-              <a:rPr sz="1250" b="0">
+              <a:rPr sz="1250" b="0" dirty="0">
                 <a:solidFill>
                   <a:srgbClr val="94A3B8"/>
                 </a:solidFill>
@@ -17275,7 +17568,7 @@
           <a:noFill/>
         </p:spPr>
         <p:txBody>
-          <a:bodyPr wrap="none" lIns="18288" rIns="18288" tIns="18288" bIns="18288">
+          <a:bodyPr wrap="none" lIns="18288" tIns="18288" rIns="18288" bIns="18288">
             <a:spAutoFit/>
           </a:bodyPr>
           <a:lstStyle/>
@@ -17309,7 +17602,7 @@
           <a:noFill/>
         </p:spPr>
         <p:txBody>
-          <a:bodyPr wrap="none" lIns="18288" rIns="18288" tIns="18288" bIns="18288">
+          <a:bodyPr wrap="none" lIns="18288" tIns="18288" rIns="18288" bIns="18288">
             <a:spAutoFit/>
           </a:bodyPr>
           <a:lstStyle/>
@@ -17366,6 +17659,7 @@
           <a:lstStyle/>
           <a:p>
             <a:pPr algn="ctr"/>
+            <a:endParaRPr/>
           </a:p>
         </p:txBody>
       </p:sp>
@@ -17409,6 +17703,7 @@
           <a:lstStyle/>
           <a:p>
             <a:pPr algn="ctr"/>
+            <a:endParaRPr/>
           </a:p>
         </p:txBody>
       </p:sp>
@@ -17429,7 +17724,7 @@
           <a:noFill/>
         </p:spPr>
         <p:txBody>
-          <a:bodyPr wrap="none" lIns="18288" rIns="18288" tIns="18288" bIns="18288">
+          <a:bodyPr wrap="none" lIns="18288" tIns="18288" rIns="18288" bIns="18288">
             <a:spAutoFit/>
           </a:bodyPr>
           <a:lstStyle/>
@@ -17464,7 +17759,7 @@
           <a:noFill/>
         </p:spPr>
         <p:txBody>
-          <a:bodyPr wrap="none" lIns="18288" rIns="18288" tIns="18288" bIns="18288">
+          <a:bodyPr wrap="none" lIns="18288" tIns="18288" rIns="18288" bIns="18288">
             <a:spAutoFit/>
           </a:bodyPr>
           <a:lstStyle/>
@@ -17521,6 +17816,7 @@
           <a:lstStyle/>
           <a:p>
             <a:pPr algn="ctr"/>
+            <a:endParaRPr/>
           </a:p>
         </p:txBody>
       </p:sp>
@@ -17564,6 +17860,7 @@
           <a:lstStyle/>
           <a:p>
             <a:pPr algn="ctr"/>
+            <a:endParaRPr/>
           </a:p>
         </p:txBody>
       </p:sp>
@@ -17584,7 +17881,7 @@
           <a:noFill/>
         </p:spPr>
         <p:txBody>
-          <a:bodyPr wrap="none" lIns="18288" rIns="18288" tIns="18288" bIns="18288">
+          <a:bodyPr wrap="none" lIns="18288" tIns="18288" rIns="18288" bIns="18288">
             <a:spAutoFit/>
           </a:bodyPr>
           <a:lstStyle/>
@@ -17619,7 +17916,7 @@
           <a:noFill/>
         </p:spPr>
         <p:txBody>
-          <a:bodyPr wrap="none" lIns="18288" rIns="18288" tIns="18288" bIns="18288">
+          <a:bodyPr wrap="none" lIns="18288" tIns="18288" rIns="18288" bIns="18288">
             <a:spAutoFit/>
           </a:bodyPr>
           <a:lstStyle/>
@@ -17676,6 +17973,7 @@
           <a:lstStyle/>
           <a:p>
             <a:pPr algn="ctr"/>
+            <a:endParaRPr/>
           </a:p>
         </p:txBody>
       </p:sp>
@@ -17719,6 +18017,7 @@
           <a:lstStyle/>
           <a:p>
             <a:pPr algn="ctr"/>
+            <a:endParaRPr/>
           </a:p>
         </p:txBody>
       </p:sp>
@@ -17739,7 +18038,7 @@
           <a:noFill/>
         </p:spPr>
         <p:txBody>
-          <a:bodyPr wrap="none" lIns="18288" rIns="18288" tIns="18288" bIns="18288">
+          <a:bodyPr wrap="none" lIns="18288" tIns="18288" rIns="18288" bIns="18288">
             <a:spAutoFit/>
           </a:bodyPr>
           <a:lstStyle/>
@@ -17774,7 +18073,7 @@
           <a:noFill/>
         </p:spPr>
         <p:txBody>
-          <a:bodyPr wrap="none" lIns="18288" rIns="18288" tIns="18288" bIns="18288">
+          <a:bodyPr wrap="none" lIns="18288" tIns="18288" rIns="18288" bIns="18288">
             <a:spAutoFit/>
           </a:bodyPr>
           <a:lstStyle/>
@@ -17833,6 +18132,7 @@
           <a:lstStyle/>
           <a:p>
             <a:pPr algn="ctr"/>
+            <a:endParaRPr/>
           </a:p>
         </p:txBody>
       </p:sp>
@@ -17853,7 +18153,7 @@
           <a:noFill/>
         </p:spPr>
         <p:txBody>
-          <a:bodyPr wrap="none" lIns="18288" rIns="18288" tIns="18288" bIns="18288">
+          <a:bodyPr wrap="none" lIns="18288" tIns="18288" rIns="18288" bIns="18288">
             <a:spAutoFit/>
           </a:bodyPr>
           <a:lstStyle/>
@@ -17913,6 +18213,7 @@
           <a:lstStyle/>
           <a:p>
             <a:pPr algn="ctr"/>
+            <a:endParaRPr/>
           </a:p>
         </p:txBody>
       </p:sp>
@@ -17933,7 +18234,7 @@
           <a:noFill/>
         </p:spPr>
         <p:txBody>
-          <a:bodyPr wrap="none" lIns="18288" rIns="18288" tIns="18288" bIns="18288">
+          <a:bodyPr wrap="none" lIns="18288" tIns="18288" rIns="18288" bIns="18288">
             <a:spAutoFit/>
           </a:bodyPr>
           <a:lstStyle/>
@@ -17993,6 +18294,7 @@
           <a:lstStyle/>
           <a:p>
             <a:pPr algn="ctr"/>
+            <a:endParaRPr/>
           </a:p>
         </p:txBody>
       </p:sp>
@@ -18013,7 +18315,7 @@
           <a:noFill/>
         </p:spPr>
         <p:txBody>
-          <a:bodyPr wrap="none" lIns="18288" rIns="18288" tIns="18288" bIns="18288">
+          <a:bodyPr wrap="none" lIns="18288" tIns="18288" rIns="18288" bIns="18288">
             <a:spAutoFit/>
           </a:bodyPr>
           <a:lstStyle/>
@@ -18040,7 +18342,7 @@
 </file>
 
 <file path=ppt/slides/slide4.xml><?xml version="1.0" encoding="utf-8"?>
-<p:sld xmlns:a="http://schemas.openxmlformats.org/drawingml/2006/main" xmlns:p="http://schemas.openxmlformats.org/presentationml/2006/main" xmlns:r="http://schemas.openxmlformats.org/officeDocument/2006/relationships">
+<p:sld xmlns:a="http://schemas.openxmlformats.org/drawingml/2006/main" xmlns:r="http://schemas.openxmlformats.org/officeDocument/2006/relationships" xmlns:p="http://schemas.openxmlformats.org/presentationml/2006/main">
   <p:cSld>
     <p:bg>
       <p:bgPr>
@@ -18056,7 +18358,14 @@
         <p:cNvGrpSpPr/>
         <p:nvPr/>
       </p:nvGrpSpPr>
-      <p:grpSpPr/>
+      <p:grpSpPr>
+        <a:xfrm>
+          <a:off x="0" y="0"/>
+          <a:ext cx="0" cy="0"/>
+          <a:chOff x="0" y="0"/>
+          <a:chExt cx="0" cy="0"/>
+        </a:xfrm>
+      </p:grpSpPr>
       <p:sp>
         <p:nvSpPr>
           <p:cNvPr id="2" name="Rectangle 1"/>
@@ -18097,6 +18406,7 @@
           <a:lstStyle/>
           <a:p>
             <a:pPr algn="ctr"/>
+            <a:endParaRPr/>
           </a:p>
         </p:txBody>
       </p:sp>
@@ -18140,6 +18450,7 @@
           <a:lstStyle/>
           <a:p>
             <a:pPr algn="ctr"/>
+            <a:endParaRPr/>
           </a:p>
         </p:txBody>
       </p:sp>
@@ -18183,6 +18494,7 @@
           <a:lstStyle/>
           <a:p>
             <a:pPr algn="ctr"/>
+            <a:endParaRPr/>
           </a:p>
         </p:txBody>
       </p:sp>
@@ -18203,7 +18515,7 @@
           <a:noFill/>
         </p:spPr>
         <p:txBody>
-          <a:bodyPr wrap="none" lIns="18288" rIns="18288" tIns="18288" bIns="18288">
+          <a:bodyPr wrap="none" lIns="18288" tIns="18288" rIns="18288" bIns="18288">
             <a:spAutoFit/>
           </a:bodyPr>
           <a:lstStyle/>
@@ -18237,7 +18549,7 @@
           <a:noFill/>
         </p:spPr>
         <p:txBody>
-          <a:bodyPr wrap="none" lIns="18288" rIns="18288" tIns="18288" bIns="18288">
+          <a:bodyPr wrap="none" lIns="18288" tIns="18288" rIns="18288" bIns="18288">
             <a:spAutoFit/>
           </a:bodyPr>
           <a:lstStyle/>
@@ -18294,6 +18606,7 @@
           <a:lstStyle/>
           <a:p>
             <a:pPr algn="ctr"/>
+            <a:endParaRPr/>
           </a:p>
         </p:txBody>
       </p:sp>
@@ -18314,7 +18627,7 @@
           <a:noFill/>
         </p:spPr>
         <p:txBody>
-          <a:bodyPr wrap="none" lIns="18288" rIns="18288" tIns="18288" bIns="18288">
+          <a:bodyPr wrap="none" lIns="18288" tIns="18288" rIns="18288" bIns="18288">
             <a:spAutoFit/>
           </a:bodyPr>
           <a:lstStyle/>
@@ -18348,7 +18661,7 @@
           <a:noFill/>
         </p:spPr>
         <p:txBody>
-          <a:bodyPr wrap="none" lIns="18288" rIns="18288" tIns="18288" bIns="18288">
+          <a:bodyPr wrap="none" lIns="18288" tIns="18288" rIns="18288" bIns="18288">
             <a:spAutoFit/>
           </a:bodyPr>
           <a:lstStyle/>
@@ -18408,6 +18721,7 @@
           <a:lstStyle/>
           <a:p>
             <a:pPr algn="ctr"/>
+            <a:endParaRPr/>
           </a:p>
         </p:txBody>
       </p:sp>
@@ -18428,7 +18742,7 @@
           <a:noFill/>
         </p:spPr>
         <p:txBody>
-          <a:bodyPr wrap="none" lIns="18288" rIns="18288" tIns="18288" bIns="18288">
+          <a:bodyPr wrap="none" lIns="18288" tIns="18288" rIns="18288" bIns="18288">
             <a:spAutoFit/>
           </a:bodyPr>
           <a:lstStyle/>
@@ -18463,7 +18777,7 @@
           <a:noFill/>
         </p:spPr>
         <p:txBody>
-          <a:bodyPr wrap="none" lIns="18288" rIns="18288" tIns="18288" bIns="18288">
+          <a:bodyPr wrap="none" lIns="18288" tIns="18288" rIns="18288" bIns="18288">
             <a:spAutoFit/>
           </a:bodyPr>
           <a:lstStyle/>
@@ -18523,6 +18837,7 @@
           <a:lstStyle/>
           <a:p>
             <a:pPr algn="ctr"/>
+            <a:endParaRPr/>
           </a:p>
         </p:txBody>
       </p:sp>
@@ -18543,7 +18858,7 @@
           <a:noFill/>
         </p:spPr>
         <p:txBody>
-          <a:bodyPr wrap="none" lIns="18288" rIns="18288" tIns="18288" bIns="18288">
+          <a:bodyPr wrap="none" lIns="18288" tIns="18288" rIns="18288" bIns="18288">
             <a:spAutoFit/>
           </a:bodyPr>
           <a:lstStyle/>
@@ -18578,7 +18893,7 @@
           <a:noFill/>
         </p:spPr>
         <p:txBody>
-          <a:bodyPr wrap="none" lIns="18288" rIns="18288" tIns="18288" bIns="18288">
+          <a:bodyPr wrap="none" lIns="18288" tIns="18288" rIns="18288" bIns="18288">
             <a:spAutoFit/>
           </a:bodyPr>
           <a:lstStyle/>
@@ -18638,6 +18953,7 @@
           <a:lstStyle/>
           <a:p>
             <a:pPr algn="ctr"/>
+            <a:endParaRPr/>
           </a:p>
         </p:txBody>
       </p:sp>
@@ -18658,7 +18974,7 @@
           <a:noFill/>
         </p:spPr>
         <p:txBody>
-          <a:bodyPr wrap="none" lIns="18288" rIns="18288" tIns="18288" bIns="18288">
+          <a:bodyPr wrap="none" lIns="18288" tIns="18288" rIns="18288" bIns="18288">
             <a:spAutoFit/>
           </a:bodyPr>
           <a:lstStyle/>
@@ -18684,8 +19000,8 @@
         </p:nvSpPr>
         <p:spPr>
           <a:xfrm>
-            <a:off x="4910328" y="2267712"/>
-            <a:ext cx="1380744" cy="365759"/>
+            <a:off x="4873752" y="2267712"/>
+            <a:ext cx="1417320" cy="329321"/>
           </a:xfrm>
           <a:prstGeom prst="rect">
             <a:avLst/>
@@ -18693,14 +19009,14 @@
           <a:noFill/>
         </p:spPr>
         <p:txBody>
-          <a:bodyPr wrap="none" lIns="18288" rIns="18288" tIns="18288" bIns="18288">
+          <a:bodyPr wrap="square" lIns="18288" tIns="18288" rIns="18288" bIns="18288">
             <a:spAutoFit/>
           </a:bodyPr>
           <a:lstStyle/>
           <a:p>
             <a:pPr algn="ctr"/>
             <a:r>
-              <a:rPr sz="950" b="0">
+              <a:rPr sz="950" b="0" dirty="0">
                 <a:solidFill>
                   <a:srgbClr val="94A3B8"/>
                 </a:solidFill>
@@ -18753,6 +19069,7 @@
           <a:lstStyle/>
           <a:p>
             <a:pPr algn="ctr"/>
+            <a:endParaRPr/>
           </a:p>
         </p:txBody>
       </p:sp>
@@ -18773,7 +19090,7 @@
           <a:noFill/>
         </p:spPr>
         <p:txBody>
-          <a:bodyPr wrap="none" lIns="18288" rIns="18288" tIns="18288" bIns="18288">
+          <a:bodyPr wrap="none" lIns="18288" tIns="18288" rIns="18288" bIns="18288">
             <a:spAutoFit/>
           </a:bodyPr>
           <a:lstStyle/>
@@ -18808,7 +19125,7 @@
           <a:noFill/>
         </p:spPr>
         <p:txBody>
-          <a:bodyPr wrap="none" lIns="18288" rIns="18288" tIns="18288" bIns="18288">
+          <a:bodyPr wrap="none" lIns="18288" tIns="18288" rIns="18288" bIns="18288">
             <a:spAutoFit/>
           </a:bodyPr>
           <a:lstStyle/>
@@ -18868,6 +19185,7 @@
           <a:lstStyle/>
           <a:p>
             <a:pPr algn="ctr"/>
+            <a:endParaRPr/>
           </a:p>
         </p:txBody>
       </p:sp>
@@ -18888,7 +19206,7 @@
           <a:noFill/>
         </p:spPr>
         <p:txBody>
-          <a:bodyPr wrap="none" lIns="18288" rIns="18288" tIns="18288" bIns="18288">
+          <a:bodyPr wrap="none" lIns="18288" tIns="18288" rIns="18288" bIns="18288">
             <a:spAutoFit/>
           </a:bodyPr>
           <a:lstStyle/>
@@ -18923,7 +19241,7 @@
           <a:noFill/>
         </p:spPr>
         <p:txBody>
-          <a:bodyPr wrap="none" lIns="18288" rIns="18288" tIns="18288" bIns="18288">
+          <a:bodyPr wrap="none" lIns="18288" tIns="18288" rIns="18288" bIns="18288">
             <a:spAutoFit/>
           </a:bodyPr>
           <a:lstStyle/>
@@ -19123,6 +19441,7 @@
           <a:lstStyle/>
           <a:p>
             <a:pPr algn="ctr"/>
+            <a:endParaRPr/>
           </a:p>
         </p:txBody>
       </p:sp>
@@ -19166,6 +19485,7 @@
           <a:lstStyle/>
           <a:p>
             <a:pPr algn="ctr"/>
+            <a:endParaRPr/>
           </a:p>
         </p:txBody>
       </p:sp>
@@ -19186,7 +19506,7 @@
           <a:noFill/>
         </p:spPr>
         <p:txBody>
-          <a:bodyPr wrap="none" lIns="18288" rIns="18288" tIns="18288" bIns="18288">
+          <a:bodyPr wrap="none" lIns="18288" tIns="18288" rIns="18288" bIns="18288">
             <a:spAutoFit/>
           </a:bodyPr>
           <a:lstStyle/>
@@ -19212,7 +19532,7 @@
         <p:spPr>
           <a:xfrm>
             <a:off x="1115568" y="4325112"/>
-            <a:ext cx="1965960" cy="320040"/>
+            <a:ext cx="1965960" cy="421654"/>
           </a:xfrm>
           <a:prstGeom prst="rect">
             <a:avLst/>
@@ -19220,13 +19540,13 @@
           <a:noFill/>
         </p:spPr>
         <p:txBody>
-          <a:bodyPr wrap="none" lIns="18288" rIns="18288" tIns="18288" bIns="18288">
+          <a:bodyPr wrap="square" lIns="18288" tIns="18288" rIns="18288" bIns="18288">
             <a:spAutoFit/>
           </a:bodyPr>
           <a:lstStyle/>
           <a:p>
             <a:r>
-              <a:rPr sz="1250" b="0">
+              <a:rPr sz="1250" b="0" dirty="0">
                 <a:solidFill>
                   <a:srgbClr val="94A3B8"/>
                 </a:solidFill>
@@ -19279,6 +19599,7 @@
           <a:lstStyle/>
           <a:p>
             <a:pPr algn="ctr"/>
+            <a:endParaRPr/>
           </a:p>
         </p:txBody>
       </p:sp>
@@ -19322,6 +19643,7 @@
           <a:lstStyle/>
           <a:p>
             <a:pPr algn="ctr"/>
+            <a:endParaRPr/>
           </a:p>
         </p:txBody>
       </p:sp>
@@ -19342,7 +19664,7 @@
           <a:noFill/>
         </p:spPr>
         <p:txBody>
-          <a:bodyPr wrap="none" lIns="18288" rIns="18288" tIns="18288" bIns="18288">
+          <a:bodyPr wrap="none" lIns="18288" tIns="18288" rIns="18288" bIns="18288">
             <a:spAutoFit/>
           </a:bodyPr>
           <a:lstStyle/>
@@ -19368,7 +19690,7 @@
         <p:spPr>
           <a:xfrm>
             <a:off x="3630168" y="4325112"/>
-            <a:ext cx="1965960" cy="320040"/>
+            <a:ext cx="1965960" cy="421654"/>
           </a:xfrm>
           <a:prstGeom prst="rect">
             <a:avLst/>
@@ -19376,13 +19698,13 @@
           <a:noFill/>
         </p:spPr>
         <p:txBody>
-          <a:bodyPr wrap="none" lIns="18288" rIns="18288" tIns="18288" bIns="18288">
+          <a:bodyPr wrap="square" lIns="18288" tIns="18288" rIns="18288" bIns="18288">
             <a:spAutoFit/>
           </a:bodyPr>
           <a:lstStyle/>
           <a:p>
             <a:r>
-              <a:rPr sz="1250" b="0">
+              <a:rPr sz="1250" b="0" dirty="0">
                 <a:solidFill>
                   <a:srgbClr val="94A3B8"/>
                 </a:solidFill>
@@ -19435,6 +19757,7 @@
           <a:lstStyle/>
           <a:p>
             <a:pPr algn="ctr"/>
+            <a:endParaRPr/>
           </a:p>
         </p:txBody>
       </p:sp>
@@ -19478,6 +19801,7 @@
           <a:lstStyle/>
           <a:p>
             <a:pPr algn="ctr"/>
+            <a:endParaRPr/>
           </a:p>
         </p:txBody>
       </p:sp>
@@ -19498,7 +19822,7 @@
           <a:noFill/>
         </p:spPr>
         <p:txBody>
-          <a:bodyPr wrap="none" lIns="18288" rIns="18288" tIns="18288" bIns="18288">
+          <a:bodyPr wrap="none" lIns="18288" tIns="18288" rIns="18288" bIns="18288">
             <a:spAutoFit/>
           </a:bodyPr>
           <a:lstStyle/>
@@ -19524,7 +19848,7 @@
         <p:spPr>
           <a:xfrm>
             <a:off x="6144768" y="4325112"/>
-            <a:ext cx="1965960" cy="320040"/>
+            <a:ext cx="1965960" cy="421654"/>
           </a:xfrm>
           <a:prstGeom prst="rect">
             <a:avLst/>
@@ -19532,13 +19856,13 @@
           <a:noFill/>
         </p:spPr>
         <p:txBody>
-          <a:bodyPr wrap="none" lIns="18288" rIns="18288" tIns="18288" bIns="18288">
+          <a:bodyPr wrap="square" lIns="18288" tIns="18288" rIns="18288" bIns="18288">
             <a:spAutoFit/>
           </a:bodyPr>
           <a:lstStyle/>
           <a:p>
             <a:r>
-              <a:rPr sz="1250" b="0">
+              <a:rPr sz="1250" b="0" dirty="0">
                 <a:solidFill>
                   <a:srgbClr val="94A3B8"/>
                 </a:solidFill>
@@ -19591,6 +19915,7 @@
           <a:lstStyle/>
           <a:p>
             <a:pPr algn="ctr"/>
+            <a:endParaRPr/>
           </a:p>
         </p:txBody>
       </p:sp>
@@ -19634,6 +19959,7 @@
           <a:lstStyle/>
           <a:p>
             <a:pPr algn="ctr"/>
+            <a:endParaRPr/>
           </a:p>
         </p:txBody>
       </p:sp>
@@ -19654,7 +19980,7 @@
           <a:noFill/>
         </p:spPr>
         <p:txBody>
-          <a:bodyPr wrap="none" lIns="18288" rIns="18288" tIns="18288" bIns="18288">
+          <a:bodyPr wrap="none" lIns="18288" tIns="18288" rIns="18288" bIns="18288">
             <a:spAutoFit/>
           </a:bodyPr>
           <a:lstStyle/>
@@ -19680,7 +20006,7 @@
         <p:spPr>
           <a:xfrm>
             <a:off x="8659368" y="4325112"/>
-            <a:ext cx="1965960" cy="320040"/>
+            <a:ext cx="1965960" cy="421654"/>
           </a:xfrm>
           <a:prstGeom prst="rect">
             <a:avLst/>
@@ -19688,13 +20014,13 @@
           <a:noFill/>
         </p:spPr>
         <p:txBody>
-          <a:bodyPr wrap="none" lIns="18288" rIns="18288" tIns="18288" bIns="18288">
+          <a:bodyPr wrap="square" lIns="18288" tIns="18288" rIns="18288" bIns="18288">
             <a:spAutoFit/>
           </a:bodyPr>
           <a:lstStyle/>
           <a:p>
             <a:r>
-              <a:rPr sz="1250" b="0">
+              <a:rPr sz="1250" b="0" dirty="0">
                 <a:solidFill>
                   <a:srgbClr val="94A3B8"/>
                 </a:solidFill>
@@ -19722,7 +20048,7 @@
           <a:noFill/>
         </p:spPr>
         <p:txBody>
-          <a:bodyPr wrap="none" lIns="18288" rIns="18288" tIns="18288" bIns="18288">
+          <a:bodyPr wrap="none" lIns="18288" tIns="18288" rIns="18288" bIns="18288">
             <a:spAutoFit/>
           </a:bodyPr>
           <a:lstStyle/>
@@ -19748,7 +20074,7 @@
 </file>
 
 <file path=ppt/slides/slide5.xml><?xml version="1.0" encoding="utf-8"?>
-<p:sld xmlns:a="http://schemas.openxmlformats.org/drawingml/2006/main" xmlns:p="http://schemas.openxmlformats.org/presentationml/2006/main" xmlns:r="http://schemas.openxmlformats.org/officeDocument/2006/relationships">
+<p:sld xmlns:a="http://schemas.openxmlformats.org/drawingml/2006/main" xmlns:r="http://schemas.openxmlformats.org/officeDocument/2006/relationships" xmlns:p="http://schemas.openxmlformats.org/presentationml/2006/main">
   <p:cSld>
     <p:bg>
       <p:bgPr>
@@ -19764,7 +20090,14 @@
         <p:cNvGrpSpPr/>
         <p:nvPr/>
       </p:nvGrpSpPr>
-      <p:grpSpPr/>
+      <p:grpSpPr>
+        <a:xfrm>
+          <a:off x="0" y="0"/>
+          <a:ext cx="0" cy="0"/>
+          <a:chOff x="0" y="0"/>
+          <a:chExt cx="0" cy="0"/>
+        </a:xfrm>
+      </p:grpSpPr>
       <p:sp>
         <p:nvSpPr>
           <p:cNvPr id="2" name="Rectangle 1"/>
@@ -19805,6 +20138,7 @@
           <a:lstStyle/>
           <a:p>
             <a:pPr algn="ctr"/>
+            <a:endParaRPr/>
           </a:p>
         </p:txBody>
       </p:sp>
@@ -19848,6 +20182,7 @@
           <a:lstStyle/>
           <a:p>
             <a:pPr algn="ctr"/>
+            <a:endParaRPr/>
           </a:p>
         </p:txBody>
       </p:sp>
@@ -19891,6 +20226,7 @@
           <a:lstStyle/>
           <a:p>
             <a:pPr algn="ctr"/>
+            <a:endParaRPr/>
           </a:p>
         </p:txBody>
       </p:sp>
@@ -19911,7 +20247,7 @@
           <a:noFill/>
         </p:spPr>
         <p:txBody>
-          <a:bodyPr wrap="none" lIns="18288" rIns="18288" tIns="18288" bIns="18288">
+          <a:bodyPr wrap="none" lIns="18288" tIns="18288" rIns="18288" bIns="18288">
             <a:spAutoFit/>
           </a:bodyPr>
           <a:lstStyle/>
@@ -19945,7 +20281,7 @@
           <a:noFill/>
         </p:spPr>
         <p:txBody>
-          <a:bodyPr wrap="none" lIns="18288" rIns="18288" tIns="18288" bIns="18288">
+          <a:bodyPr wrap="none" lIns="18288" tIns="18288" rIns="18288" bIns="18288">
             <a:spAutoFit/>
           </a:bodyPr>
           <a:lstStyle/>
@@ -20002,6 +20338,7 @@
           <a:lstStyle/>
           <a:p>
             <a:pPr algn="ctr"/>
+            <a:endParaRPr/>
           </a:p>
         </p:txBody>
       </p:sp>
@@ -20022,7 +20359,7 @@
           <a:noFill/>
         </p:spPr>
         <p:txBody>
-          <a:bodyPr wrap="none" lIns="18288" rIns="18288" tIns="18288" bIns="18288">
+          <a:bodyPr wrap="none" lIns="18288" tIns="18288" rIns="18288" bIns="18288">
             <a:spAutoFit/>
           </a:bodyPr>
           <a:lstStyle/>
@@ -20056,7 +20393,7 @@
           <a:noFill/>
         </p:spPr>
         <p:txBody>
-          <a:bodyPr wrap="none" lIns="18288" rIns="18288" tIns="18288" bIns="18288">
+          <a:bodyPr wrap="none" lIns="18288" tIns="18288" rIns="18288" bIns="18288">
             <a:spAutoFit/>
           </a:bodyPr>
           <a:lstStyle/>
@@ -20116,6 +20453,7 @@
           <a:lstStyle/>
           <a:p>
             <a:pPr algn="ctr"/>
+            <a:endParaRPr/>
           </a:p>
         </p:txBody>
       </p:sp>
@@ -20136,7 +20474,7 @@
           <a:noFill/>
         </p:spPr>
         <p:txBody>
-          <a:bodyPr wrap="none" lIns="18288" rIns="18288" tIns="18288" bIns="18288">
+          <a:bodyPr wrap="none" lIns="18288" tIns="18288" rIns="18288" bIns="18288">
             <a:spAutoFit/>
           </a:bodyPr>
           <a:lstStyle/>
@@ -20171,7 +20509,7 @@
           <a:noFill/>
         </p:spPr>
         <p:txBody>
-          <a:bodyPr wrap="none" lIns="18288" rIns="18288" tIns="18288" bIns="18288">
+          <a:bodyPr wrap="none" lIns="18288" tIns="18288" rIns="18288" bIns="18288">
             <a:spAutoFit/>
           </a:bodyPr>
           <a:lstStyle/>
@@ -20266,6 +20604,7 @@
           <a:lstStyle/>
           <a:p>
             <a:pPr algn="ctr"/>
+            <a:endParaRPr/>
           </a:p>
         </p:txBody>
       </p:sp>
@@ -20286,7 +20625,7 @@
           <a:noFill/>
         </p:spPr>
         <p:txBody>
-          <a:bodyPr wrap="none" lIns="18288" rIns="18288" tIns="18288" bIns="18288">
+          <a:bodyPr wrap="none" lIns="18288" tIns="18288" rIns="18288" bIns="18288">
             <a:spAutoFit/>
           </a:bodyPr>
           <a:lstStyle/>
@@ -20321,7 +20660,7 @@
           <a:noFill/>
         </p:spPr>
         <p:txBody>
-          <a:bodyPr wrap="none" lIns="18288" rIns="18288" tIns="18288" bIns="18288">
+          <a:bodyPr wrap="none" lIns="18288" tIns="18288" rIns="18288" bIns="18288">
             <a:spAutoFit/>
           </a:bodyPr>
           <a:lstStyle/>
@@ -20416,6 +20755,7 @@
           <a:lstStyle/>
           <a:p>
             <a:pPr algn="ctr"/>
+            <a:endParaRPr/>
           </a:p>
         </p:txBody>
       </p:sp>
@@ -20436,7 +20776,7 @@
           <a:noFill/>
         </p:spPr>
         <p:txBody>
-          <a:bodyPr wrap="none" lIns="18288" rIns="18288" tIns="18288" bIns="18288">
+          <a:bodyPr wrap="none" lIns="18288" tIns="18288" rIns="18288" bIns="18288">
             <a:spAutoFit/>
           </a:bodyPr>
           <a:lstStyle/>
@@ -20471,7 +20811,7 @@
           <a:noFill/>
         </p:spPr>
         <p:txBody>
-          <a:bodyPr wrap="none" lIns="18288" rIns="18288" tIns="18288" bIns="18288">
+          <a:bodyPr wrap="none" lIns="18288" tIns="18288" rIns="18288" bIns="18288">
             <a:spAutoFit/>
           </a:bodyPr>
           <a:lstStyle/>
@@ -20566,6 +20906,7 @@
           <a:lstStyle/>
           <a:p>
             <a:pPr algn="ctr"/>
+            <a:endParaRPr/>
           </a:p>
         </p:txBody>
       </p:sp>
@@ -20586,7 +20927,7 @@
           <a:noFill/>
         </p:spPr>
         <p:txBody>
-          <a:bodyPr wrap="none" lIns="18288" rIns="18288" tIns="18288" bIns="18288">
+          <a:bodyPr wrap="none" lIns="18288" tIns="18288" rIns="18288" bIns="18288">
             <a:spAutoFit/>
           </a:bodyPr>
           <a:lstStyle/>
@@ -20621,7 +20962,7 @@
           <a:noFill/>
         </p:spPr>
         <p:txBody>
-          <a:bodyPr wrap="none" lIns="18288" rIns="18288" tIns="18288" bIns="18288">
+          <a:bodyPr wrap="none" lIns="18288" tIns="18288" rIns="18288" bIns="18288">
             <a:spAutoFit/>
           </a:bodyPr>
           <a:lstStyle/>
@@ -20716,6 +21057,7 @@
           <a:lstStyle/>
           <a:p>
             <a:pPr algn="ctr"/>
+            <a:endParaRPr/>
           </a:p>
         </p:txBody>
       </p:sp>
@@ -20736,7 +21078,7 @@
           <a:noFill/>
         </p:spPr>
         <p:txBody>
-          <a:bodyPr wrap="none" lIns="18288" rIns="18288" tIns="18288" bIns="18288">
+          <a:bodyPr wrap="none" lIns="18288" tIns="18288" rIns="18288" bIns="18288">
             <a:spAutoFit/>
           </a:bodyPr>
           <a:lstStyle/>
@@ -20771,7 +21113,7 @@
           <a:noFill/>
         </p:spPr>
         <p:txBody>
-          <a:bodyPr wrap="none" lIns="18288" rIns="18288" tIns="18288" bIns="18288">
+          <a:bodyPr wrap="none" lIns="18288" tIns="18288" rIns="18288" bIns="18288">
             <a:spAutoFit/>
           </a:bodyPr>
           <a:lstStyle/>
@@ -20806,7 +21148,7 @@
           <a:noFill/>
         </p:spPr>
         <p:txBody>
-          <a:bodyPr wrap="none" lIns="73152" rIns="54864" tIns="36576" bIns="36576">
+          <a:bodyPr wrap="none" lIns="73152" tIns="36576" rIns="54864" bIns="36576">
             <a:spAutoFit/>
           </a:bodyPr>
           <a:lstStyle/>
@@ -20902,6 +21244,7 @@
           <a:lstStyle/>
           <a:p>
             <a:pPr algn="ctr"/>
+            <a:endParaRPr/>
           </a:p>
         </p:txBody>
       </p:sp>
@@ -20945,6 +21288,7 @@
           <a:lstStyle/>
           <a:p>
             <a:pPr algn="ctr"/>
+            <a:endParaRPr/>
           </a:p>
         </p:txBody>
       </p:sp>
@@ -20965,7 +21309,7 @@
           <a:noFill/>
         </p:spPr>
         <p:txBody>
-          <a:bodyPr wrap="none" lIns="18288" rIns="18288" tIns="18288" bIns="18288">
+          <a:bodyPr wrap="none" lIns="18288" tIns="18288" rIns="18288" bIns="18288">
             <a:spAutoFit/>
           </a:bodyPr>
           <a:lstStyle/>
@@ -20991,7 +21335,7 @@
         <p:spPr>
           <a:xfrm>
             <a:off x="9299448" y="4233672"/>
-            <a:ext cx="1783079" cy="777240"/>
+            <a:ext cx="1783079" cy="806375"/>
           </a:xfrm>
           <a:prstGeom prst="rect">
             <a:avLst/>
@@ -20999,13 +21343,13 @@
           <a:noFill/>
         </p:spPr>
         <p:txBody>
-          <a:bodyPr wrap="none" lIns="18288" rIns="18288" tIns="18288" bIns="18288">
+          <a:bodyPr wrap="square" lIns="18288" tIns="18288" rIns="18288" bIns="18288">
             <a:spAutoFit/>
           </a:bodyPr>
           <a:lstStyle/>
           <a:p>
             <a:r>
-              <a:rPr sz="1250" b="0">
+              <a:rPr sz="1250" b="0" dirty="0">
                 <a:solidFill>
                   <a:srgbClr val="94A3B8"/>
                 </a:solidFill>
@@ -21025,7 +21369,7 @@
 </file>
 
 <file path=ppt/slides/slide6.xml><?xml version="1.0" encoding="utf-8"?>
-<p:sld xmlns:a="http://schemas.openxmlformats.org/drawingml/2006/main" xmlns:p="http://schemas.openxmlformats.org/presentationml/2006/main" xmlns:r="http://schemas.openxmlformats.org/officeDocument/2006/relationships">
+<p:sld xmlns:a="http://schemas.openxmlformats.org/drawingml/2006/main" xmlns:r="http://schemas.openxmlformats.org/officeDocument/2006/relationships" xmlns:p="http://schemas.openxmlformats.org/presentationml/2006/main">
   <p:cSld>
     <p:bg>
       <p:bgPr>
@@ -21041,7 +21385,14 @@
         <p:cNvGrpSpPr/>
         <p:nvPr/>
       </p:nvGrpSpPr>
-      <p:grpSpPr/>
+      <p:grpSpPr>
+        <a:xfrm>
+          <a:off x="0" y="0"/>
+          <a:ext cx="0" cy="0"/>
+          <a:chOff x="0" y="0"/>
+          <a:chExt cx="0" cy="0"/>
+        </a:xfrm>
+      </p:grpSpPr>
       <p:sp>
         <p:nvSpPr>
           <p:cNvPr id="2" name="Rectangle 1"/>
@@ -21082,6 +21433,7 @@
           <a:lstStyle/>
           <a:p>
             <a:pPr algn="ctr"/>
+            <a:endParaRPr/>
           </a:p>
         </p:txBody>
       </p:sp>
@@ -21125,6 +21477,7 @@
           <a:lstStyle/>
           <a:p>
             <a:pPr algn="ctr"/>
+            <a:endParaRPr/>
           </a:p>
         </p:txBody>
       </p:sp>
@@ -21168,6 +21521,7 @@
           <a:lstStyle/>
           <a:p>
             <a:pPr algn="ctr"/>
+            <a:endParaRPr/>
           </a:p>
         </p:txBody>
       </p:sp>
@@ -21188,7 +21542,7 @@
           <a:noFill/>
         </p:spPr>
         <p:txBody>
-          <a:bodyPr wrap="none" lIns="18288" rIns="18288" tIns="18288" bIns="18288">
+          <a:bodyPr wrap="none" lIns="18288" tIns="18288" rIns="18288" bIns="18288">
             <a:spAutoFit/>
           </a:bodyPr>
           <a:lstStyle/>
@@ -21222,7 +21576,7 @@
           <a:noFill/>
         </p:spPr>
         <p:txBody>
-          <a:bodyPr wrap="none" lIns="18288" rIns="18288" tIns="18288" bIns="18288">
+          <a:bodyPr wrap="none" lIns="18288" tIns="18288" rIns="18288" bIns="18288">
             <a:spAutoFit/>
           </a:bodyPr>
           <a:lstStyle/>
@@ -21279,6 +21633,7 @@
           <a:lstStyle/>
           <a:p>
             <a:pPr algn="ctr"/>
+            <a:endParaRPr/>
           </a:p>
         </p:txBody>
       </p:sp>
@@ -21299,7 +21654,7 @@
           <a:noFill/>
         </p:spPr>
         <p:txBody>
-          <a:bodyPr wrap="none" lIns="18288" rIns="18288" tIns="18288" bIns="18288">
+          <a:bodyPr wrap="none" lIns="18288" tIns="18288" rIns="18288" bIns="18288">
             <a:spAutoFit/>
           </a:bodyPr>
           <a:lstStyle/>
@@ -21333,7 +21688,7 @@
           <a:noFill/>
         </p:spPr>
         <p:txBody>
-          <a:bodyPr wrap="none" lIns="18288" rIns="18288" tIns="18288" bIns="18288">
+          <a:bodyPr wrap="none" lIns="18288" tIns="18288" rIns="18288" bIns="18288">
             <a:spAutoFit/>
           </a:bodyPr>
           <a:lstStyle/>
@@ -21393,6 +21748,7 @@
           <a:lstStyle/>
           <a:p>
             <a:pPr algn="ctr"/>
+            <a:endParaRPr/>
           </a:p>
         </p:txBody>
       </p:sp>
@@ -21436,6 +21792,7 @@
           <a:lstStyle/>
           <a:p>
             <a:pPr algn="ctr"/>
+            <a:endParaRPr/>
           </a:p>
         </p:txBody>
       </p:sp>
@@ -21456,7 +21813,7 @@
           <a:noFill/>
         </p:spPr>
         <p:txBody>
-          <a:bodyPr wrap="none" lIns="18288" rIns="18288" tIns="18288" bIns="18288">
+          <a:bodyPr wrap="none" lIns="18288" tIns="18288" rIns="18288" bIns="18288">
             <a:spAutoFit/>
           </a:bodyPr>
           <a:lstStyle/>
@@ -21481,8 +21838,8 @@
         </p:nvSpPr>
         <p:spPr>
           <a:xfrm>
-            <a:off x="932688" y="1947672"/>
-            <a:ext cx="2788920" cy="685800"/>
+            <a:off x="914400" y="1735095"/>
+            <a:ext cx="2807208" cy="967957"/>
           </a:xfrm>
           <a:prstGeom prst="rect">
             <a:avLst/>
@@ -21490,34 +21847,78 @@
           <a:noFill/>
         </p:spPr>
         <p:txBody>
-          <a:bodyPr wrap="none" lIns="18288" rIns="18288" tIns="18288" bIns="18288">
+          <a:bodyPr wrap="square" lIns="18288" tIns="18288" rIns="18288" bIns="18288">
             <a:spAutoFit/>
           </a:bodyPr>
           <a:lstStyle/>
           <a:p>
             <a:r>
-              <a:rPr sz="1250" b="0">
-                <a:solidFill>
-                  <a:srgbClr val="94A3B8"/>
+              <a:rPr sz="1250" b="0" dirty="0">
+                <a:solidFill>
+                  <a:srgbClr val="34D399"/>
                 </a:solidFill>
                 <a:latin typeface="Aptos"/>
               </a:rPr>
               <a:t>Price</a:t>
             </a:r>
-            <a:br/>
-            <a:r>
+            <a:br>
+              <a:rPr dirty="0">
+                <a:solidFill>
+                  <a:srgbClr val="34D399"/>
+                </a:solidFill>
+              </a:rPr>
+            </a:br>
+            <a:r>
+              <a:rPr sz="1200" dirty="0">
+                <a:solidFill>
+                  <a:srgbClr val="34D399"/>
+                </a:solidFill>
+              </a:rPr>
               <a:t>Rating count</a:t>
             </a:r>
-            <a:br/>
-            <a:r>
+            <a:br>
+              <a:rPr sz="1200" dirty="0">
+                <a:solidFill>
+                  <a:srgbClr val="34D399"/>
+                </a:solidFill>
+              </a:rPr>
+            </a:br>
+            <a:r>
+              <a:rPr sz="1200" dirty="0">
+                <a:solidFill>
+                  <a:srgbClr val="34D399"/>
+                </a:solidFill>
+              </a:rPr>
               <a:t>Review length</a:t>
             </a:r>
-            <a:br/>
-            <a:r>
+            <a:br>
+              <a:rPr sz="1200" dirty="0">
+                <a:solidFill>
+                  <a:srgbClr val="34D399"/>
+                </a:solidFill>
+              </a:rPr>
+            </a:br>
+            <a:r>
+              <a:rPr sz="1200" dirty="0">
+                <a:solidFill>
+                  <a:srgbClr val="34D399"/>
+                </a:solidFill>
+              </a:rPr>
               <a:t>Image availability</a:t>
             </a:r>
-            <a:br/>
-            <a:r>
+            <a:br>
+              <a:rPr sz="1200" dirty="0">
+                <a:solidFill>
+                  <a:srgbClr val="34D399"/>
+                </a:solidFill>
+              </a:rPr>
+            </a:br>
+            <a:r>
+              <a:rPr sz="1200" dirty="0">
+                <a:solidFill>
+                  <a:srgbClr val="34D399"/>
+                </a:solidFill>
+              </a:rPr>
               <a:t>Helpful votes</a:t>
             </a:r>
           </a:p>
@@ -21565,6 +21966,7 @@
           <a:lstStyle/>
           <a:p>
             <a:pPr algn="ctr"/>
+            <a:endParaRPr/>
           </a:p>
         </p:txBody>
       </p:sp>
@@ -21608,6 +22010,7 @@
           <a:lstStyle/>
           <a:p>
             <a:pPr algn="ctr"/>
+            <a:endParaRPr/>
           </a:p>
         </p:txBody>
       </p:sp>
@@ -21628,7 +22031,7 @@
           <a:noFill/>
         </p:spPr>
         <p:txBody>
-          <a:bodyPr wrap="none" lIns="18288" rIns="18288" tIns="18288" bIns="18288">
+          <a:bodyPr wrap="none" lIns="18288" tIns="18288" rIns="18288" bIns="18288">
             <a:spAutoFit/>
           </a:bodyPr>
           <a:lstStyle/>
@@ -21654,7 +22057,7 @@
         <p:spPr>
           <a:xfrm>
             <a:off x="4361688" y="1947672"/>
-            <a:ext cx="2606040" cy="685800"/>
+            <a:ext cx="2101986" cy="783291"/>
           </a:xfrm>
           <a:prstGeom prst="rect">
             <a:avLst/>
@@ -21662,26 +22065,48 @@
           <a:noFill/>
         </p:spPr>
         <p:txBody>
-          <a:bodyPr wrap="none" lIns="18288" rIns="18288" tIns="18288" bIns="18288">
+          <a:bodyPr wrap="none" lIns="18288" tIns="18288" rIns="18288" bIns="18288">
             <a:spAutoFit/>
           </a:bodyPr>
           <a:lstStyle/>
           <a:p>
             <a:r>
-              <a:rPr sz="1250" b="0">
-                <a:solidFill>
-                  <a:srgbClr val="94A3B8"/>
+              <a:rPr sz="1250" b="0" dirty="0">
+                <a:solidFill>
+                  <a:srgbClr val="38BDF8"/>
                 </a:solidFill>
                 <a:latin typeface="Aptos"/>
               </a:rPr>
               <a:t>Logistic Regression</a:t>
             </a:r>
-            <a:br/>
-            <a:r>
+            <a:br>
+              <a:rPr dirty="0">
+                <a:solidFill>
+                  <a:srgbClr val="38BDF8"/>
+                </a:solidFill>
+              </a:rPr>
+            </a:br>
+            <a:r>
+              <a:rPr dirty="0">
+                <a:solidFill>
+                  <a:srgbClr val="38BDF8"/>
+                </a:solidFill>
+              </a:rPr>
               <a:t>Imputation + scaling</a:t>
             </a:r>
-            <a:br/>
-            <a:r>
+            <a:br>
+              <a:rPr dirty="0">
+                <a:solidFill>
+                  <a:srgbClr val="38BDF8"/>
+                </a:solidFill>
+              </a:rPr>
+            </a:br>
+            <a:r>
+              <a:rPr dirty="0">
+                <a:solidFill>
+                  <a:srgbClr val="38BDF8"/>
+                </a:solidFill>
+              </a:rPr>
               <a:t>Fast and interpretable</a:t>
             </a:r>
           </a:p>
@@ -21729,6 +22154,7 @@
           <a:lstStyle/>
           <a:p>
             <a:pPr algn="ctr"/>
+            <a:endParaRPr/>
           </a:p>
         </p:txBody>
       </p:sp>
@@ -21772,6 +22198,7 @@
           <a:lstStyle/>
           <a:p>
             <a:pPr algn="ctr"/>
+            <a:endParaRPr/>
           </a:p>
         </p:txBody>
       </p:sp>
@@ -21792,7 +22219,7 @@
           <a:noFill/>
         </p:spPr>
         <p:txBody>
-          <a:bodyPr wrap="none" lIns="18288" rIns="18288" tIns="18288" bIns="18288">
+          <a:bodyPr wrap="none" lIns="18288" tIns="18288" rIns="18288" bIns="18288">
             <a:spAutoFit/>
           </a:bodyPr>
           <a:lstStyle/>
@@ -21818,7 +22245,7 @@
         <p:spPr>
           <a:xfrm>
             <a:off x="7607808" y="1947672"/>
-            <a:ext cx="2606040" cy="685800"/>
+            <a:ext cx="1817036" cy="783291"/>
           </a:xfrm>
           <a:prstGeom prst="rect">
             <a:avLst/>
@@ -21826,28 +22253,89 @@
           <a:noFill/>
         </p:spPr>
         <p:txBody>
-          <a:bodyPr wrap="none" lIns="18288" rIns="18288" tIns="18288" bIns="18288">
+          <a:bodyPr wrap="none" lIns="18288" tIns="18288" rIns="18288" bIns="18288">
             <a:spAutoFit/>
           </a:bodyPr>
           <a:lstStyle/>
           <a:p>
             <a:r>
-              <a:rPr sz="1250" b="0">
-                <a:solidFill>
-                  <a:srgbClr val="94A3B8"/>
+              <a:rPr sz="1250" b="0" dirty="0">
+                <a:solidFill>
+                  <a:srgbClr val="A78BFA"/>
                 </a:solidFill>
                 <a:latin typeface="Aptos"/>
               </a:rPr>
-              <a:t>TensorFlow/Keras MLP</a:t>
-            </a:r>
-            <a:br/>
-            <a:r>
-              <a:t>ReLU hidden layers</a:t>
-            </a:r>
-            <a:br/>
-            <a:r>
-              <a:t>Dropout + softmax</a:t>
-            </a:r>
+              <a:t>TensorFlow/</a:t>
+            </a:r>
+            <a:r>
+              <a:rPr sz="1250" b="0" dirty="0" err="1">
+                <a:solidFill>
+                  <a:srgbClr val="A78BFA"/>
+                </a:solidFill>
+                <a:latin typeface="Aptos"/>
+              </a:rPr>
+              <a:t>Keras</a:t>
+            </a:r>
+            <a:r>
+              <a:rPr sz="1250" b="0" dirty="0">
+                <a:solidFill>
+                  <a:srgbClr val="A78BFA"/>
+                </a:solidFill>
+                <a:latin typeface="Aptos"/>
+              </a:rPr>
+              <a:t> MLP</a:t>
+            </a:r>
+            <a:br>
+              <a:rPr dirty="0">
+                <a:solidFill>
+                  <a:srgbClr val="A78BFA"/>
+                </a:solidFill>
+              </a:rPr>
+            </a:br>
+            <a:r>
+              <a:rPr dirty="0" err="1">
+                <a:solidFill>
+                  <a:srgbClr val="A78BFA"/>
+                </a:solidFill>
+              </a:rPr>
+              <a:t>ReLU</a:t>
+            </a:r>
+            <a:r>
+              <a:rPr dirty="0">
+                <a:solidFill>
+                  <a:srgbClr val="A78BFA"/>
+                </a:solidFill>
+              </a:rPr>
+              <a:t> hidden layers</a:t>
+            </a:r>
+            <a:br>
+              <a:rPr dirty="0">
+                <a:solidFill>
+                  <a:srgbClr val="A78BFA"/>
+                </a:solidFill>
+              </a:rPr>
+            </a:br>
+            <a:r>
+              <a:rPr dirty="0">
+                <a:solidFill>
+                  <a:srgbClr val="A78BFA"/>
+                </a:solidFill>
+              </a:rPr>
+              <a:t>Dropout + </a:t>
+            </a:r>
+            <a:r>
+              <a:rPr dirty="0" err="1">
+                <a:solidFill>
+                  <a:srgbClr val="A78BFA"/>
+                </a:solidFill>
+              </a:rPr>
+              <a:t>softmax</a:t>
+            </a:r>
+            <a:endParaRPr dirty="0">
+              <a:solidFill>
+                <a:srgbClr val="A78BFA"/>
+              </a:solidFill>
+            </a:endParaRPr>
           </a:p>
         </p:txBody>
       </p:sp>
@@ -21868,7 +22356,7 @@
           <a:noFill/>
         </p:spPr>
         <p:txBody>
-          <a:bodyPr wrap="none" lIns="18288" rIns="18288" tIns="18288" bIns="18288">
+          <a:bodyPr wrap="none" lIns="18288" tIns="18288" rIns="18288" bIns="18288">
             <a:spAutoFit/>
           </a:bodyPr>
           <a:lstStyle/>
@@ -21902,7 +22390,7 @@
           <a:noFill/>
         </p:spPr>
         <p:txBody>
-          <a:bodyPr wrap="none" lIns="18288" rIns="18288" tIns="18288" bIns="18288">
+          <a:bodyPr wrap="none" lIns="18288" tIns="18288" rIns="18288" bIns="18288">
             <a:spAutoFit/>
           </a:bodyPr>
           <a:lstStyle/>
@@ -21959,6 +22447,7 @@
           <a:lstStyle/>
           <a:p>
             <a:pPr algn="ctr"/>
+            <a:endParaRPr/>
           </a:p>
         </p:txBody>
       </p:sp>
@@ -22002,6 +22491,7 @@
           <a:lstStyle/>
           <a:p>
             <a:pPr algn="ctr"/>
+            <a:endParaRPr/>
           </a:p>
         </p:txBody>
       </p:sp>
@@ -22022,7 +22512,7 @@
           <a:noFill/>
         </p:spPr>
         <p:txBody>
-          <a:bodyPr wrap="none" lIns="18288" rIns="18288" tIns="18288" bIns="18288">
+          <a:bodyPr wrap="none" lIns="18288" tIns="18288" rIns="18288" bIns="18288">
             <a:spAutoFit/>
           </a:bodyPr>
           <a:lstStyle/>
@@ -22057,7 +22547,7 @@
           <a:noFill/>
         </p:spPr>
         <p:txBody>
-          <a:bodyPr wrap="none" lIns="18288" rIns="18288" tIns="18288" bIns="18288">
+          <a:bodyPr wrap="none" lIns="18288" tIns="18288" rIns="18288" bIns="18288">
             <a:spAutoFit/>
           </a:bodyPr>
           <a:lstStyle/>
@@ -22114,6 +22604,7 @@
           <a:lstStyle/>
           <a:p>
             <a:pPr algn="ctr"/>
+            <a:endParaRPr/>
           </a:p>
         </p:txBody>
       </p:sp>
@@ -22157,6 +22648,7 @@
           <a:lstStyle/>
           <a:p>
             <a:pPr algn="ctr"/>
+            <a:endParaRPr/>
           </a:p>
         </p:txBody>
       </p:sp>
@@ -22177,7 +22669,7 @@
           <a:noFill/>
         </p:spPr>
         <p:txBody>
-          <a:bodyPr wrap="none" lIns="18288" rIns="18288" tIns="18288" bIns="18288">
+          <a:bodyPr wrap="none" lIns="18288" tIns="18288" rIns="18288" bIns="18288">
             <a:spAutoFit/>
           </a:bodyPr>
           <a:lstStyle/>
@@ -22212,7 +22704,7 @@
           <a:noFill/>
         </p:spPr>
         <p:txBody>
-          <a:bodyPr wrap="none" lIns="18288" rIns="18288" tIns="18288" bIns="18288">
+          <a:bodyPr wrap="none" lIns="18288" tIns="18288" rIns="18288" bIns="18288">
             <a:spAutoFit/>
           </a:bodyPr>
           <a:lstStyle/>
@@ -22269,6 +22761,7 @@
           <a:lstStyle/>
           <a:p>
             <a:pPr algn="ctr"/>
+            <a:endParaRPr/>
           </a:p>
         </p:txBody>
       </p:sp>
@@ -22312,6 +22805,7 @@
           <a:lstStyle/>
           <a:p>
             <a:pPr algn="ctr"/>
+            <a:endParaRPr/>
           </a:p>
         </p:txBody>
       </p:sp>
@@ -22332,7 +22826,7 @@
           <a:noFill/>
         </p:spPr>
         <p:txBody>
-          <a:bodyPr wrap="none" lIns="18288" rIns="18288" tIns="18288" bIns="18288">
+          <a:bodyPr wrap="none" lIns="18288" tIns="18288" rIns="18288" bIns="18288">
             <a:spAutoFit/>
           </a:bodyPr>
           <a:lstStyle/>
@@ -22367,7 +22861,7 @@
           <a:noFill/>
         </p:spPr>
         <p:txBody>
-          <a:bodyPr wrap="none" lIns="18288" rIns="18288" tIns="18288" bIns="18288">
+          <a:bodyPr wrap="none" lIns="18288" tIns="18288" rIns="18288" bIns="18288">
             <a:spAutoFit/>
           </a:bodyPr>
           <a:lstStyle/>
@@ -22424,6 +22918,7 @@
           <a:lstStyle/>
           <a:p>
             <a:pPr algn="ctr"/>
+            <a:endParaRPr/>
           </a:p>
         </p:txBody>
       </p:sp>
@@ -22467,6 +22962,7 @@
           <a:lstStyle/>
           <a:p>
             <a:pPr algn="ctr"/>
+            <a:endParaRPr/>
           </a:p>
         </p:txBody>
       </p:sp>
@@ -22487,7 +22983,7 @@
           <a:noFill/>
         </p:spPr>
         <p:txBody>
-          <a:bodyPr wrap="none" lIns="18288" rIns="18288" tIns="18288" bIns="18288">
+          <a:bodyPr wrap="none" lIns="18288" tIns="18288" rIns="18288" bIns="18288">
             <a:spAutoFit/>
           </a:bodyPr>
           <a:lstStyle/>
@@ -22514,7 +23010,7 @@
         <p:spPr>
           <a:xfrm>
             <a:off x="6035040" y="3977639"/>
-            <a:ext cx="4434840" cy="685800"/>
+            <a:ext cx="4434840" cy="960263"/>
           </a:xfrm>
           <a:prstGeom prst="rect">
             <a:avLst/>
@@ -22522,13 +23018,13 @@
           <a:noFill/>
         </p:spPr>
         <p:txBody>
-          <a:bodyPr wrap="none" lIns="18288" rIns="18288" tIns="18288" bIns="18288">
+          <a:bodyPr wrap="square" lIns="18288" tIns="18288" rIns="18288" bIns="18288">
             <a:spAutoFit/>
           </a:bodyPr>
           <a:lstStyle/>
           <a:p>
             <a:r>
-              <a:rPr sz="2000" b="1">
+              <a:rPr sz="2000" b="1" dirty="0">
                 <a:solidFill>
                   <a:srgbClr val="FFFFFF"/>
                 </a:solidFill>
@@ -22548,7 +23044,7 @@
 </file>
 
 <file path=ppt/slides/slide7.xml><?xml version="1.0" encoding="utf-8"?>
-<p:sld xmlns:a="http://schemas.openxmlformats.org/drawingml/2006/main" xmlns:p="http://schemas.openxmlformats.org/presentationml/2006/main" xmlns:r="http://schemas.openxmlformats.org/officeDocument/2006/relationships">
+<p:sld xmlns:a="http://schemas.openxmlformats.org/drawingml/2006/main" xmlns:r="http://schemas.openxmlformats.org/officeDocument/2006/relationships" xmlns:p="http://schemas.openxmlformats.org/presentationml/2006/main">
   <p:cSld>
     <p:bg>
       <p:bgPr>
@@ -22564,7 +23060,14 @@
         <p:cNvGrpSpPr/>
         <p:nvPr/>
       </p:nvGrpSpPr>
-      <p:grpSpPr/>
+      <p:grpSpPr>
+        <a:xfrm>
+          <a:off x="0" y="0"/>
+          <a:ext cx="0" cy="0"/>
+          <a:chOff x="0" y="0"/>
+          <a:chExt cx="0" cy="0"/>
+        </a:xfrm>
+      </p:grpSpPr>
       <p:sp>
         <p:nvSpPr>
           <p:cNvPr id="2" name="Rectangle 1"/>
@@ -22605,6 +23108,7 @@
           <a:lstStyle/>
           <a:p>
             <a:pPr algn="ctr"/>
+            <a:endParaRPr/>
           </a:p>
         </p:txBody>
       </p:sp>
@@ -22648,6 +23152,7 @@
           <a:lstStyle/>
           <a:p>
             <a:pPr algn="ctr"/>
+            <a:endParaRPr/>
           </a:p>
         </p:txBody>
       </p:sp>
@@ -22691,6 +23196,7 @@
           <a:lstStyle/>
           <a:p>
             <a:pPr algn="ctr"/>
+            <a:endParaRPr/>
           </a:p>
         </p:txBody>
       </p:sp>
@@ -22711,7 +23217,7 @@
           <a:noFill/>
         </p:spPr>
         <p:txBody>
-          <a:bodyPr wrap="none" lIns="18288" rIns="18288" tIns="18288" bIns="18288">
+          <a:bodyPr wrap="none" lIns="18288" tIns="18288" rIns="18288" bIns="18288">
             <a:spAutoFit/>
           </a:bodyPr>
           <a:lstStyle/>
@@ -22745,7 +23251,7 @@
           <a:noFill/>
         </p:spPr>
         <p:txBody>
-          <a:bodyPr wrap="none" lIns="18288" rIns="18288" tIns="18288" bIns="18288">
+          <a:bodyPr wrap="none" lIns="18288" tIns="18288" rIns="18288" bIns="18288">
             <a:spAutoFit/>
           </a:bodyPr>
           <a:lstStyle/>
@@ -22802,6 +23308,7 @@
           <a:lstStyle/>
           <a:p>
             <a:pPr algn="ctr"/>
+            <a:endParaRPr/>
           </a:p>
         </p:txBody>
       </p:sp>
@@ -22822,7 +23329,7 @@
           <a:noFill/>
         </p:spPr>
         <p:txBody>
-          <a:bodyPr wrap="none" lIns="18288" rIns="18288" tIns="18288" bIns="18288">
+          <a:bodyPr wrap="none" lIns="18288" tIns="18288" rIns="18288" bIns="18288">
             <a:spAutoFit/>
           </a:bodyPr>
           <a:lstStyle/>
@@ -22856,7 +23363,7 @@
           <a:noFill/>
         </p:spPr>
         <p:txBody>
-          <a:bodyPr wrap="none" lIns="18288" rIns="18288" tIns="18288" bIns="18288">
+          <a:bodyPr wrap="none" lIns="18288" tIns="18288" rIns="18288" bIns="18288">
             <a:spAutoFit/>
           </a:bodyPr>
           <a:lstStyle/>
@@ -22916,6 +23423,7 @@
           <a:lstStyle/>
           <a:p>
             <a:pPr algn="ctr"/>
+            <a:endParaRPr/>
           </a:p>
         </p:txBody>
       </p:sp>
@@ -22936,7 +23444,7 @@
           <a:noFill/>
         </p:spPr>
         <p:txBody>
-          <a:bodyPr wrap="none" lIns="18288" rIns="18288" tIns="18288" bIns="18288">
+          <a:bodyPr wrap="none" lIns="18288" tIns="18288" rIns="18288" bIns="18288">
             <a:spAutoFit/>
           </a:bodyPr>
           <a:lstStyle/>
@@ -22971,7 +23479,7 @@
           <a:noFill/>
         </p:spPr>
         <p:txBody>
-          <a:bodyPr wrap="none" lIns="18288" rIns="18288" tIns="18288" bIns="18288">
+          <a:bodyPr wrap="none" lIns="18288" tIns="18288" rIns="18288" bIns="18288">
             <a:spAutoFit/>
           </a:bodyPr>
           <a:lstStyle/>
@@ -23031,6 +23539,7 @@
           <a:lstStyle/>
           <a:p>
             <a:pPr algn="ctr"/>
+            <a:endParaRPr/>
           </a:p>
         </p:txBody>
       </p:sp>
@@ -23051,7 +23560,7 @@
           <a:noFill/>
         </p:spPr>
         <p:txBody>
-          <a:bodyPr wrap="none" lIns="18288" rIns="18288" tIns="18288" bIns="18288">
+          <a:bodyPr wrap="none" lIns="18288" tIns="18288" rIns="18288" bIns="18288">
             <a:spAutoFit/>
           </a:bodyPr>
           <a:lstStyle/>
@@ -23086,7 +23595,7 @@
           <a:noFill/>
         </p:spPr>
         <p:txBody>
-          <a:bodyPr wrap="none" lIns="18288" rIns="18288" tIns="18288" bIns="18288">
+          <a:bodyPr wrap="none" lIns="18288" tIns="18288" rIns="18288" bIns="18288">
             <a:spAutoFit/>
           </a:bodyPr>
           <a:lstStyle/>
@@ -23146,6 +23655,7 @@
           <a:lstStyle/>
           <a:p>
             <a:pPr algn="ctr"/>
+            <a:endParaRPr/>
           </a:p>
         </p:txBody>
       </p:sp>
@@ -23166,7 +23676,7 @@
           <a:noFill/>
         </p:spPr>
         <p:txBody>
-          <a:bodyPr wrap="none" lIns="18288" rIns="18288" tIns="18288" bIns="18288">
+          <a:bodyPr wrap="none" lIns="18288" tIns="18288" rIns="18288" bIns="18288">
             <a:spAutoFit/>
           </a:bodyPr>
           <a:lstStyle/>
@@ -23201,7 +23711,7 @@
           <a:noFill/>
         </p:spPr>
         <p:txBody>
-          <a:bodyPr wrap="none" lIns="18288" rIns="18288" tIns="18288" bIns="18288">
+          <a:bodyPr wrap="none" lIns="18288" tIns="18288" rIns="18288" bIns="18288">
             <a:spAutoFit/>
           </a:bodyPr>
           <a:lstStyle/>
@@ -23261,6 +23771,7 @@
           <a:lstStyle/>
           <a:p>
             <a:pPr algn="ctr"/>
+            <a:endParaRPr/>
           </a:p>
         </p:txBody>
       </p:sp>
@@ -23281,7 +23792,7 @@
           <a:noFill/>
         </p:spPr>
         <p:txBody>
-          <a:bodyPr wrap="none" lIns="18288" rIns="18288" tIns="18288" bIns="18288">
+          <a:bodyPr wrap="none" lIns="18288" tIns="18288" rIns="18288" bIns="18288">
             <a:spAutoFit/>
           </a:bodyPr>
           <a:lstStyle/>
@@ -23316,7 +23827,7 @@
           <a:noFill/>
         </p:spPr>
         <p:txBody>
-          <a:bodyPr wrap="none" lIns="18288" rIns="18288" tIns="18288" bIns="18288">
+          <a:bodyPr wrap="none" lIns="18288" tIns="18288" rIns="18288" bIns="18288">
             <a:spAutoFit/>
           </a:bodyPr>
           <a:lstStyle/>
@@ -23376,6 +23887,7 @@
           <a:lstStyle/>
           <a:p>
             <a:pPr algn="ctr"/>
+            <a:endParaRPr/>
           </a:p>
         </p:txBody>
       </p:sp>
@@ -23396,7 +23908,7 @@
           <a:noFill/>
         </p:spPr>
         <p:txBody>
-          <a:bodyPr wrap="none" lIns="18288" rIns="18288" tIns="18288" bIns="18288">
+          <a:bodyPr wrap="none" lIns="18288" tIns="18288" rIns="18288" bIns="18288">
             <a:spAutoFit/>
           </a:bodyPr>
           <a:lstStyle/>
@@ -23431,7 +23943,7 @@
           <a:noFill/>
         </p:spPr>
         <p:txBody>
-          <a:bodyPr wrap="none" lIns="18288" rIns="18288" tIns="18288" bIns="18288">
+          <a:bodyPr wrap="none" lIns="18288" tIns="18288" rIns="18288" bIns="18288">
             <a:spAutoFit/>
           </a:bodyPr>
           <a:lstStyle/>
@@ -23666,6 +24178,7 @@
           <a:lstStyle/>
           <a:p>
             <a:pPr algn="ctr"/>
+            <a:endParaRPr/>
           </a:p>
         </p:txBody>
       </p:sp>
@@ -23709,6 +24222,7 @@
           <a:lstStyle/>
           <a:p>
             <a:pPr algn="ctr"/>
+            <a:endParaRPr/>
           </a:p>
         </p:txBody>
       </p:sp>
@@ -23729,7 +24243,7 @@
           <a:noFill/>
         </p:spPr>
         <p:txBody>
-          <a:bodyPr wrap="none" lIns="18288" rIns="18288" tIns="18288" bIns="18288">
+          <a:bodyPr wrap="none" lIns="18288" tIns="18288" rIns="18288" bIns="18288">
             <a:spAutoFit/>
           </a:bodyPr>
           <a:lstStyle/>
@@ -23786,6 +24300,7 @@
           <a:lstStyle/>
           <a:p>
             <a:pPr algn="ctr"/>
+            <a:endParaRPr/>
           </a:p>
         </p:txBody>
       </p:sp>
@@ -23829,6 +24344,7 @@
           <a:lstStyle/>
           <a:p>
             <a:pPr algn="ctr"/>
+            <a:endParaRPr/>
           </a:p>
         </p:txBody>
       </p:sp>
@@ -23872,6 +24388,7 @@
           <a:lstStyle/>
           <a:p>
             <a:pPr algn="ctr"/>
+            <a:endParaRPr/>
           </a:p>
         </p:txBody>
       </p:sp>
@@ -23915,6 +24432,7 @@
           <a:lstStyle/>
           <a:p>
             <a:pPr algn="ctr"/>
+            <a:endParaRPr/>
           </a:p>
         </p:txBody>
       </p:sp>
@@ -23935,7 +24453,7 @@
           <a:noFill/>
         </p:spPr>
         <p:txBody>
-          <a:bodyPr wrap="none" lIns="18288" rIns="18288" tIns="18288" bIns="18288">
+          <a:bodyPr wrap="none" lIns="18288" tIns="18288" rIns="18288" bIns="18288">
             <a:spAutoFit/>
           </a:bodyPr>
           <a:lstStyle/>
@@ -23970,7 +24488,7 @@
           <a:noFill/>
         </p:spPr>
         <p:txBody>
-          <a:bodyPr wrap="none" lIns="73152" rIns="54864" tIns="36576" bIns="36576">
+          <a:bodyPr wrap="none" lIns="73152" tIns="36576" rIns="54864" bIns="36576">
             <a:spAutoFit/>
           </a:bodyPr>
           <a:lstStyle/>
@@ -24033,7 +24551,7 @@
 </file>
 
 <file path=ppt/slides/slide8.xml><?xml version="1.0" encoding="utf-8"?>
-<p:sld xmlns:a="http://schemas.openxmlformats.org/drawingml/2006/main" xmlns:p="http://schemas.openxmlformats.org/presentationml/2006/main" xmlns:r="http://schemas.openxmlformats.org/officeDocument/2006/relationships">
+<p:sld xmlns:a="http://schemas.openxmlformats.org/drawingml/2006/main" xmlns:r="http://schemas.openxmlformats.org/officeDocument/2006/relationships" xmlns:p="http://schemas.openxmlformats.org/presentationml/2006/main">
   <p:cSld>
     <p:bg>
       <p:bgPr>
@@ -24049,7 +24567,14 @@
         <p:cNvGrpSpPr/>
         <p:nvPr/>
       </p:nvGrpSpPr>
-      <p:grpSpPr/>
+      <p:grpSpPr>
+        <a:xfrm>
+          <a:off x="0" y="0"/>
+          <a:ext cx="0" cy="0"/>
+          <a:chOff x="0" y="0"/>
+          <a:chExt cx="0" cy="0"/>
+        </a:xfrm>
+      </p:grpSpPr>
       <p:sp>
         <p:nvSpPr>
           <p:cNvPr id="2" name="Rectangle 1"/>
@@ -24090,6 +24615,7 @@
           <a:lstStyle/>
           <a:p>
             <a:pPr algn="ctr"/>
+            <a:endParaRPr/>
           </a:p>
         </p:txBody>
       </p:sp>
@@ -24133,6 +24659,7 @@
           <a:lstStyle/>
           <a:p>
             <a:pPr algn="ctr"/>
+            <a:endParaRPr/>
           </a:p>
         </p:txBody>
       </p:sp>
@@ -24176,6 +24703,7 @@
           <a:lstStyle/>
           <a:p>
             <a:pPr algn="ctr"/>
+            <a:endParaRPr/>
           </a:p>
         </p:txBody>
       </p:sp>
@@ -24196,7 +24724,7 @@
           <a:noFill/>
         </p:spPr>
         <p:txBody>
-          <a:bodyPr wrap="none" lIns="18288" rIns="18288" tIns="18288" bIns="18288">
+          <a:bodyPr wrap="none" lIns="18288" tIns="18288" rIns="18288" bIns="18288">
             <a:spAutoFit/>
           </a:bodyPr>
           <a:lstStyle/>
@@ -24230,7 +24758,7 @@
           <a:noFill/>
         </p:spPr>
         <p:txBody>
-          <a:bodyPr wrap="none" lIns="18288" rIns="18288" tIns="18288" bIns="18288">
+          <a:bodyPr wrap="none" lIns="18288" tIns="18288" rIns="18288" bIns="18288">
             <a:spAutoFit/>
           </a:bodyPr>
           <a:lstStyle/>
@@ -24287,6 +24815,7 @@
           <a:lstStyle/>
           <a:p>
             <a:pPr algn="ctr"/>
+            <a:endParaRPr/>
           </a:p>
         </p:txBody>
       </p:sp>
@@ -24307,7 +24836,7 @@
           <a:noFill/>
         </p:spPr>
         <p:txBody>
-          <a:bodyPr wrap="none" lIns="18288" rIns="18288" tIns="18288" bIns="18288">
+          <a:bodyPr wrap="none" lIns="18288" tIns="18288" rIns="18288" bIns="18288">
             <a:spAutoFit/>
           </a:bodyPr>
           <a:lstStyle/>
@@ -24341,7 +24870,7 @@
           <a:noFill/>
         </p:spPr>
         <p:txBody>
-          <a:bodyPr wrap="none" lIns="18288" rIns="18288" tIns="18288" bIns="18288">
+          <a:bodyPr wrap="none" lIns="18288" tIns="18288" rIns="18288" bIns="18288">
             <a:spAutoFit/>
           </a:bodyPr>
           <a:lstStyle/>
@@ -24401,6 +24930,7 @@
           <a:lstStyle/>
           <a:p>
             <a:pPr algn="ctr"/>
+            <a:endParaRPr/>
           </a:p>
         </p:txBody>
       </p:sp>
@@ -24444,6 +24974,7 @@
           <a:lstStyle/>
           <a:p>
             <a:pPr algn="ctr"/>
+            <a:endParaRPr/>
           </a:p>
         </p:txBody>
       </p:sp>
@@ -24464,7 +24995,7 @@
           <a:noFill/>
         </p:spPr>
         <p:txBody>
-          <a:bodyPr wrap="none" lIns="18288" rIns="18288" tIns="18288" bIns="18288">
+          <a:bodyPr wrap="none" lIns="18288" tIns="18288" rIns="18288" bIns="18288">
             <a:spAutoFit/>
           </a:bodyPr>
           <a:lstStyle/>
@@ -24490,7 +25021,7 @@
         <p:spPr>
           <a:xfrm>
             <a:off x="978408" y="1947672"/>
-            <a:ext cx="3977640" cy="868680"/>
+            <a:ext cx="4240328" cy="783291"/>
           </a:xfrm>
           <a:prstGeom prst="rect">
             <a:avLst/>
@@ -24498,26 +25029,72 @@
           <a:noFill/>
         </p:spPr>
         <p:txBody>
-          <a:bodyPr wrap="none" lIns="18288" rIns="18288" tIns="18288" bIns="18288">
+          <a:bodyPr wrap="none" lIns="18288" tIns="18288" rIns="18288" bIns="18288">
             <a:spAutoFit/>
           </a:bodyPr>
           <a:lstStyle/>
           <a:p>
             <a:r>
-              <a:rPr sz="1250" b="0">
-                <a:solidFill>
-                  <a:srgbClr val="94A3B8"/>
+              <a:rPr sz="1250" b="0" dirty="0">
+                <a:solidFill>
+                  <a:srgbClr val="A78BFA"/>
                 </a:solidFill>
                 <a:latin typeface="Aptos"/>
               </a:rPr>
               <a:t>TF-IDF + Logistic Regression baseline</a:t>
             </a:r>
-            <a:br/>
-            <a:r>
-              <a:t>Keras TextVectorization + Embedding model</a:t>
-            </a:r>
-            <a:br/>
-            <a:r>
+            <a:br>
+              <a:rPr dirty="0">
+                <a:solidFill>
+                  <a:srgbClr val="A78BFA"/>
+                </a:solidFill>
+              </a:rPr>
+            </a:br>
+            <a:r>
+              <a:rPr dirty="0" err="1">
+                <a:solidFill>
+                  <a:srgbClr val="A78BFA"/>
+                </a:solidFill>
+              </a:rPr>
+              <a:t>Keras</a:t>
+            </a:r>
+            <a:r>
+              <a:rPr dirty="0">
+                <a:solidFill>
+                  <a:srgbClr val="A78BFA"/>
+                </a:solidFill>
+              </a:rPr>
+              <a:t> </a:t>
+            </a:r>
+            <a:r>
+              <a:rPr dirty="0" err="1">
+                <a:solidFill>
+                  <a:srgbClr val="A78BFA"/>
+                </a:solidFill>
+              </a:rPr>
+              <a:t>TextVectorization</a:t>
+            </a:r>
+            <a:r>
+              <a:rPr dirty="0">
+                <a:solidFill>
+                  <a:srgbClr val="A78BFA"/>
+                </a:solidFill>
+              </a:rPr>
+              <a:t> + Embedding model</a:t>
+            </a:r>
+            <a:br>
+              <a:rPr dirty="0">
+                <a:solidFill>
+                  <a:srgbClr val="A78BFA"/>
+                </a:solidFill>
+              </a:rPr>
+            </a:br>
+            <a:r>
+              <a:rPr dirty="0">
+                <a:solidFill>
+                  <a:srgbClr val="A78BFA"/>
+                </a:solidFill>
+              </a:rPr>
               <a:t>Accuracy, macro-F1, report, confusion matrix</a:t>
             </a:r>
           </a:p>
@@ -24565,6 +25142,7 @@
           <a:lstStyle/>
           <a:p>
             <a:pPr algn="ctr"/>
+            <a:endParaRPr/>
           </a:p>
         </p:txBody>
       </p:sp>
@@ -24608,6 +25186,7 @@
           <a:lstStyle/>
           <a:p>
             <a:pPr algn="ctr"/>
+            <a:endParaRPr/>
           </a:p>
         </p:txBody>
       </p:sp>
@@ -24628,7 +25207,7 @@
           <a:noFill/>
         </p:spPr>
         <p:txBody>
-          <a:bodyPr wrap="none" lIns="18288" rIns="18288" tIns="18288" bIns="18288">
+          <a:bodyPr wrap="none" lIns="18288" tIns="18288" rIns="18288" bIns="18288">
             <a:spAutoFit/>
           </a:bodyPr>
           <a:lstStyle/>
@@ -24654,7 +25233,7 @@
         <p:spPr>
           <a:xfrm>
             <a:off x="5733288" y="1947672"/>
-            <a:ext cx="3977640" cy="868680"/>
+            <a:ext cx="2951385" cy="783291"/>
           </a:xfrm>
           <a:prstGeom prst="rect">
             <a:avLst/>
@@ -24662,26 +25241,48 @@
           <a:noFill/>
         </p:spPr>
         <p:txBody>
-          <a:bodyPr wrap="none" lIns="18288" rIns="18288" tIns="18288" bIns="18288">
+          <a:bodyPr wrap="none" lIns="18288" tIns="18288" rIns="18288" bIns="18288">
             <a:spAutoFit/>
           </a:bodyPr>
           <a:lstStyle/>
           <a:p>
             <a:r>
-              <a:rPr sz="1250" b="0">
-                <a:solidFill>
-                  <a:srgbClr val="94A3B8"/>
+              <a:rPr sz="1250" b="0" dirty="0">
+                <a:solidFill>
+                  <a:srgbClr val="38BDF8"/>
                 </a:solidFill>
                 <a:latin typeface="Aptos"/>
               </a:rPr>
               <a:t>Product-level search text</a:t>
             </a:r>
-            <a:br/>
-            <a:r>
+            <a:br>
+              <a:rPr dirty="0">
+                <a:solidFill>
+                  <a:srgbClr val="38BDF8"/>
+                </a:solidFill>
+              </a:rPr>
+            </a:br>
+            <a:r>
+              <a:rPr dirty="0">
+                <a:solidFill>
+                  <a:srgbClr val="38BDF8"/>
+                </a:solidFill>
+              </a:rPr>
               <a:t>TF-IDF vectors</a:t>
             </a:r>
-            <a:br/>
-            <a:r>
+            <a:br>
+              <a:rPr dirty="0">
+                <a:solidFill>
+                  <a:srgbClr val="38BDF8"/>
+                </a:solidFill>
+              </a:rPr>
+            </a:br>
+            <a:r>
+              <a:rPr dirty="0">
+                <a:solidFill>
+                  <a:srgbClr val="38BDF8"/>
+                </a:solidFill>
+              </a:rPr>
               <a:t>Cosine similarity top-k retrieval</a:t>
             </a:r>
           </a:p>
@@ -24704,7 +25305,7 @@
           <a:noFill/>
         </p:spPr>
         <p:txBody>
-          <a:bodyPr wrap="none" lIns="18288" rIns="18288" tIns="18288" bIns="18288">
+          <a:bodyPr wrap="none" lIns="18288" tIns="18288" rIns="18288" bIns="18288">
             <a:spAutoFit/>
           </a:bodyPr>
           <a:lstStyle/>
@@ -24763,6 +25364,7 @@
           <a:lstStyle/>
           <a:p>
             <a:pPr algn="ctr"/>
+            <a:endParaRPr/>
           </a:p>
         </p:txBody>
       </p:sp>
@@ -24783,7 +25385,7 @@
           <a:noFill/>
         </p:spPr>
         <p:txBody>
-          <a:bodyPr wrap="none" lIns="18288" rIns="18288" tIns="18288" bIns="18288">
+          <a:bodyPr wrap="none" lIns="18288" tIns="18288" rIns="18288" bIns="18288">
             <a:spAutoFit/>
           </a:bodyPr>
           <a:lstStyle/>
@@ -24842,6 +25444,7 @@
           <a:lstStyle/>
           <a:p>
             <a:pPr algn="ctr"/>
+            <a:endParaRPr/>
           </a:p>
         </p:txBody>
       </p:sp>
@@ -24862,7 +25465,7 @@
           <a:noFill/>
         </p:spPr>
         <p:txBody>
-          <a:bodyPr wrap="none" lIns="18288" rIns="18288" tIns="18288" bIns="18288">
+          <a:bodyPr wrap="none" lIns="18288" tIns="18288" rIns="18288" bIns="18288">
             <a:spAutoFit/>
           </a:bodyPr>
           <a:lstStyle/>
@@ -24922,6 +25525,7 @@
           <a:lstStyle/>
           <a:p>
             <a:pPr algn="ctr"/>
+            <a:endParaRPr/>
           </a:p>
         </p:txBody>
       </p:sp>
@@ -24942,7 +25546,7 @@
           <a:noFill/>
         </p:spPr>
         <p:txBody>
-          <a:bodyPr wrap="none" lIns="18288" rIns="18288" tIns="18288" bIns="18288">
+          <a:bodyPr wrap="none" lIns="18288" tIns="18288" rIns="18288" bIns="18288">
             <a:spAutoFit/>
           </a:bodyPr>
           <a:lstStyle/>
@@ -25002,6 +25606,7 @@
           <a:lstStyle/>
           <a:p>
             <a:pPr algn="ctr"/>
+            <a:endParaRPr/>
           </a:p>
         </p:txBody>
       </p:sp>
@@ -25022,7 +25627,7 @@
           <a:noFill/>
         </p:spPr>
         <p:txBody>
-          <a:bodyPr wrap="none" lIns="18288" rIns="18288" tIns="18288" bIns="18288">
+          <a:bodyPr wrap="none" lIns="18288" tIns="18288" rIns="18288" bIns="18288">
             <a:spAutoFit/>
           </a:bodyPr>
           <a:lstStyle/>
@@ -25119,7 +25724,7 @@
 </file>
 
 <file path=ppt/slides/slide9.xml><?xml version="1.0" encoding="utf-8"?>
-<p:sld xmlns:a="http://schemas.openxmlformats.org/drawingml/2006/main" xmlns:p="http://schemas.openxmlformats.org/presentationml/2006/main" xmlns:r="http://schemas.openxmlformats.org/officeDocument/2006/relationships">
+<p:sld xmlns:a="http://schemas.openxmlformats.org/drawingml/2006/main" xmlns:r="http://schemas.openxmlformats.org/officeDocument/2006/relationships" xmlns:p="http://schemas.openxmlformats.org/presentationml/2006/main">
   <p:cSld>
     <p:bg>
       <p:bgPr>
@@ -25135,7 +25740,14 @@
         <p:cNvGrpSpPr/>
         <p:nvPr/>
       </p:nvGrpSpPr>
-      <p:grpSpPr/>
+      <p:grpSpPr>
+        <a:xfrm>
+          <a:off x="0" y="0"/>
+          <a:ext cx="0" cy="0"/>
+          <a:chOff x="0" y="0"/>
+          <a:chExt cx="0" cy="0"/>
+        </a:xfrm>
+      </p:grpSpPr>
       <p:sp>
         <p:nvSpPr>
           <p:cNvPr id="2" name="Rectangle 1"/>
@@ -25176,6 +25788,7 @@
           <a:lstStyle/>
           <a:p>
             <a:pPr algn="ctr"/>
+            <a:endParaRPr/>
           </a:p>
         </p:txBody>
       </p:sp>
@@ -25219,6 +25832,7 @@
           <a:lstStyle/>
           <a:p>
             <a:pPr algn="ctr"/>
+            <a:endParaRPr/>
           </a:p>
         </p:txBody>
       </p:sp>
@@ -25262,6 +25876,7 @@
           <a:lstStyle/>
           <a:p>
             <a:pPr algn="ctr"/>
+            <a:endParaRPr/>
           </a:p>
         </p:txBody>
       </p:sp>
@@ -25282,7 +25897,7 @@
           <a:noFill/>
         </p:spPr>
         <p:txBody>
-          <a:bodyPr wrap="none" lIns="18288" rIns="18288" tIns="18288" bIns="18288">
+          <a:bodyPr wrap="none" lIns="18288" tIns="18288" rIns="18288" bIns="18288">
             <a:spAutoFit/>
           </a:bodyPr>
           <a:lstStyle/>
@@ -25316,7 +25931,7 @@
           <a:noFill/>
         </p:spPr>
         <p:txBody>
-          <a:bodyPr wrap="none" lIns="18288" rIns="18288" tIns="18288" bIns="18288">
+          <a:bodyPr wrap="none" lIns="18288" tIns="18288" rIns="18288" bIns="18288">
             <a:spAutoFit/>
           </a:bodyPr>
           <a:lstStyle/>
@@ -25373,6 +25988,7 @@
           <a:lstStyle/>
           <a:p>
             <a:pPr algn="ctr"/>
+            <a:endParaRPr/>
           </a:p>
         </p:txBody>
       </p:sp>
@@ -25393,7 +26009,7 @@
           <a:noFill/>
         </p:spPr>
         <p:txBody>
-          <a:bodyPr wrap="none" lIns="18288" rIns="18288" tIns="18288" bIns="18288">
+          <a:bodyPr wrap="none" lIns="18288" tIns="18288" rIns="18288" bIns="18288">
             <a:spAutoFit/>
           </a:bodyPr>
           <a:lstStyle/>
@@ -25427,7 +26043,7 @@
           <a:noFill/>
         </p:spPr>
         <p:txBody>
-          <a:bodyPr wrap="none" lIns="18288" rIns="18288" tIns="18288" bIns="18288">
+          <a:bodyPr wrap="none" lIns="18288" tIns="18288" rIns="18288" bIns="18288">
             <a:spAutoFit/>
           </a:bodyPr>
           <a:lstStyle/>
@@ -25487,6 +26103,7 @@
           <a:lstStyle/>
           <a:p>
             <a:pPr algn="ctr"/>
+            <a:endParaRPr/>
           </a:p>
         </p:txBody>
       </p:sp>
@@ -25530,6 +26147,7 @@
           <a:lstStyle/>
           <a:p>
             <a:pPr algn="ctr"/>
+            <a:endParaRPr/>
           </a:p>
         </p:txBody>
       </p:sp>
@@ -25550,7 +26168,7 @@
           <a:noFill/>
         </p:spPr>
         <p:txBody>
-          <a:bodyPr wrap="none" lIns="18288" rIns="18288" tIns="18288" bIns="18288">
+          <a:bodyPr wrap="none" lIns="18288" tIns="18288" rIns="18288" bIns="18288">
             <a:spAutoFit/>
           </a:bodyPr>
           <a:lstStyle/>
@@ -25575,8 +26193,8 @@
         </p:nvSpPr>
         <p:spPr>
           <a:xfrm>
-            <a:off x="932688" y="2011680"/>
-            <a:ext cx="2423160" cy="548640"/>
+            <a:off x="914400" y="1883732"/>
+            <a:ext cx="2468880" cy="783291"/>
           </a:xfrm>
           <a:prstGeom prst="rect">
             <a:avLst/>
@@ -25584,22 +26202,33 @@
           <a:noFill/>
         </p:spPr>
         <p:txBody>
-          <a:bodyPr wrap="none" lIns="18288" rIns="18288" tIns="18288" bIns="18288">
+          <a:bodyPr wrap="square" lIns="18288" tIns="18288" rIns="18288" bIns="18288">
             <a:spAutoFit/>
           </a:bodyPr>
           <a:lstStyle/>
           <a:p>
             <a:r>
-              <a:rPr sz="1250" b="0">
-                <a:solidFill>
-                  <a:srgbClr val="94A3B8"/>
+              <a:rPr sz="1250" b="0" dirty="0">
+                <a:solidFill>
+                  <a:srgbClr val="38BDF8"/>
                 </a:solidFill>
                 <a:latin typeface="Aptos"/>
               </a:rPr>
               <a:t>TF-IDF + Logistic Regression</a:t>
             </a:r>
-            <a:br/>
-            <a:r>
+            <a:br>
+              <a:rPr dirty="0">
+                <a:solidFill>
+                  <a:srgbClr val="38BDF8"/>
+                </a:solidFill>
+              </a:rPr>
+            </a:br>
+            <a:r>
+              <a:rPr dirty="0">
+                <a:solidFill>
+                  <a:srgbClr val="38BDF8"/>
+                </a:solidFill>
+              </a:rPr>
               <a:t>Fast, interpretable comparison point</a:t>
             </a:r>
           </a:p>
@@ -25647,6 +26276,7 @@
           <a:lstStyle/>
           <a:p>
             <a:pPr algn="ctr"/>
+            <a:endParaRPr/>
           </a:p>
         </p:txBody>
       </p:sp>
@@ -25690,6 +26320,7 @@
           <a:lstStyle/>
           <a:p>
             <a:pPr algn="ctr"/>
+            <a:endParaRPr/>
           </a:p>
         </p:txBody>
       </p:sp>
@@ -25710,7 +26341,7 @@
           <a:noFill/>
         </p:spPr>
         <p:txBody>
-          <a:bodyPr wrap="none" lIns="18288" rIns="18288" tIns="18288" bIns="18288">
+          <a:bodyPr wrap="none" lIns="18288" tIns="18288" rIns="18288" bIns="18288">
             <a:spAutoFit/>
           </a:bodyPr>
           <a:lstStyle/>
@@ -25735,8 +26366,8 @@
         </p:nvSpPr>
         <p:spPr>
           <a:xfrm>
-            <a:off x="3950207" y="2011680"/>
-            <a:ext cx="2423160" cy="548640"/>
+            <a:off x="3938559" y="1856232"/>
+            <a:ext cx="2425664" cy="783291"/>
           </a:xfrm>
           <a:prstGeom prst="rect">
             <a:avLst/>
@@ -25744,26 +26375,56 @@
           <a:noFill/>
         </p:spPr>
         <p:txBody>
-          <a:bodyPr wrap="none" lIns="18288" rIns="18288" tIns="18288" bIns="18288">
+          <a:bodyPr wrap="none" lIns="18288" tIns="18288" rIns="18288" bIns="18288">
             <a:spAutoFit/>
           </a:bodyPr>
           <a:lstStyle/>
           <a:p>
             <a:r>
-              <a:rPr sz="1250" b="0">
-                <a:solidFill>
-                  <a:srgbClr val="94A3B8"/>
+              <a:rPr sz="1250" b="0" dirty="0" err="1">
+                <a:solidFill>
+                  <a:srgbClr val="A78BFA"/>
                 </a:solidFill>
                 <a:latin typeface="Aptos"/>
               </a:rPr>
               <a:t>DistilBERT</a:t>
             </a:r>
-            <a:br/>
-            <a:r>
-              <a:t>distilbert-base-uncased</a:t>
-            </a:r>
-            <a:br/>
-            <a:r>
+            <a:br>
+              <a:rPr dirty="0">
+                <a:solidFill>
+                  <a:srgbClr val="A78BFA"/>
+                </a:solidFill>
+              </a:rPr>
+            </a:br>
+            <a:r>
+              <a:rPr dirty="0" err="1">
+                <a:solidFill>
+                  <a:srgbClr val="A78BFA"/>
+                </a:solidFill>
+              </a:rPr>
+              <a:t>distilbert</a:t>
+            </a:r>
+            <a:r>
+              <a:rPr dirty="0">
+                <a:solidFill>
+                  <a:srgbClr val="A78BFA"/>
+                </a:solidFill>
+              </a:rPr>
+              <a:t>-base-uncased</a:t>
+            </a:r>
+            <a:br>
+              <a:rPr dirty="0">
+                <a:solidFill>
+                  <a:srgbClr val="A78BFA"/>
+                </a:solidFill>
+              </a:rPr>
+            </a:br>
+            <a:r>
+              <a:rPr dirty="0">
+                <a:solidFill>
+                  <a:srgbClr val="A78BFA"/>
+                </a:solidFill>
+              </a:rPr>
               <a:t>Rating-band classification</a:t>
             </a:r>
           </a:p>
@@ -25811,6 +26472,7 @@
           <a:lstStyle/>
           <a:p>
             <a:pPr algn="ctr"/>
+            <a:endParaRPr/>
           </a:p>
         </p:txBody>
       </p:sp>
@@ -25854,6 +26516,7 @@
           <a:lstStyle/>
           <a:p>
             <a:pPr algn="ctr"/>
+            <a:endParaRPr/>
           </a:p>
         </p:txBody>
       </p:sp>
@@ -25874,7 +26537,7 @@
           <a:noFill/>
         </p:spPr>
         <p:txBody>
-          <a:bodyPr wrap="none" lIns="18288" rIns="18288" tIns="18288" bIns="18288">
+          <a:bodyPr wrap="none" lIns="18288" tIns="18288" rIns="18288" bIns="18288">
             <a:spAutoFit/>
           </a:bodyPr>
           <a:lstStyle/>
@@ -25899,8 +26562,8 @@
         </p:nvSpPr>
         <p:spPr>
           <a:xfrm>
-            <a:off x="6967728" y="2011680"/>
-            <a:ext cx="2423160" cy="548640"/>
+            <a:off x="6926580" y="1920240"/>
+            <a:ext cx="2308860" cy="783291"/>
           </a:xfrm>
           <a:prstGeom prst="rect">
             <a:avLst/>
@@ -25908,22 +26571,33 @@
           <a:noFill/>
         </p:spPr>
         <p:txBody>
-          <a:bodyPr wrap="none" lIns="18288" rIns="18288" tIns="18288" bIns="18288">
+          <a:bodyPr wrap="square" lIns="18288" tIns="18288" rIns="18288" bIns="18288">
             <a:spAutoFit/>
           </a:bodyPr>
           <a:lstStyle/>
           <a:p>
             <a:r>
-              <a:rPr sz="1250" b="0">
-                <a:solidFill>
-                  <a:srgbClr val="94A3B8"/>
+              <a:rPr sz="1250" b="0" dirty="0">
+                <a:solidFill>
+                  <a:srgbClr val="34D399"/>
                 </a:solidFill>
                 <a:latin typeface="Aptos"/>
               </a:rPr>
               <a:t>Frozen transformer embeddings</a:t>
             </a:r>
-            <a:br/>
-            <a:r>
+            <a:br>
+              <a:rPr dirty="0">
+                <a:solidFill>
+                  <a:srgbClr val="34D399"/>
+                </a:solidFill>
+              </a:rPr>
+            </a:br>
+            <a:r>
+              <a:rPr dirty="0">
+                <a:solidFill>
+                  <a:srgbClr val="34D399"/>
+                </a:solidFill>
+              </a:rPr>
               <a:t>+ Logistic Regression if fine-tuning fails</a:t>
             </a:r>
           </a:p>
@@ -25946,7 +26620,7 @@
           <a:noFill/>
         </p:spPr>
         <p:txBody>
-          <a:bodyPr wrap="none" lIns="18288" rIns="18288" tIns="18288" bIns="18288">
+          <a:bodyPr wrap="none" lIns="18288" tIns="18288" rIns="18288" bIns="18288">
             <a:spAutoFit/>
           </a:bodyPr>
           <a:lstStyle/>
@@ -25980,7 +26654,7 @@
           <a:noFill/>
         </p:spPr>
         <p:txBody>
-          <a:bodyPr wrap="none" lIns="73152" rIns="54864" tIns="36576" bIns="36576">
+          <a:bodyPr wrap="none" lIns="73152" tIns="36576" rIns="54864" bIns="36576">
             <a:spAutoFit/>
           </a:bodyPr>
           <a:lstStyle/>
@@ -26083,7 +26757,7 @@
           <a:noFill/>
         </p:spPr>
         <p:txBody>
-          <a:bodyPr wrap="none" lIns="18288" rIns="18288" tIns="18288" bIns="18288">
+          <a:bodyPr wrap="none" lIns="18288" tIns="18288" rIns="18288" bIns="18288">
             <a:spAutoFit/>
           </a:bodyPr>
           <a:lstStyle/>
@@ -26109,7 +26783,7 @@
         <p:spPr>
           <a:xfrm>
             <a:off x="5897880" y="4187952"/>
-            <a:ext cx="3840480" cy="731520"/>
+            <a:ext cx="3840480" cy="1083374"/>
           </a:xfrm>
           <a:prstGeom prst="rect">
             <a:avLst/>
@@ -26117,13 +26791,13 @@
           <a:noFill/>
         </p:spPr>
         <p:txBody>
-          <a:bodyPr wrap="none" lIns="18288" rIns="18288" tIns="18288" bIns="18288">
+          <a:bodyPr wrap="square" lIns="18288" tIns="18288" rIns="18288" bIns="18288">
             <a:spAutoFit/>
           </a:bodyPr>
           <a:lstStyle/>
           <a:p>
             <a:r>
-              <a:rPr sz="1700" b="0">
+              <a:rPr sz="1700" b="0" dirty="0">
                 <a:solidFill>
                   <a:srgbClr val="94A3B8"/>
                 </a:solidFill>
@@ -26463,7 +27137,7 @@
 </file>
 
 <file path=ppt/theme/theme2.xml><?xml version="1.0" encoding="utf-8"?>
-<a:theme xmlns:a="http://schemas.openxmlformats.org/drawingml/2006/main" name="Office Theme">
+<a:theme xmlns:a="http://schemas.openxmlformats.org/drawingml/2006/main" name="Office Teması">
   <a:themeElements>
     <a:clrScheme name="Office">
       <a:dk1>
@@ -26473,44 +27147,44 @@
         <a:sysClr val="window" lastClr="FFFFFF"/>
       </a:lt1>
       <a:dk2>
-        <a:srgbClr val="1F497D"/>
+        <a:srgbClr val="44546A"/>
       </a:dk2>
       <a:lt2>
-        <a:srgbClr val="EEECE1"/>
+        <a:srgbClr val="E7E6E6"/>
       </a:lt2>
       <a:accent1>
-        <a:srgbClr val="4F81BD"/>
+        <a:srgbClr val="4472C4"/>
       </a:accent1>
       <a:accent2>
-        <a:srgbClr val="C0504D"/>
+        <a:srgbClr val="ED7D31"/>
       </a:accent2>
       <a:accent3>
-        <a:srgbClr val="9BBB59"/>
+        <a:srgbClr val="A5A5A5"/>
       </a:accent3>
       <a:accent4>
-        <a:srgbClr val="8064A2"/>
+        <a:srgbClr val="FFC000"/>
       </a:accent4>
       <a:accent5>
-        <a:srgbClr val="4BACC6"/>
+        <a:srgbClr val="5B9BD5"/>
       </a:accent5>
       <a:accent6>
-        <a:srgbClr val="F79646"/>
+        <a:srgbClr val="70AD47"/>
       </a:accent6>
       <a:hlink>
-        <a:srgbClr val="0000FF"/>
+        <a:srgbClr val="0563C1"/>
       </a:hlink>
       <a:folHlink>
-        <a:srgbClr val="800080"/>
+        <a:srgbClr val="954F72"/>
       </a:folHlink>
     </a:clrScheme>
     <a:fontScheme name="Office">
       <a:majorFont>
-        <a:latin typeface="Calibri"/>
+        <a:latin typeface="Calibri Light" panose="020F0302020204030204"/>
         <a:ea typeface=""/>
         <a:cs typeface=""/>
-        <a:font script="Jpan" typeface="ＭＳ Ｐゴシック"/>
+        <a:font script="Jpan" typeface="游ゴシック Light"/>
         <a:font script="Hang" typeface="맑은 고딕"/>
-        <a:font script="Hans" typeface="宋体"/>
+        <a:font script="Hans" typeface="等线 Light"/>
         <a:font script="Hant" typeface="新細明體"/>
         <a:font script="Arab" typeface="Times New Roman"/>
         <a:font script="Hebr" typeface="Times New Roman"/>
@@ -26538,14 +27212,31 @@
         <a:font script="Viet" typeface="Times New Roman"/>
         <a:font script="Uigh" typeface="Microsoft Uighur"/>
         <a:font script="Geor" typeface="Sylfaen"/>
+        <a:font script="Armn" typeface="Arial"/>
+        <a:font script="Bugi" typeface="Leelawadee UI"/>
+        <a:font script="Bopo" typeface="Microsoft JhengHei"/>
+        <a:font script="Java" typeface="Javanese Text"/>
+        <a:font script="Lisu" typeface="Segoe UI"/>
+        <a:font script="Mymr" typeface="Myanmar Text"/>
+        <a:font script="Nkoo" typeface="Ebrima"/>
+        <a:font script="Olck" typeface="Nirmala UI"/>
+        <a:font script="Osma" typeface="Ebrima"/>
+        <a:font script="Phag" typeface="Phagspa"/>
+        <a:font script="Syrn" typeface="Estrangelo Edessa"/>
+        <a:font script="Syrj" typeface="Estrangelo Edessa"/>
+        <a:font script="Syre" typeface="Estrangelo Edessa"/>
+        <a:font script="Sora" typeface="Nirmala UI"/>
+        <a:font script="Tale" typeface="Microsoft Tai Le"/>
+        <a:font script="Talu" typeface="Microsoft New Tai Lue"/>
+        <a:font script="Tfng" typeface="Ebrima"/>
       </a:majorFont>
       <a:minorFont>
-        <a:latin typeface="Calibri"/>
+        <a:latin typeface="Calibri" panose="020F0502020204030204"/>
         <a:ea typeface=""/>
         <a:cs typeface=""/>
-        <a:font script="Jpan" typeface="ＭＳ Ｐゴシック"/>
+        <a:font script="Jpan" typeface="游ゴシック"/>
         <a:font script="Hang" typeface="맑은 고딕"/>
-        <a:font script="Hans" typeface="宋体"/>
+        <a:font script="Hans" typeface="等线"/>
         <a:font script="Hant" typeface="新細明體"/>
         <a:font script="Arab" typeface="Arial"/>
         <a:font script="Hebr" typeface="Arial"/>
@@ -26573,6 +27264,23 @@
         <a:font script="Viet" typeface="Arial"/>
         <a:font script="Uigh" typeface="Microsoft Uighur"/>
         <a:font script="Geor" typeface="Sylfaen"/>
+        <a:font script="Armn" typeface="Arial"/>
+        <a:font script="Bugi" typeface="Leelawadee UI"/>
+        <a:font script="Bopo" typeface="Microsoft JhengHei"/>
+        <a:font script="Java" typeface="Javanese Text"/>
+        <a:font script="Lisu" typeface="Segoe UI"/>
+        <a:font script="Mymr" typeface="Myanmar Text"/>
+        <a:font script="Nkoo" typeface="Ebrima"/>
+        <a:font script="Olck" typeface="Nirmala UI"/>
+        <a:font script="Osma" typeface="Ebrima"/>
+        <a:font script="Phag" typeface="Phagspa"/>
+        <a:font script="Syrn" typeface="Estrangelo Edessa"/>
+        <a:font script="Syrj" typeface="Estrangelo Edessa"/>
+        <a:font script="Syre" typeface="Estrangelo Edessa"/>
+        <a:font script="Sora" typeface="Nirmala UI"/>
+        <a:font script="Tale" typeface="Microsoft Tai Le"/>
+        <a:font script="Talu" typeface="Microsoft New Tai Lue"/>
+        <a:font script="Tfng" typeface="Ebrima"/>
       </a:minorFont>
     </a:fontScheme>
     <a:fmtScheme name="Office">
@@ -26584,200 +27292,141 @@
           <a:gsLst>
             <a:gs pos="0">
               <a:schemeClr val="phClr">
-                <a:tint val="50000"/>
-                <a:satMod val="300000"/>
+                <a:lumMod val="110000"/>
+                <a:satMod val="105000"/>
+                <a:tint val="67000"/>
               </a:schemeClr>
             </a:gs>
-            <a:gs pos="35000">
+            <a:gs pos="50000">
               <a:schemeClr val="phClr">
-                <a:tint val="37000"/>
-                <a:satMod val="300000"/>
+                <a:lumMod val="105000"/>
+                <a:satMod val="103000"/>
+                <a:tint val="73000"/>
               </a:schemeClr>
             </a:gs>
             <a:gs pos="100000">
               <a:schemeClr val="phClr">
-                <a:tint val="15000"/>
-                <a:satMod val="350000"/>
+                <a:lumMod val="105000"/>
+                <a:satMod val="109000"/>
+                <a:tint val="81000"/>
               </a:schemeClr>
             </a:gs>
           </a:gsLst>
-          <a:lin ang="16200000" scaled="1"/>
+          <a:lin ang="5400000" scaled="0"/>
         </a:gradFill>
         <a:gradFill rotWithShape="1">
           <a:gsLst>
             <a:gs pos="0">
               <a:schemeClr val="phClr">
-                <a:tint val="100000"/>
+                <a:satMod val="103000"/>
+                <a:lumMod val="102000"/>
+                <a:tint val="94000"/>
+              </a:schemeClr>
+            </a:gs>
+            <a:gs pos="50000">
+              <a:schemeClr val="phClr">
+                <a:satMod val="110000"/>
+                <a:lumMod val="100000"/>
                 <a:shade val="100000"/>
-                <a:satMod val="130000"/>
               </a:schemeClr>
             </a:gs>
             <a:gs pos="100000">
               <a:schemeClr val="phClr">
-                <a:tint val="50000"/>
-                <a:shade val="100000"/>
-                <a:satMod val="350000"/>
+                <a:lumMod val="99000"/>
+                <a:satMod val="120000"/>
+                <a:shade val="78000"/>
               </a:schemeClr>
             </a:gs>
           </a:gsLst>
-          <a:lin ang="16200000" scaled="0"/>
+          <a:lin ang="5400000" scaled="0"/>
         </a:gradFill>
       </a:fillStyleLst>
       <a:lnStyleLst>
-        <a:ln w="9525" cap="flat" cmpd="sng" algn="ctr">
-          <a:solidFill>
-            <a:schemeClr val="phClr">
-              <a:shade val="95000"/>
-              <a:satMod val="105000"/>
-            </a:schemeClr>
-          </a:solidFill>
-          <a:prstDash val="solid"/>
-        </a:ln>
-        <a:ln w="25400" cap="flat" cmpd="sng" algn="ctr">
+        <a:ln w="6350" cap="flat" cmpd="sng" algn="ctr">
           <a:solidFill>
             <a:schemeClr val="phClr"/>
           </a:solidFill>
           <a:prstDash val="solid"/>
+          <a:miter lim="800000"/>
         </a:ln>
-        <a:ln w="38100" cap="flat" cmpd="sng" algn="ctr">
+        <a:ln w="12700" cap="flat" cmpd="sng" algn="ctr">
           <a:solidFill>
             <a:schemeClr val="phClr"/>
           </a:solidFill>
           <a:prstDash val="solid"/>
+          <a:miter lim="800000"/>
+        </a:ln>
+        <a:ln w="19050" cap="flat" cmpd="sng" algn="ctr">
+          <a:solidFill>
+            <a:schemeClr val="phClr"/>
+          </a:solidFill>
+          <a:prstDash val="solid"/>
+          <a:miter lim="800000"/>
         </a:ln>
       </a:lnStyleLst>
       <a:effectStyleLst>
         <a:effectStyle>
+          <a:effectLst/>
+        </a:effectStyle>
+        <a:effectStyle>
+          <a:effectLst/>
+        </a:effectStyle>
+        <a:effectStyle>
           <a:effectLst>
-            <a:outerShdw blurRad="40000" dist="20000" dir="5400000" rotWithShape="0">
+            <a:outerShdw blurRad="57150" dist="19050" dir="5400000" algn="ctr" rotWithShape="0">
               <a:srgbClr val="000000">
-                <a:alpha val="38000"/>
+                <a:alpha val="63000"/>
               </a:srgbClr>
             </a:outerShdw>
           </a:effectLst>
-        </a:effectStyle>
-        <a:effectStyle>
-          <a:effectLst>
-            <a:outerShdw blurRad="40000" dist="23000" dir="5400000" rotWithShape="0">
-              <a:srgbClr val="000000">
-                <a:alpha val="35000"/>
-              </a:srgbClr>
-            </a:outerShdw>
-          </a:effectLst>
-        </a:effectStyle>
-        <a:effectStyle>
-          <a:effectLst>
-            <a:outerShdw blurRad="40000" dist="23000" dir="5400000" rotWithShape="0">
-              <a:srgbClr val="000000">
-                <a:alpha val="35000"/>
-              </a:srgbClr>
-            </a:outerShdw>
-          </a:effectLst>
-          <a:scene3d>
-            <a:camera prst="orthographicFront">
-              <a:rot lat="0" lon="0" rev="0"/>
-            </a:camera>
-            <a:lightRig rig="threePt" dir="t">
-              <a:rot lat="0" lon="0" rev="1200000"/>
-            </a:lightRig>
-          </a:scene3d>
-          <a:sp3d>
-            <a:bevelT w="63500" h="25400"/>
-          </a:sp3d>
         </a:effectStyle>
       </a:effectStyleLst>
       <a:bgFillStyleLst>
         <a:solidFill>
           <a:schemeClr val="phClr"/>
         </a:solidFill>
+        <a:solidFill>
+          <a:schemeClr val="phClr">
+            <a:tint val="95000"/>
+            <a:satMod val="170000"/>
+          </a:schemeClr>
+        </a:solidFill>
         <a:gradFill rotWithShape="1">
           <a:gsLst>
             <a:gs pos="0">
               <a:schemeClr val="phClr">
-                <a:tint val="40000"/>
-                <a:satMod val="350000"/>
+                <a:tint val="93000"/>
+                <a:satMod val="150000"/>
+                <a:shade val="98000"/>
+                <a:lumMod val="102000"/>
               </a:schemeClr>
             </a:gs>
-            <a:gs pos="40000">
+            <a:gs pos="50000">
               <a:schemeClr val="phClr">
-                <a:tint val="45000"/>
-                <a:shade val="99000"/>
-                <a:satMod val="350000"/>
+                <a:tint val="98000"/>
+                <a:satMod val="130000"/>
+                <a:shade val="90000"/>
+                <a:lumMod val="103000"/>
               </a:schemeClr>
             </a:gs>
             <a:gs pos="100000">
               <a:schemeClr val="phClr">
-                <a:shade val="20000"/>
-                <a:satMod val="255000"/>
+                <a:shade val="63000"/>
+                <a:satMod val="120000"/>
               </a:schemeClr>
             </a:gs>
           </a:gsLst>
-          <a:path path="circle">
-            <a:fillToRect l="50000" t="-80000" r="50000" b="180000"/>
-          </a:path>
-        </a:gradFill>
-        <a:gradFill rotWithShape="1">
-          <a:gsLst>
-            <a:gs pos="0">
-              <a:schemeClr val="phClr">
-                <a:tint val="80000"/>
-                <a:satMod val="300000"/>
-              </a:schemeClr>
-            </a:gs>
-            <a:gs pos="100000">
-              <a:schemeClr val="phClr">
-                <a:shade val="30000"/>
-                <a:satMod val="200000"/>
-              </a:schemeClr>
-            </a:gs>
-          </a:gsLst>
-          <a:path path="circle">
-            <a:fillToRect l="50000" t="50000" r="50000" b="50000"/>
-          </a:path>
+          <a:lin ang="5400000" scaled="0"/>
         </a:gradFill>
       </a:bgFillStyleLst>
     </a:fmtScheme>
   </a:themeElements>
-  <a:objectDefaults>
-    <a:spDef>
-      <a:spPr/>
-      <a:bodyPr/>
-      <a:lstStyle/>
-      <a:style>
-        <a:lnRef idx="1">
-          <a:schemeClr val="accent1"/>
-        </a:lnRef>
-        <a:fillRef idx="3">
-          <a:schemeClr val="accent1"/>
-        </a:fillRef>
-        <a:effectRef idx="2">
-          <a:schemeClr val="accent1"/>
-        </a:effectRef>
-        <a:fontRef idx="minor">
-          <a:schemeClr val="lt1"/>
-        </a:fontRef>
-      </a:style>
-    </a:spDef>
-    <a:lnDef>
-      <a:spPr/>
-      <a:bodyPr/>
-      <a:lstStyle/>
-      <a:style>
-        <a:lnRef idx="2">
-          <a:schemeClr val="accent1"/>
-        </a:lnRef>
-        <a:fillRef idx="0">
-          <a:schemeClr val="accent1"/>
-        </a:fillRef>
-        <a:effectRef idx="1">
-          <a:schemeClr val="accent1"/>
-        </a:effectRef>
-        <a:fontRef idx="minor">
-          <a:schemeClr val="tx1"/>
-        </a:fontRef>
-      </a:style>
-    </a:lnDef>
-  </a:objectDefaults>
+  <a:objectDefaults/>
   <a:extraClrSchemeLst/>
+  <a:extLst>
+    <a:ext uri="{05A4C25C-085E-4340-85A3-A5531E510DB2}">
+      <thm15:themeFamily xmlns:thm15="http://schemas.microsoft.com/office/thememl/2012/main" name="Office Theme" id="{62F939B6-93AF-4DB8-9C6B-D6C7DFDC589F}" vid="{4A3C46E8-61CC-4603-A589-7422A47A8E4A}"/>
+    </a:ext>
+  </a:extLst>
 </a:theme>
 </file>